--- a/assets/images/2021-04-20-MCP.pptx
+++ b/assets/images/2021-04-20-MCP.pptx
@@ -7,6 +7,7 @@
   <p:sldIdLst>
     <p:sldId id="256" r:id="rId2"/>
     <p:sldId id="257" r:id="rId3"/>
+    <p:sldId id="258" r:id="rId4"/>
   </p:sldIdLst>
   <p:sldSz cx="12192000" cy="6858000"/>
   <p:notesSz cx="6858000" cy="9144000"/>
@@ -105,6 +106,11 @@
       </a:defRPr>
     </a:lvl9pPr>
   </p:defaultTextStyle>
+  <p:extLst>
+    <p:ext uri="{EFAFB233-063F-42B5-8137-9DF3F51BA10A}">
+      <p15:sldGuideLst xmlns:p15="http://schemas.microsoft.com/office/powerpoint/2012/main"/>
+    </p:ext>
+  </p:extLst>
 </p:presentation>
 </file>
 
@@ -255,7 +261,7 @@
           <a:p>
             <a:fld id="{495A08D1-C48C-4D80-A81E-E1D362F36B1F}" type="datetimeFigureOut">
               <a:rPr lang="ko-KR" altLang="en-US" smtClean="0"/>
-              <a:t>2021-04-19</a:t>
+              <a:t>2021-04-23</a:t>
             </a:fld>
             <a:endParaRPr lang="ko-KR" altLang="en-US"/>
           </a:p>
@@ -453,7 +459,7 @@
           <a:p>
             <a:fld id="{495A08D1-C48C-4D80-A81E-E1D362F36B1F}" type="datetimeFigureOut">
               <a:rPr lang="ko-KR" altLang="en-US" smtClean="0"/>
-              <a:t>2021-04-19</a:t>
+              <a:t>2021-04-23</a:t>
             </a:fld>
             <a:endParaRPr lang="ko-KR" altLang="en-US"/>
           </a:p>
@@ -661,7 +667,7 @@
           <a:p>
             <a:fld id="{495A08D1-C48C-4D80-A81E-E1D362F36B1F}" type="datetimeFigureOut">
               <a:rPr lang="ko-KR" altLang="en-US" smtClean="0"/>
-              <a:t>2021-04-19</a:t>
+              <a:t>2021-04-23</a:t>
             </a:fld>
             <a:endParaRPr lang="ko-KR" altLang="en-US"/>
           </a:p>
@@ -859,7 +865,7 @@
           <a:p>
             <a:fld id="{495A08D1-C48C-4D80-A81E-E1D362F36B1F}" type="datetimeFigureOut">
               <a:rPr lang="ko-KR" altLang="en-US" smtClean="0"/>
-              <a:t>2021-04-19</a:t>
+              <a:t>2021-04-23</a:t>
             </a:fld>
             <a:endParaRPr lang="ko-KR" altLang="en-US"/>
           </a:p>
@@ -1134,7 +1140,7 @@
           <a:p>
             <a:fld id="{495A08D1-C48C-4D80-A81E-E1D362F36B1F}" type="datetimeFigureOut">
               <a:rPr lang="ko-KR" altLang="en-US" smtClean="0"/>
-              <a:t>2021-04-19</a:t>
+              <a:t>2021-04-23</a:t>
             </a:fld>
             <a:endParaRPr lang="ko-KR" altLang="en-US"/>
           </a:p>
@@ -1399,7 +1405,7 @@
           <a:p>
             <a:fld id="{495A08D1-C48C-4D80-A81E-E1D362F36B1F}" type="datetimeFigureOut">
               <a:rPr lang="ko-KR" altLang="en-US" smtClean="0"/>
-              <a:t>2021-04-19</a:t>
+              <a:t>2021-04-23</a:t>
             </a:fld>
             <a:endParaRPr lang="ko-KR" altLang="en-US"/>
           </a:p>
@@ -1811,7 +1817,7 @@
           <a:p>
             <a:fld id="{495A08D1-C48C-4D80-A81E-E1D362F36B1F}" type="datetimeFigureOut">
               <a:rPr lang="ko-KR" altLang="en-US" smtClean="0"/>
-              <a:t>2021-04-19</a:t>
+              <a:t>2021-04-23</a:t>
             </a:fld>
             <a:endParaRPr lang="ko-KR" altLang="en-US"/>
           </a:p>
@@ -1952,7 +1958,7 @@
           <a:p>
             <a:fld id="{495A08D1-C48C-4D80-A81E-E1D362F36B1F}" type="datetimeFigureOut">
               <a:rPr lang="ko-KR" altLang="en-US" smtClean="0"/>
-              <a:t>2021-04-19</a:t>
+              <a:t>2021-04-23</a:t>
             </a:fld>
             <a:endParaRPr lang="ko-KR" altLang="en-US"/>
           </a:p>
@@ -2065,7 +2071,7 @@
           <a:p>
             <a:fld id="{495A08D1-C48C-4D80-A81E-E1D362F36B1F}" type="datetimeFigureOut">
               <a:rPr lang="ko-KR" altLang="en-US" smtClean="0"/>
-              <a:t>2021-04-19</a:t>
+              <a:t>2021-04-23</a:t>
             </a:fld>
             <a:endParaRPr lang="ko-KR" altLang="en-US"/>
           </a:p>
@@ -2376,7 +2382,7 @@
           <a:p>
             <a:fld id="{495A08D1-C48C-4D80-A81E-E1D362F36B1F}" type="datetimeFigureOut">
               <a:rPr lang="ko-KR" altLang="en-US" smtClean="0"/>
-              <a:t>2021-04-19</a:t>
+              <a:t>2021-04-23</a:t>
             </a:fld>
             <a:endParaRPr lang="ko-KR" altLang="en-US"/>
           </a:p>
@@ -2664,7 +2670,7 @@
           <a:p>
             <a:fld id="{495A08D1-C48C-4D80-A81E-E1D362F36B1F}" type="datetimeFigureOut">
               <a:rPr lang="ko-KR" altLang="en-US" smtClean="0"/>
-              <a:t>2021-04-19</a:t>
+              <a:t>2021-04-23</a:t>
             </a:fld>
             <a:endParaRPr lang="ko-KR" altLang="en-US"/>
           </a:p>
@@ -2905,7 +2911,7 @@
           <a:p>
             <a:fld id="{495A08D1-C48C-4D80-A81E-E1D362F36B1F}" type="datetimeFigureOut">
               <a:rPr lang="ko-KR" altLang="en-US" smtClean="0"/>
-              <a:t>2021-04-19</a:t>
+              <a:t>2021-04-23</a:t>
             </a:fld>
             <a:endParaRPr lang="ko-KR" altLang="en-US"/>
           </a:p>
@@ -12713,6 +12719,5086 @@
 </p:sld>
 </file>
 
+<file path=ppt/slides/slide3.xml><?xml version="1.0" encoding="utf-8"?>
+<p:sld xmlns:a="http://schemas.openxmlformats.org/drawingml/2006/main" xmlns:r="http://schemas.openxmlformats.org/officeDocument/2006/relationships" xmlns:p="http://schemas.openxmlformats.org/presentationml/2006/main">
+  <p:cSld>
+    <p:spTree>
+      <p:nvGrpSpPr>
+        <p:cNvPr id="1" name=""/>
+        <p:cNvGrpSpPr/>
+        <p:nvPr/>
+      </p:nvGrpSpPr>
+      <p:grpSpPr>
+        <a:xfrm>
+          <a:off x="0" y="0"/>
+          <a:ext cx="0" cy="0"/>
+          <a:chOff x="0" y="0"/>
+          <a:chExt cx="0" cy="0"/>
+        </a:xfrm>
+      </p:grpSpPr>
+      <p:graphicFrame>
+        <p:nvGraphicFramePr>
+          <p:cNvPr id="4" name="표 3">
+            <a:extLst>
+              <a:ext uri="{FF2B5EF4-FFF2-40B4-BE49-F238E27FC236}">
+                <a16:creationId xmlns:a16="http://schemas.microsoft.com/office/drawing/2014/main" id="{A3029A99-B360-4763-889E-980A9D82513F}"/>
+              </a:ext>
+            </a:extLst>
+          </p:cNvPr>
+          <p:cNvGraphicFramePr>
+            <a:graphicFrameLocks noGrp="1"/>
+          </p:cNvGraphicFramePr>
+          <p:nvPr>
+            <p:extLst>
+              <p:ext uri="{D42A27DB-BD31-4B8C-83A1-F6EECF244321}">
+                <p14:modId xmlns:p14="http://schemas.microsoft.com/office/powerpoint/2010/main" val="3764109181"/>
+              </p:ext>
+            </p:extLst>
+          </p:nvPr>
+        </p:nvGraphicFramePr>
+        <p:xfrm>
+          <a:off x="3080276" y="4191302"/>
+          <a:ext cx="1008000" cy="2520000"/>
+        </p:xfrm>
+        <a:graphic>
+          <a:graphicData uri="http://schemas.openxmlformats.org/drawingml/2006/table">
+            <a:tbl>
+              <a:tblPr firstRow="1" bandRow="1">
+                <a:tableStyleId>{5940675A-B579-460E-94D1-54222C63F5DA}</a:tableStyleId>
+              </a:tblPr>
+              <a:tblGrid>
+                <a:gridCol w="252000">
+                  <a:extLst>
+                    <a:ext uri="{9D8B030D-6E8A-4147-A177-3AD203B41FA5}">
+                      <a16:colId xmlns:a16="http://schemas.microsoft.com/office/drawing/2014/main" val="1378105641"/>
+                    </a:ext>
+                  </a:extLst>
+                </a:gridCol>
+                <a:gridCol w="252000">
+                  <a:extLst>
+                    <a:ext uri="{9D8B030D-6E8A-4147-A177-3AD203B41FA5}">
+                      <a16:colId xmlns:a16="http://schemas.microsoft.com/office/drawing/2014/main" val="3111383925"/>
+                    </a:ext>
+                  </a:extLst>
+                </a:gridCol>
+                <a:gridCol w="252000">
+                  <a:extLst>
+                    <a:ext uri="{9D8B030D-6E8A-4147-A177-3AD203B41FA5}">
+                      <a16:colId xmlns:a16="http://schemas.microsoft.com/office/drawing/2014/main" val="2886097305"/>
+                    </a:ext>
+                  </a:extLst>
+                </a:gridCol>
+                <a:gridCol w="252000">
+                  <a:extLst>
+                    <a:ext uri="{9D8B030D-6E8A-4147-A177-3AD203B41FA5}">
+                      <a16:colId xmlns:a16="http://schemas.microsoft.com/office/drawing/2014/main" val="2848349677"/>
+                    </a:ext>
+                  </a:extLst>
+                </a:gridCol>
+              </a:tblGrid>
+              <a:tr h="252000">
+                <a:tc>
+                  <a:txBody>
+                    <a:bodyPr/>
+                    <a:lstStyle/>
+                    <a:p>
+                      <a:pPr algn="ctr" latinLnBrk="1"/>
+                      <a:endParaRPr lang="ko-KR" altLang="en-US" sz="1600" dirty="0"/>
+                    </a:p>
+                  </a:txBody>
+                  <a:tcPr marL="0" marR="0" marT="0" marB="0" anchor="ctr">
+                    <a:solidFill>
+                      <a:schemeClr val="bg1">
+                        <a:lumMod val="85000"/>
+                      </a:schemeClr>
+                    </a:solidFill>
+                  </a:tcPr>
+                </a:tc>
+                <a:tc>
+                  <a:txBody>
+                    <a:bodyPr/>
+                    <a:lstStyle/>
+                    <a:p>
+                      <a:pPr algn="ctr" latinLnBrk="1"/>
+                      <a:r>
+                        <a:rPr lang="en-US" altLang="ko-KR" sz="1600" dirty="0"/>
+                        <a:t>1</a:t>
+                      </a:r>
+                      <a:endParaRPr lang="ko-KR" altLang="en-US" sz="1600" dirty="0"/>
+                    </a:p>
+                  </a:txBody>
+                  <a:tcPr marL="0" marR="0" marT="0" marB="0" anchor="ctr">
+                    <a:solidFill>
+                      <a:schemeClr val="bg1">
+                        <a:lumMod val="85000"/>
+                      </a:schemeClr>
+                    </a:solidFill>
+                  </a:tcPr>
+                </a:tc>
+                <a:tc>
+                  <a:txBody>
+                    <a:bodyPr/>
+                    <a:lstStyle/>
+                    <a:p>
+                      <a:pPr algn="ctr" latinLnBrk="1"/>
+                      <a:r>
+                        <a:rPr lang="en-US" altLang="ko-KR" sz="1600" dirty="0"/>
+                        <a:t>2</a:t>
+                      </a:r>
+                      <a:endParaRPr lang="ko-KR" altLang="en-US" sz="1600" dirty="0"/>
+                    </a:p>
+                  </a:txBody>
+                  <a:tcPr marL="0" marR="0" marT="0" marB="0" anchor="ctr">
+                    <a:solidFill>
+                      <a:schemeClr val="bg1">
+                        <a:lumMod val="85000"/>
+                      </a:schemeClr>
+                    </a:solidFill>
+                  </a:tcPr>
+                </a:tc>
+                <a:tc>
+                  <a:txBody>
+                    <a:bodyPr/>
+                    <a:lstStyle/>
+                    <a:p>
+                      <a:pPr algn="ctr" latinLnBrk="1"/>
+                      <a:r>
+                        <a:rPr lang="en-US" altLang="ko-KR" sz="1600"/>
+                        <a:t>3</a:t>
+                      </a:r>
+                      <a:endParaRPr lang="ko-KR" altLang="en-US" sz="1600" dirty="0"/>
+                    </a:p>
+                  </a:txBody>
+                  <a:tcPr marL="0" marR="0" marT="0" marB="0" anchor="ctr">
+                    <a:solidFill>
+                      <a:schemeClr val="bg1">
+                        <a:lumMod val="85000"/>
+                      </a:schemeClr>
+                    </a:solidFill>
+                  </a:tcPr>
+                </a:tc>
+                <a:extLst>
+                  <a:ext uri="{0D108BD9-81ED-4DB2-BD59-A6C34878D82A}">
+                    <a16:rowId xmlns:a16="http://schemas.microsoft.com/office/drawing/2014/main" val="1170477919"/>
+                  </a:ext>
+                </a:extLst>
+              </a:tr>
+              <a:tr h="252000">
+                <a:tc>
+                  <a:txBody>
+                    <a:bodyPr/>
+                    <a:lstStyle/>
+                    <a:p>
+                      <a:pPr algn="ctr" latinLnBrk="1"/>
+                      <a:r>
+                        <a:rPr lang="en-US" altLang="ko-KR" sz="1600" dirty="0"/>
+                        <a:t>1</a:t>
+                      </a:r>
+                      <a:endParaRPr lang="ko-KR" altLang="en-US" sz="1600" dirty="0"/>
+                    </a:p>
+                  </a:txBody>
+                  <a:tcPr marL="0" marR="0" marT="0" marB="0" anchor="ctr">
+                    <a:solidFill>
+                      <a:schemeClr val="bg1">
+                        <a:lumMod val="85000"/>
+                      </a:schemeClr>
+                    </a:solidFill>
+                  </a:tcPr>
+                </a:tc>
+                <a:tc>
+                  <a:txBody>
+                    <a:bodyPr/>
+                    <a:lstStyle/>
+                    <a:p>
+                      <a:pPr algn="ctr" latinLnBrk="1"/>
+                      <a:r>
+                        <a:rPr kumimoji="0" lang="en-US" altLang="ko-KR" sz="1400" b="0" i="0" u="none" strike="noStrike" kern="1200" cap="none" spc="0" normalizeH="0" baseline="0" noProof="0">
+                          <a:ln>
+                            <a:noFill/>
+                          </a:ln>
+                          <a:solidFill>
+                            <a:prstClr val="black"/>
+                          </a:solidFill>
+                          <a:effectLst/>
+                          <a:uLnTx/>
+                          <a:uFillTx/>
+                          <a:latin typeface="Calibri" panose="020F0502020204030204"/>
+                          <a:ea typeface="맑은 고딕" panose="020B0503020000020004" pitchFamily="50" charset="-127"/>
+                          <a:cs typeface="+mn-cs"/>
+                        </a:rPr>
+                        <a:t>1/3</a:t>
+                      </a:r>
+                      <a:endParaRPr lang="ko-KR" altLang="en-US" sz="1400" dirty="0"/>
+                    </a:p>
+                  </a:txBody>
+                  <a:tcPr marL="0" marR="0" marT="0" marB="0" anchor="ctr">
+                    <a:solidFill>
+                      <a:srgbClr val="C00000"/>
+                    </a:solidFill>
+                  </a:tcPr>
+                </a:tc>
+                <a:tc>
+                  <a:txBody>
+                    <a:bodyPr/>
+                    <a:lstStyle/>
+                    <a:p>
+                      <a:pPr algn="ctr" latinLnBrk="1"/>
+                      <a:r>
+                        <a:rPr kumimoji="0" lang="en-US" altLang="ko-KR" sz="1400" b="0" i="0" u="none" strike="noStrike" kern="1200" cap="none" spc="0" normalizeH="0" baseline="0" noProof="0">
+                          <a:ln>
+                            <a:noFill/>
+                          </a:ln>
+                          <a:solidFill>
+                            <a:prstClr val="black"/>
+                          </a:solidFill>
+                          <a:effectLst/>
+                          <a:uLnTx/>
+                          <a:uFillTx/>
+                          <a:latin typeface="Calibri" panose="020F0502020204030204"/>
+                          <a:ea typeface="맑은 고딕" panose="020B0503020000020004" pitchFamily="50" charset="-127"/>
+                          <a:cs typeface="+mn-cs"/>
+                        </a:rPr>
+                        <a:t>1/3</a:t>
+                      </a:r>
+                      <a:endParaRPr lang="ko-KR" altLang="en-US" sz="1400" dirty="0"/>
+                    </a:p>
+                  </a:txBody>
+                  <a:tcPr marL="0" marR="0" marT="0" marB="0" anchor="ctr">
+                    <a:noFill/>
+                  </a:tcPr>
+                </a:tc>
+                <a:tc>
+                  <a:txBody>
+                    <a:bodyPr/>
+                    <a:lstStyle/>
+                    <a:p>
+                      <a:pPr algn="ctr" latinLnBrk="1"/>
+                      <a:r>
+                        <a:rPr kumimoji="0" lang="en-US" altLang="ko-KR" sz="1400" b="0" i="0" u="none" strike="noStrike" kern="1200" cap="none" spc="0" normalizeH="0" baseline="0" noProof="0">
+                          <a:ln>
+                            <a:noFill/>
+                          </a:ln>
+                          <a:solidFill>
+                            <a:prstClr val="black"/>
+                          </a:solidFill>
+                          <a:effectLst/>
+                          <a:uLnTx/>
+                          <a:uFillTx/>
+                          <a:latin typeface="Calibri" panose="020F0502020204030204"/>
+                          <a:ea typeface="맑은 고딕" panose="020B0503020000020004" pitchFamily="50" charset="-127"/>
+                          <a:cs typeface="+mn-cs"/>
+                        </a:rPr>
+                        <a:t>1/3</a:t>
+                      </a:r>
+                      <a:endParaRPr lang="ko-KR" altLang="en-US" sz="1400" dirty="0"/>
+                    </a:p>
+                  </a:txBody>
+                  <a:tcPr marL="0" marR="0" marT="0" marB="0" anchor="ctr">
+                    <a:noFill/>
+                  </a:tcPr>
+                </a:tc>
+                <a:extLst>
+                  <a:ext uri="{0D108BD9-81ED-4DB2-BD59-A6C34878D82A}">
+                    <a16:rowId xmlns:a16="http://schemas.microsoft.com/office/drawing/2014/main" val="1641883786"/>
+                  </a:ext>
+                </a:extLst>
+              </a:tr>
+              <a:tr h="252000">
+                <a:tc>
+                  <a:txBody>
+                    <a:bodyPr/>
+                    <a:lstStyle/>
+                    <a:p>
+                      <a:pPr algn="ctr" latinLnBrk="1"/>
+                      <a:r>
+                        <a:rPr lang="en-US" altLang="ko-KR" sz="1600" dirty="0"/>
+                        <a:t>2</a:t>
+                      </a:r>
+                      <a:endParaRPr lang="ko-KR" altLang="en-US" sz="1600" dirty="0"/>
+                    </a:p>
+                  </a:txBody>
+                  <a:tcPr marL="0" marR="0" marT="0" marB="0" anchor="ctr">
+                    <a:solidFill>
+                      <a:schemeClr val="bg1">
+                        <a:lumMod val="85000"/>
+                      </a:schemeClr>
+                    </a:solidFill>
+                  </a:tcPr>
+                </a:tc>
+                <a:tc>
+                  <a:txBody>
+                    <a:bodyPr/>
+                    <a:lstStyle/>
+                    <a:p>
+                      <a:pPr algn="ctr" latinLnBrk="1"/>
+                      <a:r>
+                        <a:rPr kumimoji="0" lang="en-US" altLang="ko-KR" sz="1400" b="0" i="0" u="none" strike="noStrike" kern="1200" cap="none" spc="0" normalizeH="0" baseline="0" noProof="0">
+                          <a:ln>
+                            <a:noFill/>
+                          </a:ln>
+                          <a:solidFill>
+                            <a:prstClr val="black"/>
+                          </a:solidFill>
+                          <a:effectLst/>
+                          <a:uLnTx/>
+                          <a:uFillTx/>
+                          <a:latin typeface="Calibri" panose="020F0502020204030204"/>
+                          <a:ea typeface="맑은 고딕" panose="020B0503020000020004" pitchFamily="50" charset="-127"/>
+                          <a:cs typeface="+mn-cs"/>
+                        </a:rPr>
+                        <a:t>1/3</a:t>
+                      </a:r>
+                      <a:endParaRPr lang="ko-KR" altLang="en-US" sz="1400" dirty="0"/>
+                    </a:p>
+                  </a:txBody>
+                  <a:tcPr marL="0" marR="0" marT="0" marB="0" anchor="ctr">
+                    <a:solidFill>
+                      <a:srgbClr val="C00000"/>
+                    </a:solidFill>
+                  </a:tcPr>
+                </a:tc>
+                <a:tc>
+                  <a:txBody>
+                    <a:bodyPr/>
+                    <a:lstStyle/>
+                    <a:p>
+                      <a:pPr algn="ctr" latinLnBrk="1"/>
+                      <a:r>
+                        <a:rPr kumimoji="0" lang="en-US" altLang="ko-KR" sz="1400" b="0" i="0" u="none" strike="noStrike" kern="1200" cap="none" spc="0" normalizeH="0" baseline="0" noProof="0">
+                          <a:ln>
+                            <a:noFill/>
+                          </a:ln>
+                          <a:solidFill>
+                            <a:prstClr val="black"/>
+                          </a:solidFill>
+                          <a:effectLst/>
+                          <a:uLnTx/>
+                          <a:uFillTx/>
+                          <a:latin typeface="Calibri" panose="020F0502020204030204"/>
+                          <a:ea typeface="맑은 고딕" panose="020B0503020000020004" pitchFamily="50" charset="-127"/>
+                          <a:cs typeface="+mn-cs"/>
+                        </a:rPr>
+                        <a:t>1/3</a:t>
+                      </a:r>
+                      <a:endParaRPr lang="ko-KR" altLang="en-US" sz="1400" dirty="0"/>
+                    </a:p>
+                  </a:txBody>
+                  <a:tcPr marL="0" marR="0" marT="0" marB="0" anchor="ctr">
+                    <a:noFill/>
+                  </a:tcPr>
+                </a:tc>
+                <a:tc>
+                  <a:txBody>
+                    <a:bodyPr/>
+                    <a:lstStyle/>
+                    <a:p>
+                      <a:pPr algn="ctr" latinLnBrk="1"/>
+                      <a:r>
+                        <a:rPr kumimoji="0" lang="en-US" altLang="ko-KR" sz="1400" b="0" i="0" u="none" strike="noStrike" kern="1200" cap="none" spc="0" normalizeH="0" baseline="0" noProof="0">
+                          <a:ln>
+                            <a:noFill/>
+                          </a:ln>
+                          <a:solidFill>
+                            <a:prstClr val="black"/>
+                          </a:solidFill>
+                          <a:effectLst/>
+                          <a:uLnTx/>
+                          <a:uFillTx/>
+                          <a:latin typeface="Calibri" panose="020F0502020204030204"/>
+                          <a:ea typeface="맑은 고딕" panose="020B0503020000020004" pitchFamily="50" charset="-127"/>
+                          <a:cs typeface="+mn-cs"/>
+                        </a:rPr>
+                        <a:t>1/3</a:t>
+                      </a:r>
+                      <a:endParaRPr lang="ko-KR" altLang="en-US" sz="1400" dirty="0"/>
+                    </a:p>
+                  </a:txBody>
+                  <a:tcPr marL="0" marR="0" marT="0" marB="0" anchor="ctr">
+                    <a:noFill/>
+                  </a:tcPr>
+                </a:tc>
+                <a:extLst>
+                  <a:ext uri="{0D108BD9-81ED-4DB2-BD59-A6C34878D82A}">
+                    <a16:rowId xmlns:a16="http://schemas.microsoft.com/office/drawing/2014/main" val="2083158835"/>
+                  </a:ext>
+                </a:extLst>
+              </a:tr>
+              <a:tr h="252000">
+                <a:tc>
+                  <a:txBody>
+                    <a:bodyPr/>
+                    <a:lstStyle/>
+                    <a:p>
+                      <a:pPr algn="ctr" latinLnBrk="1"/>
+                      <a:r>
+                        <a:rPr lang="en-US" altLang="ko-KR" sz="1600"/>
+                        <a:t>3</a:t>
+                      </a:r>
+                      <a:endParaRPr lang="ko-KR" altLang="en-US" sz="1600" dirty="0"/>
+                    </a:p>
+                  </a:txBody>
+                  <a:tcPr marL="0" marR="0" marT="0" marB="0" anchor="ctr">
+                    <a:solidFill>
+                      <a:schemeClr val="bg1">
+                        <a:lumMod val="85000"/>
+                      </a:schemeClr>
+                    </a:solidFill>
+                  </a:tcPr>
+                </a:tc>
+                <a:tc>
+                  <a:txBody>
+                    <a:bodyPr/>
+                    <a:lstStyle/>
+                    <a:p>
+                      <a:pPr algn="ctr" latinLnBrk="1"/>
+                      <a:r>
+                        <a:rPr kumimoji="0" lang="en-US" altLang="ko-KR" sz="1400" b="0" i="0" u="none" strike="noStrike" kern="1200" cap="none" spc="0" normalizeH="0" baseline="0" noProof="0">
+                          <a:ln>
+                            <a:noFill/>
+                          </a:ln>
+                          <a:solidFill>
+                            <a:prstClr val="black"/>
+                          </a:solidFill>
+                          <a:effectLst/>
+                          <a:uLnTx/>
+                          <a:uFillTx/>
+                          <a:latin typeface="Calibri" panose="020F0502020204030204"/>
+                          <a:ea typeface="맑은 고딕" panose="020B0503020000020004" pitchFamily="50" charset="-127"/>
+                          <a:cs typeface="+mn-cs"/>
+                        </a:rPr>
+                        <a:t>1/3</a:t>
+                      </a:r>
+                      <a:endParaRPr lang="ko-KR" altLang="en-US" sz="1400" dirty="0"/>
+                    </a:p>
+                  </a:txBody>
+                  <a:tcPr marL="0" marR="0" marT="0" marB="0" anchor="ctr">
+                    <a:solidFill>
+                      <a:srgbClr val="C00000"/>
+                    </a:solidFill>
+                  </a:tcPr>
+                </a:tc>
+                <a:tc>
+                  <a:txBody>
+                    <a:bodyPr/>
+                    <a:lstStyle/>
+                    <a:p>
+                      <a:pPr algn="ctr" latinLnBrk="1"/>
+                      <a:r>
+                        <a:rPr kumimoji="0" lang="en-US" altLang="ko-KR" sz="1400" b="0" i="0" u="none" strike="noStrike" kern="1200" cap="none" spc="0" normalizeH="0" baseline="0" noProof="0">
+                          <a:ln>
+                            <a:noFill/>
+                          </a:ln>
+                          <a:solidFill>
+                            <a:prstClr val="black"/>
+                          </a:solidFill>
+                          <a:effectLst/>
+                          <a:uLnTx/>
+                          <a:uFillTx/>
+                          <a:latin typeface="Calibri" panose="020F0502020204030204"/>
+                          <a:ea typeface="맑은 고딕" panose="020B0503020000020004" pitchFamily="50" charset="-127"/>
+                          <a:cs typeface="+mn-cs"/>
+                        </a:rPr>
+                        <a:t>1/3</a:t>
+                      </a:r>
+                      <a:endParaRPr lang="ko-KR" altLang="en-US" sz="1400" dirty="0"/>
+                    </a:p>
+                  </a:txBody>
+                  <a:tcPr marL="0" marR="0" marT="0" marB="0" anchor="ctr">
+                    <a:noFill/>
+                  </a:tcPr>
+                </a:tc>
+                <a:tc>
+                  <a:txBody>
+                    <a:bodyPr/>
+                    <a:lstStyle/>
+                    <a:p>
+                      <a:pPr algn="ctr" latinLnBrk="1"/>
+                      <a:r>
+                        <a:rPr kumimoji="0" lang="en-US" altLang="ko-KR" sz="1400" b="0" i="0" u="none" strike="noStrike" kern="1200" cap="none" spc="0" normalizeH="0" baseline="0" noProof="0">
+                          <a:ln>
+                            <a:noFill/>
+                          </a:ln>
+                          <a:solidFill>
+                            <a:prstClr val="black"/>
+                          </a:solidFill>
+                          <a:effectLst/>
+                          <a:uLnTx/>
+                          <a:uFillTx/>
+                          <a:latin typeface="Calibri" panose="020F0502020204030204"/>
+                          <a:ea typeface="맑은 고딕" panose="020B0503020000020004" pitchFamily="50" charset="-127"/>
+                          <a:cs typeface="+mn-cs"/>
+                        </a:rPr>
+                        <a:t>1/3</a:t>
+                      </a:r>
+                      <a:endParaRPr lang="ko-KR" altLang="en-US" sz="1400" dirty="0"/>
+                    </a:p>
+                  </a:txBody>
+                  <a:tcPr marL="0" marR="0" marT="0" marB="0" anchor="ctr">
+                    <a:noFill/>
+                  </a:tcPr>
+                </a:tc>
+                <a:extLst>
+                  <a:ext uri="{0D108BD9-81ED-4DB2-BD59-A6C34878D82A}">
+                    <a16:rowId xmlns:a16="http://schemas.microsoft.com/office/drawing/2014/main" val="1305972134"/>
+                  </a:ext>
+                </a:extLst>
+              </a:tr>
+              <a:tr h="252000">
+                <a:tc>
+                  <a:txBody>
+                    <a:bodyPr/>
+                    <a:lstStyle/>
+                    <a:p>
+                      <a:pPr algn="ctr" latinLnBrk="1"/>
+                      <a:r>
+                        <a:rPr lang="en-US" altLang="ko-KR" sz="1600"/>
+                        <a:t>4</a:t>
+                      </a:r>
+                      <a:endParaRPr lang="ko-KR" altLang="en-US" sz="1600" dirty="0"/>
+                    </a:p>
+                  </a:txBody>
+                  <a:tcPr marL="0" marR="0" marT="0" marB="0" anchor="ctr">
+                    <a:solidFill>
+                      <a:schemeClr val="bg1">
+                        <a:lumMod val="85000"/>
+                      </a:schemeClr>
+                    </a:solidFill>
+                  </a:tcPr>
+                </a:tc>
+                <a:tc>
+                  <a:txBody>
+                    <a:bodyPr/>
+                    <a:lstStyle/>
+                    <a:p>
+                      <a:pPr marL="0" marR="0" lvl="0" indent="0" algn="ctr" defTabSz="914400" rtl="0" eaLnBrk="1" fontAlgn="auto" latinLnBrk="1" hangingPunct="1">
+                        <a:lnSpc>
+                          <a:spcPct val="100000"/>
+                        </a:lnSpc>
+                        <a:spcBef>
+                          <a:spcPts val="0"/>
+                        </a:spcBef>
+                        <a:spcAft>
+                          <a:spcPts val="0"/>
+                        </a:spcAft>
+                        <a:buClrTx/>
+                        <a:buSzTx/>
+                        <a:buFontTx/>
+                        <a:buNone/>
+                        <a:tabLst/>
+                        <a:defRPr/>
+                      </a:pPr>
+                      <a:r>
+                        <a:rPr kumimoji="0" lang="en-US" altLang="ko-KR" sz="1400" b="0" i="0" u="none" strike="noStrike" kern="1200" cap="none" spc="0" normalizeH="0" baseline="0" noProof="0">
+                          <a:ln>
+                            <a:noFill/>
+                          </a:ln>
+                          <a:solidFill>
+                            <a:prstClr val="black"/>
+                          </a:solidFill>
+                          <a:effectLst/>
+                          <a:uLnTx/>
+                          <a:uFillTx/>
+                          <a:latin typeface="Calibri" panose="020F0502020204030204"/>
+                          <a:ea typeface="맑은 고딕" panose="020B0503020000020004" pitchFamily="50" charset="-127"/>
+                          <a:cs typeface="+mn-cs"/>
+                        </a:rPr>
+                        <a:t>1/3</a:t>
+                      </a:r>
+                      <a:endParaRPr kumimoji="0" lang="ko-KR" altLang="en-US" sz="1400" b="0" i="0" u="none" strike="noStrike" kern="1200" cap="none" spc="0" normalizeH="0" baseline="0" noProof="0" dirty="0">
+                        <a:ln>
+                          <a:noFill/>
+                        </a:ln>
+                        <a:solidFill>
+                          <a:prstClr val="black"/>
+                        </a:solidFill>
+                        <a:effectLst/>
+                        <a:uLnTx/>
+                        <a:uFillTx/>
+                        <a:latin typeface="Calibri" panose="020F0502020204030204"/>
+                        <a:ea typeface="맑은 고딕" panose="020B0503020000020004" pitchFamily="50" charset="-127"/>
+                        <a:cs typeface="+mn-cs"/>
+                      </a:endParaRPr>
+                    </a:p>
+                  </a:txBody>
+                  <a:tcPr marL="0" marR="0" marT="0" marB="0" anchor="ctr"/>
+                </a:tc>
+                <a:tc>
+                  <a:txBody>
+                    <a:bodyPr/>
+                    <a:lstStyle/>
+                    <a:p>
+                      <a:pPr algn="ctr" latinLnBrk="1"/>
+                      <a:r>
+                        <a:rPr kumimoji="0" lang="en-US" altLang="ko-KR" sz="1400" b="0" i="0" u="none" strike="noStrike" kern="1200" cap="none" spc="0" normalizeH="0" baseline="0" noProof="0">
+                          <a:ln>
+                            <a:noFill/>
+                          </a:ln>
+                          <a:solidFill>
+                            <a:prstClr val="black"/>
+                          </a:solidFill>
+                          <a:effectLst/>
+                          <a:uLnTx/>
+                          <a:uFillTx/>
+                          <a:latin typeface="Calibri" panose="020F0502020204030204"/>
+                          <a:ea typeface="맑은 고딕" panose="020B0503020000020004" pitchFamily="50" charset="-127"/>
+                          <a:cs typeface="+mn-cs"/>
+                        </a:rPr>
+                        <a:t>1/3</a:t>
+                      </a:r>
+                      <a:endParaRPr lang="ko-KR" altLang="en-US" sz="1400" dirty="0"/>
+                    </a:p>
+                  </a:txBody>
+                  <a:tcPr marL="0" marR="0" marT="0" marB="0" anchor="ctr">
+                    <a:solidFill>
+                      <a:srgbClr val="00B050"/>
+                    </a:solidFill>
+                  </a:tcPr>
+                </a:tc>
+                <a:tc>
+                  <a:txBody>
+                    <a:bodyPr/>
+                    <a:lstStyle/>
+                    <a:p>
+                      <a:pPr marL="0" marR="0" lvl="0" indent="0" algn="ctr" defTabSz="914400" rtl="0" eaLnBrk="1" fontAlgn="auto" latinLnBrk="1" hangingPunct="1">
+                        <a:lnSpc>
+                          <a:spcPct val="100000"/>
+                        </a:lnSpc>
+                        <a:spcBef>
+                          <a:spcPts val="0"/>
+                        </a:spcBef>
+                        <a:spcAft>
+                          <a:spcPts val="0"/>
+                        </a:spcAft>
+                        <a:buClrTx/>
+                        <a:buSzTx/>
+                        <a:buFontTx/>
+                        <a:buNone/>
+                        <a:tabLst/>
+                        <a:defRPr/>
+                      </a:pPr>
+                      <a:r>
+                        <a:rPr kumimoji="0" lang="en-US" altLang="ko-KR" sz="1400" b="0" i="0" u="none" strike="noStrike" kern="1200" cap="none" spc="0" normalizeH="0" baseline="0" noProof="0">
+                          <a:ln>
+                            <a:noFill/>
+                          </a:ln>
+                          <a:solidFill>
+                            <a:prstClr val="black"/>
+                          </a:solidFill>
+                          <a:effectLst/>
+                          <a:uLnTx/>
+                          <a:uFillTx/>
+                          <a:latin typeface="Calibri" panose="020F0502020204030204"/>
+                          <a:ea typeface="맑은 고딕" panose="020B0503020000020004" pitchFamily="50" charset="-127"/>
+                          <a:cs typeface="+mn-cs"/>
+                        </a:rPr>
+                        <a:t>1/3</a:t>
+                      </a:r>
+                      <a:endParaRPr kumimoji="0" lang="ko-KR" altLang="en-US" sz="1400" b="0" i="0" u="none" strike="noStrike" kern="1200" cap="none" spc="0" normalizeH="0" baseline="0" noProof="0" dirty="0">
+                        <a:ln>
+                          <a:noFill/>
+                        </a:ln>
+                        <a:solidFill>
+                          <a:prstClr val="black"/>
+                        </a:solidFill>
+                        <a:effectLst/>
+                        <a:uLnTx/>
+                        <a:uFillTx/>
+                        <a:latin typeface="Calibri" panose="020F0502020204030204"/>
+                        <a:ea typeface="맑은 고딕" panose="020B0503020000020004" pitchFamily="50" charset="-127"/>
+                        <a:cs typeface="+mn-cs"/>
+                      </a:endParaRPr>
+                    </a:p>
+                  </a:txBody>
+                  <a:tcPr marL="0" marR="0" marT="0" marB="0" anchor="ctr"/>
+                </a:tc>
+                <a:extLst>
+                  <a:ext uri="{0D108BD9-81ED-4DB2-BD59-A6C34878D82A}">
+                    <a16:rowId xmlns:a16="http://schemas.microsoft.com/office/drawing/2014/main" val="2637998928"/>
+                  </a:ext>
+                </a:extLst>
+              </a:tr>
+              <a:tr h="252000">
+                <a:tc>
+                  <a:txBody>
+                    <a:bodyPr/>
+                    <a:lstStyle/>
+                    <a:p>
+                      <a:pPr algn="ctr" latinLnBrk="1"/>
+                      <a:r>
+                        <a:rPr lang="en-US" altLang="ko-KR" sz="1600"/>
+                        <a:t>5</a:t>
+                      </a:r>
+                      <a:endParaRPr lang="ko-KR" altLang="en-US" sz="1600" dirty="0"/>
+                    </a:p>
+                  </a:txBody>
+                  <a:tcPr marL="0" marR="0" marT="0" marB="0" anchor="ctr">
+                    <a:solidFill>
+                      <a:schemeClr val="bg1">
+                        <a:lumMod val="85000"/>
+                      </a:schemeClr>
+                    </a:solidFill>
+                  </a:tcPr>
+                </a:tc>
+                <a:tc>
+                  <a:txBody>
+                    <a:bodyPr/>
+                    <a:lstStyle/>
+                    <a:p>
+                      <a:pPr marL="0" marR="0" lvl="0" indent="0" algn="ctr" defTabSz="914400" rtl="0" eaLnBrk="1" fontAlgn="auto" latinLnBrk="1" hangingPunct="1">
+                        <a:lnSpc>
+                          <a:spcPct val="100000"/>
+                        </a:lnSpc>
+                        <a:spcBef>
+                          <a:spcPts val="0"/>
+                        </a:spcBef>
+                        <a:spcAft>
+                          <a:spcPts val="0"/>
+                        </a:spcAft>
+                        <a:buClrTx/>
+                        <a:buSzTx/>
+                        <a:buFontTx/>
+                        <a:buNone/>
+                        <a:tabLst/>
+                        <a:defRPr/>
+                      </a:pPr>
+                      <a:r>
+                        <a:rPr kumimoji="0" lang="en-US" altLang="ko-KR" sz="1400" b="0" i="0" u="none" strike="noStrike" kern="1200" cap="none" spc="0" normalizeH="0" baseline="0" noProof="0">
+                          <a:ln>
+                            <a:noFill/>
+                          </a:ln>
+                          <a:solidFill>
+                            <a:prstClr val="black"/>
+                          </a:solidFill>
+                          <a:effectLst/>
+                          <a:uLnTx/>
+                          <a:uFillTx/>
+                          <a:latin typeface="Calibri" panose="020F0502020204030204"/>
+                          <a:ea typeface="맑은 고딕" panose="020B0503020000020004" pitchFamily="50" charset="-127"/>
+                          <a:cs typeface="+mn-cs"/>
+                        </a:rPr>
+                        <a:t>1/3</a:t>
+                      </a:r>
+                      <a:endParaRPr kumimoji="0" lang="ko-KR" altLang="en-US" sz="1400" b="0" i="0" u="none" strike="noStrike" kern="1200" cap="none" spc="0" normalizeH="0" baseline="0" noProof="0" dirty="0">
+                        <a:ln>
+                          <a:noFill/>
+                        </a:ln>
+                        <a:solidFill>
+                          <a:prstClr val="black"/>
+                        </a:solidFill>
+                        <a:effectLst/>
+                        <a:uLnTx/>
+                        <a:uFillTx/>
+                        <a:latin typeface="Calibri" panose="020F0502020204030204"/>
+                        <a:ea typeface="맑은 고딕" panose="020B0503020000020004" pitchFamily="50" charset="-127"/>
+                        <a:cs typeface="+mn-cs"/>
+                      </a:endParaRPr>
+                    </a:p>
+                  </a:txBody>
+                  <a:tcPr marL="0" marR="0" marT="0" marB="0" anchor="ctr"/>
+                </a:tc>
+                <a:tc>
+                  <a:txBody>
+                    <a:bodyPr/>
+                    <a:lstStyle/>
+                    <a:p>
+                      <a:pPr algn="ctr" latinLnBrk="1"/>
+                      <a:r>
+                        <a:rPr kumimoji="0" lang="en-US" altLang="ko-KR" sz="1400" b="0" i="0" u="none" strike="noStrike" kern="1200" cap="none" spc="0" normalizeH="0" baseline="0" noProof="0">
+                          <a:ln>
+                            <a:noFill/>
+                          </a:ln>
+                          <a:solidFill>
+                            <a:prstClr val="black"/>
+                          </a:solidFill>
+                          <a:effectLst/>
+                          <a:uLnTx/>
+                          <a:uFillTx/>
+                          <a:latin typeface="Calibri" panose="020F0502020204030204"/>
+                          <a:ea typeface="맑은 고딕" panose="020B0503020000020004" pitchFamily="50" charset="-127"/>
+                          <a:cs typeface="+mn-cs"/>
+                        </a:rPr>
+                        <a:t>1/3</a:t>
+                      </a:r>
+                      <a:endParaRPr lang="ko-KR" altLang="en-US" sz="1400" dirty="0"/>
+                    </a:p>
+                  </a:txBody>
+                  <a:tcPr marL="0" marR="0" marT="0" marB="0" anchor="ctr">
+                    <a:solidFill>
+                      <a:srgbClr val="00B050"/>
+                    </a:solidFill>
+                  </a:tcPr>
+                </a:tc>
+                <a:tc>
+                  <a:txBody>
+                    <a:bodyPr/>
+                    <a:lstStyle/>
+                    <a:p>
+                      <a:pPr marL="0" marR="0" lvl="0" indent="0" algn="ctr" defTabSz="914400" rtl="0" eaLnBrk="1" fontAlgn="auto" latinLnBrk="1" hangingPunct="1">
+                        <a:lnSpc>
+                          <a:spcPct val="100000"/>
+                        </a:lnSpc>
+                        <a:spcBef>
+                          <a:spcPts val="0"/>
+                        </a:spcBef>
+                        <a:spcAft>
+                          <a:spcPts val="0"/>
+                        </a:spcAft>
+                        <a:buClrTx/>
+                        <a:buSzTx/>
+                        <a:buFontTx/>
+                        <a:buNone/>
+                        <a:tabLst/>
+                        <a:defRPr/>
+                      </a:pPr>
+                      <a:r>
+                        <a:rPr kumimoji="0" lang="en-US" altLang="ko-KR" sz="1400" b="0" i="0" u="none" strike="noStrike" kern="1200" cap="none" spc="0" normalizeH="0" baseline="0" noProof="0">
+                          <a:ln>
+                            <a:noFill/>
+                          </a:ln>
+                          <a:solidFill>
+                            <a:prstClr val="black"/>
+                          </a:solidFill>
+                          <a:effectLst/>
+                          <a:uLnTx/>
+                          <a:uFillTx/>
+                          <a:latin typeface="Calibri" panose="020F0502020204030204"/>
+                          <a:ea typeface="맑은 고딕" panose="020B0503020000020004" pitchFamily="50" charset="-127"/>
+                          <a:cs typeface="+mn-cs"/>
+                        </a:rPr>
+                        <a:t>1/3</a:t>
+                      </a:r>
+                      <a:endParaRPr kumimoji="0" lang="ko-KR" altLang="en-US" sz="1400" b="0" i="0" u="none" strike="noStrike" kern="1200" cap="none" spc="0" normalizeH="0" baseline="0" noProof="0" dirty="0">
+                        <a:ln>
+                          <a:noFill/>
+                        </a:ln>
+                        <a:solidFill>
+                          <a:prstClr val="black"/>
+                        </a:solidFill>
+                        <a:effectLst/>
+                        <a:uLnTx/>
+                        <a:uFillTx/>
+                        <a:latin typeface="Calibri" panose="020F0502020204030204"/>
+                        <a:ea typeface="맑은 고딕" panose="020B0503020000020004" pitchFamily="50" charset="-127"/>
+                        <a:cs typeface="+mn-cs"/>
+                      </a:endParaRPr>
+                    </a:p>
+                  </a:txBody>
+                  <a:tcPr marL="0" marR="0" marT="0" marB="0" anchor="ctr"/>
+                </a:tc>
+                <a:extLst>
+                  <a:ext uri="{0D108BD9-81ED-4DB2-BD59-A6C34878D82A}">
+                    <a16:rowId xmlns:a16="http://schemas.microsoft.com/office/drawing/2014/main" val="86334426"/>
+                  </a:ext>
+                </a:extLst>
+              </a:tr>
+              <a:tr h="252000">
+                <a:tc>
+                  <a:txBody>
+                    <a:bodyPr/>
+                    <a:lstStyle/>
+                    <a:p>
+                      <a:pPr algn="ctr" latinLnBrk="1"/>
+                      <a:r>
+                        <a:rPr lang="en-US" altLang="ko-KR" sz="1600"/>
+                        <a:t>6</a:t>
+                      </a:r>
+                      <a:endParaRPr lang="ko-KR" altLang="en-US" sz="1600" dirty="0"/>
+                    </a:p>
+                  </a:txBody>
+                  <a:tcPr marL="0" marR="0" marT="0" marB="0" anchor="ctr">
+                    <a:solidFill>
+                      <a:schemeClr val="bg1">
+                        <a:lumMod val="85000"/>
+                      </a:schemeClr>
+                    </a:solidFill>
+                  </a:tcPr>
+                </a:tc>
+                <a:tc>
+                  <a:txBody>
+                    <a:bodyPr/>
+                    <a:lstStyle/>
+                    <a:p>
+                      <a:pPr marL="0" marR="0" lvl="0" indent="0" algn="ctr" defTabSz="914400" rtl="0" eaLnBrk="1" fontAlgn="auto" latinLnBrk="1" hangingPunct="1">
+                        <a:lnSpc>
+                          <a:spcPct val="100000"/>
+                        </a:lnSpc>
+                        <a:spcBef>
+                          <a:spcPts val="0"/>
+                        </a:spcBef>
+                        <a:spcAft>
+                          <a:spcPts val="0"/>
+                        </a:spcAft>
+                        <a:buClrTx/>
+                        <a:buSzTx/>
+                        <a:buFontTx/>
+                        <a:buNone/>
+                        <a:tabLst/>
+                        <a:defRPr/>
+                      </a:pPr>
+                      <a:r>
+                        <a:rPr kumimoji="0" lang="en-US" altLang="ko-KR" sz="1400" b="0" i="0" u="none" strike="noStrike" kern="1200" cap="none" spc="0" normalizeH="0" baseline="0" noProof="0">
+                          <a:ln>
+                            <a:noFill/>
+                          </a:ln>
+                          <a:solidFill>
+                            <a:prstClr val="black"/>
+                          </a:solidFill>
+                          <a:effectLst/>
+                          <a:uLnTx/>
+                          <a:uFillTx/>
+                          <a:latin typeface="Calibri" panose="020F0502020204030204"/>
+                          <a:ea typeface="맑은 고딕" panose="020B0503020000020004" pitchFamily="50" charset="-127"/>
+                          <a:cs typeface="+mn-cs"/>
+                        </a:rPr>
+                        <a:t>1/3</a:t>
+                      </a:r>
+                      <a:endParaRPr kumimoji="0" lang="ko-KR" altLang="en-US" sz="1400" b="0" i="0" u="none" strike="noStrike" kern="1200" cap="none" spc="0" normalizeH="0" baseline="0" noProof="0" dirty="0">
+                        <a:ln>
+                          <a:noFill/>
+                        </a:ln>
+                        <a:solidFill>
+                          <a:prstClr val="black"/>
+                        </a:solidFill>
+                        <a:effectLst/>
+                        <a:uLnTx/>
+                        <a:uFillTx/>
+                        <a:latin typeface="Calibri" panose="020F0502020204030204"/>
+                        <a:ea typeface="맑은 고딕" panose="020B0503020000020004" pitchFamily="50" charset="-127"/>
+                        <a:cs typeface="+mn-cs"/>
+                      </a:endParaRPr>
+                    </a:p>
+                  </a:txBody>
+                  <a:tcPr marL="0" marR="0" marT="0" marB="0" anchor="ctr"/>
+                </a:tc>
+                <a:tc>
+                  <a:txBody>
+                    <a:bodyPr/>
+                    <a:lstStyle/>
+                    <a:p>
+                      <a:pPr algn="ctr" latinLnBrk="1"/>
+                      <a:r>
+                        <a:rPr kumimoji="0" lang="en-US" altLang="ko-KR" sz="1400" b="0" i="0" u="none" strike="noStrike" kern="1200" cap="none" spc="0" normalizeH="0" baseline="0" noProof="0">
+                          <a:ln>
+                            <a:noFill/>
+                          </a:ln>
+                          <a:solidFill>
+                            <a:prstClr val="black"/>
+                          </a:solidFill>
+                          <a:effectLst/>
+                          <a:uLnTx/>
+                          <a:uFillTx/>
+                          <a:latin typeface="Calibri" panose="020F0502020204030204"/>
+                          <a:ea typeface="맑은 고딕" panose="020B0503020000020004" pitchFamily="50" charset="-127"/>
+                          <a:cs typeface="+mn-cs"/>
+                        </a:rPr>
+                        <a:t>1/3</a:t>
+                      </a:r>
+                      <a:endParaRPr lang="ko-KR" altLang="en-US" sz="1400" dirty="0"/>
+                    </a:p>
+                  </a:txBody>
+                  <a:tcPr marL="0" marR="0" marT="0" marB="0" anchor="ctr">
+                    <a:solidFill>
+                      <a:srgbClr val="00B050"/>
+                    </a:solidFill>
+                  </a:tcPr>
+                </a:tc>
+                <a:tc>
+                  <a:txBody>
+                    <a:bodyPr/>
+                    <a:lstStyle/>
+                    <a:p>
+                      <a:pPr algn="ctr" latinLnBrk="1"/>
+                      <a:r>
+                        <a:rPr kumimoji="0" lang="en-US" altLang="ko-KR" sz="1400" b="0" i="0" u="none" strike="noStrike" kern="1200" cap="none" spc="0" normalizeH="0" baseline="0" noProof="0">
+                          <a:ln>
+                            <a:noFill/>
+                          </a:ln>
+                          <a:solidFill>
+                            <a:prstClr val="black"/>
+                          </a:solidFill>
+                          <a:effectLst/>
+                          <a:uLnTx/>
+                          <a:uFillTx/>
+                          <a:latin typeface="Calibri" panose="020F0502020204030204"/>
+                          <a:ea typeface="맑은 고딕" panose="020B0503020000020004" pitchFamily="50" charset="-127"/>
+                          <a:cs typeface="+mn-cs"/>
+                        </a:rPr>
+                        <a:t>1/3</a:t>
+                      </a:r>
+                      <a:endParaRPr lang="ko-KR" altLang="en-US" sz="1400" dirty="0"/>
+                    </a:p>
+                  </a:txBody>
+                  <a:tcPr marL="0" marR="0" marT="0" marB="0" anchor="ctr"/>
+                </a:tc>
+                <a:extLst>
+                  <a:ext uri="{0D108BD9-81ED-4DB2-BD59-A6C34878D82A}">
+                    <a16:rowId xmlns:a16="http://schemas.microsoft.com/office/drawing/2014/main" val="3733004441"/>
+                  </a:ext>
+                </a:extLst>
+              </a:tr>
+              <a:tr h="252000">
+                <a:tc>
+                  <a:txBody>
+                    <a:bodyPr/>
+                    <a:lstStyle/>
+                    <a:p>
+                      <a:pPr algn="ctr" latinLnBrk="1"/>
+                      <a:r>
+                        <a:rPr lang="en-US" altLang="ko-KR" sz="1600"/>
+                        <a:t>7</a:t>
+                      </a:r>
+                      <a:endParaRPr lang="ko-KR" altLang="en-US" sz="1600" dirty="0"/>
+                    </a:p>
+                  </a:txBody>
+                  <a:tcPr marL="0" marR="0" marT="0" marB="0" anchor="ctr">
+                    <a:solidFill>
+                      <a:schemeClr val="bg1">
+                        <a:lumMod val="85000"/>
+                      </a:schemeClr>
+                    </a:solidFill>
+                  </a:tcPr>
+                </a:tc>
+                <a:tc>
+                  <a:txBody>
+                    <a:bodyPr/>
+                    <a:lstStyle/>
+                    <a:p>
+                      <a:pPr algn="ctr" latinLnBrk="1"/>
+                      <a:r>
+                        <a:rPr kumimoji="0" lang="en-US" altLang="ko-KR" sz="1400" b="0" i="0" u="none" strike="noStrike" kern="1200" cap="none" spc="0" normalizeH="0" baseline="0" noProof="0">
+                          <a:ln>
+                            <a:noFill/>
+                          </a:ln>
+                          <a:solidFill>
+                            <a:prstClr val="black"/>
+                          </a:solidFill>
+                          <a:effectLst/>
+                          <a:uLnTx/>
+                          <a:uFillTx/>
+                          <a:latin typeface="Calibri" panose="020F0502020204030204"/>
+                          <a:ea typeface="맑은 고딕" panose="020B0503020000020004" pitchFamily="50" charset="-127"/>
+                          <a:cs typeface="+mn-cs"/>
+                        </a:rPr>
+                        <a:t>1/3</a:t>
+                      </a:r>
+                      <a:endParaRPr lang="ko-KR" altLang="en-US" sz="1400" dirty="0"/>
+                    </a:p>
+                  </a:txBody>
+                  <a:tcPr marL="0" marR="0" marT="0" marB="0" anchor="ctr"/>
+                </a:tc>
+                <a:tc>
+                  <a:txBody>
+                    <a:bodyPr/>
+                    <a:lstStyle/>
+                    <a:p>
+                      <a:pPr algn="ctr" latinLnBrk="1"/>
+                      <a:r>
+                        <a:rPr kumimoji="0" lang="en-US" altLang="ko-KR" sz="1400" b="0" i="0" u="none" strike="noStrike" kern="1200" cap="none" spc="0" normalizeH="0" baseline="0" noProof="0">
+                          <a:ln>
+                            <a:noFill/>
+                          </a:ln>
+                          <a:solidFill>
+                            <a:prstClr val="black"/>
+                          </a:solidFill>
+                          <a:effectLst/>
+                          <a:uLnTx/>
+                          <a:uFillTx/>
+                          <a:latin typeface="Calibri" panose="020F0502020204030204"/>
+                          <a:ea typeface="맑은 고딕" panose="020B0503020000020004" pitchFamily="50" charset="-127"/>
+                          <a:cs typeface="+mn-cs"/>
+                        </a:rPr>
+                        <a:t>1/3</a:t>
+                      </a:r>
+                      <a:endParaRPr lang="ko-KR" altLang="en-US" sz="1400" dirty="0"/>
+                    </a:p>
+                  </a:txBody>
+                  <a:tcPr marL="0" marR="0" marT="0" marB="0" anchor="ctr"/>
+                </a:tc>
+                <a:tc>
+                  <a:txBody>
+                    <a:bodyPr/>
+                    <a:lstStyle/>
+                    <a:p>
+                      <a:pPr marL="0" marR="0" lvl="0" indent="0" algn="ctr" defTabSz="914400" rtl="0" eaLnBrk="1" fontAlgn="auto" latinLnBrk="1" hangingPunct="1">
+                        <a:lnSpc>
+                          <a:spcPct val="100000"/>
+                        </a:lnSpc>
+                        <a:spcBef>
+                          <a:spcPts val="0"/>
+                        </a:spcBef>
+                        <a:spcAft>
+                          <a:spcPts val="0"/>
+                        </a:spcAft>
+                        <a:buClrTx/>
+                        <a:buSzTx/>
+                        <a:buFontTx/>
+                        <a:buNone/>
+                        <a:tabLst/>
+                        <a:defRPr/>
+                      </a:pPr>
+                      <a:r>
+                        <a:rPr kumimoji="0" lang="en-US" altLang="ko-KR" sz="1400" b="0" i="0" u="none" strike="noStrike" kern="1200" cap="none" spc="0" normalizeH="0" baseline="0" noProof="0">
+                          <a:ln>
+                            <a:noFill/>
+                          </a:ln>
+                          <a:solidFill>
+                            <a:prstClr val="black"/>
+                          </a:solidFill>
+                          <a:effectLst/>
+                          <a:uLnTx/>
+                          <a:uFillTx/>
+                          <a:latin typeface="Calibri" panose="020F0502020204030204"/>
+                          <a:ea typeface="맑은 고딕" panose="020B0503020000020004" pitchFamily="50" charset="-127"/>
+                          <a:cs typeface="+mn-cs"/>
+                        </a:rPr>
+                        <a:t>1/3</a:t>
+                      </a:r>
+                      <a:endParaRPr kumimoji="0" lang="ko-KR" altLang="en-US" sz="1400" b="0" i="0" u="none" strike="noStrike" kern="1200" cap="none" spc="0" normalizeH="0" baseline="0" noProof="0" dirty="0">
+                        <a:ln>
+                          <a:noFill/>
+                        </a:ln>
+                        <a:solidFill>
+                          <a:prstClr val="black"/>
+                        </a:solidFill>
+                        <a:effectLst/>
+                        <a:uLnTx/>
+                        <a:uFillTx/>
+                        <a:latin typeface="Calibri" panose="020F0502020204030204"/>
+                        <a:ea typeface="맑은 고딕" panose="020B0503020000020004" pitchFamily="50" charset="-127"/>
+                        <a:cs typeface="+mn-cs"/>
+                      </a:endParaRPr>
+                    </a:p>
+                  </a:txBody>
+                  <a:tcPr marL="0" marR="0" marT="0" marB="0" anchor="ctr">
+                    <a:solidFill>
+                      <a:srgbClr val="4A66AC"/>
+                    </a:solidFill>
+                  </a:tcPr>
+                </a:tc>
+                <a:extLst>
+                  <a:ext uri="{0D108BD9-81ED-4DB2-BD59-A6C34878D82A}">
+                    <a16:rowId xmlns:a16="http://schemas.microsoft.com/office/drawing/2014/main" val="3849493607"/>
+                  </a:ext>
+                </a:extLst>
+              </a:tr>
+              <a:tr h="252000">
+                <a:tc>
+                  <a:txBody>
+                    <a:bodyPr/>
+                    <a:lstStyle/>
+                    <a:p>
+                      <a:pPr algn="ctr" latinLnBrk="1"/>
+                      <a:r>
+                        <a:rPr lang="en-US" altLang="ko-KR" sz="1600"/>
+                        <a:t>8</a:t>
+                      </a:r>
+                      <a:endParaRPr lang="ko-KR" altLang="en-US" sz="1600" dirty="0"/>
+                    </a:p>
+                  </a:txBody>
+                  <a:tcPr marL="0" marR="0" marT="0" marB="0" anchor="ctr">
+                    <a:solidFill>
+                      <a:schemeClr val="bg1">
+                        <a:lumMod val="85000"/>
+                      </a:schemeClr>
+                    </a:solidFill>
+                  </a:tcPr>
+                </a:tc>
+                <a:tc>
+                  <a:txBody>
+                    <a:bodyPr/>
+                    <a:lstStyle/>
+                    <a:p>
+                      <a:pPr algn="ctr" latinLnBrk="1"/>
+                      <a:r>
+                        <a:rPr kumimoji="0" lang="en-US" altLang="ko-KR" sz="1400" b="0" i="0" u="none" strike="noStrike" kern="1200" cap="none" spc="0" normalizeH="0" baseline="0" noProof="0">
+                          <a:ln>
+                            <a:noFill/>
+                          </a:ln>
+                          <a:solidFill>
+                            <a:prstClr val="black"/>
+                          </a:solidFill>
+                          <a:effectLst/>
+                          <a:uLnTx/>
+                          <a:uFillTx/>
+                          <a:latin typeface="Calibri" panose="020F0502020204030204"/>
+                          <a:ea typeface="맑은 고딕" panose="020B0503020000020004" pitchFamily="50" charset="-127"/>
+                          <a:cs typeface="+mn-cs"/>
+                        </a:rPr>
+                        <a:t>1/3</a:t>
+                      </a:r>
+                      <a:endParaRPr lang="ko-KR" altLang="en-US" sz="1400" dirty="0"/>
+                    </a:p>
+                  </a:txBody>
+                  <a:tcPr marL="0" marR="0" marT="0" marB="0" anchor="ctr"/>
+                </a:tc>
+                <a:tc>
+                  <a:txBody>
+                    <a:bodyPr/>
+                    <a:lstStyle/>
+                    <a:p>
+                      <a:pPr marL="0" marR="0" lvl="0" indent="0" algn="ctr" defTabSz="914400" rtl="0" eaLnBrk="1" fontAlgn="auto" latinLnBrk="1" hangingPunct="1">
+                        <a:lnSpc>
+                          <a:spcPct val="100000"/>
+                        </a:lnSpc>
+                        <a:spcBef>
+                          <a:spcPts val="0"/>
+                        </a:spcBef>
+                        <a:spcAft>
+                          <a:spcPts val="0"/>
+                        </a:spcAft>
+                        <a:buClrTx/>
+                        <a:buSzTx/>
+                        <a:buFontTx/>
+                        <a:buNone/>
+                        <a:tabLst/>
+                        <a:defRPr/>
+                      </a:pPr>
+                      <a:r>
+                        <a:rPr kumimoji="0" lang="en-US" altLang="ko-KR" sz="1400" b="0" i="0" u="none" strike="noStrike" kern="1200" cap="none" spc="0" normalizeH="0" baseline="0" noProof="0">
+                          <a:ln>
+                            <a:noFill/>
+                          </a:ln>
+                          <a:solidFill>
+                            <a:prstClr val="black"/>
+                          </a:solidFill>
+                          <a:effectLst/>
+                          <a:uLnTx/>
+                          <a:uFillTx/>
+                          <a:latin typeface="Calibri" panose="020F0502020204030204"/>
+                          <a:ea typeface="맑은 고딕" panose="020B0503020000020004" pitchFamily="50" charset="-127"/>
+                          <a:cs typeface="+mn-cs"/>
+                        </a:rPr>
+                        <a:t>1/3</a:t>
+                      </a:r>
+                      <a:endParaRPr kumimoji="0" lang="ko-KR" altLang="en-US" sz="1400" b="0" i="0" u="none" strike="noStrike" kern="1200" cap="none" spc="0" normalizeH="0" baseline="0" noProof="0" dirty="0">
+                        <a:ln>
+                          <a:noFill/>
+                        </a:ln>
+                        <a:solidFill>
+                          <a:prstClr val="black"/>
+                        </a:solidFill>
+                        <a:effectLst/>
+                        <a:uLnTx/>
+                        <a:uFillTx/>
+                        <a:latin typeface="Calibri" panose="020F0502020204030204"/>
+                        <a:ea typeface="맑은 고딕" panose="020B0503020000020004" pitchFamily="50" charset="-127"/>
+                        <a:cs typeface="+mn-cs"/>
+                      </a:endParaRPr>
+                    </a:p>
+                  </a:txBody>
+                  <a:tcPr marL="0" marR="0" marT="0" marB="0" anchor="ctr"/>
+                </a:tc>
+                <a:tc>
+                  <a:txBody>
+                    <a:bodyPr/>
+                    <a:lstStyle/>
+                    <a:p>
+                      <a:pPr marL="0" marR="0" lvl="0" indent="0" algn="ctr" defTabSz="914400" rtl="0" eaLnBrk="1" fontAlgn="auto" latinLnBrk="1" hangingPunct="1">
+                        <a:lnSpc>
+                          <a:spcPct val="100000"/>
+                        </a:lnSpc>
+                        <a:spcBef>
+                          <a:spcPts val="0"/>
+                        </a:spcBef>
+                        <a:spcAft>
+                          <a:spcPts val="0"/>
+                        </a:spcAft>
+                        <a:buClrTx/>
+                        <a:buSzTx/>
+                        <a:buFontTx/>
+                        <a:buNone/>
+                        <a:tabLst/>
+                        <a:defRPr/>
+                      </a:pPr>
+                      <a:r>
+                        <a:rPr kumimoji="0" lang="en-US" altLang="ko-KR" sz="1400" b="0" i="0" u="none" strike="noStrike" kern="1200" cap="none" spc="0" normalizeH="0" baseline="0" noProof="0">
+                          <a:ln>
+                            <a:noFill/>
+                          </a:ln>
+                          <a:solidFill>
+                            <a:prstClr val="black"/>
+                          </a:solidFill>
+                          <a:effectLst/>
+                          <a:uLnTx/>
+                          <a:uFillTx/>
+                          <a:latin typeface="Calibri" panose="020F0502020204030204"/>
+                          <a:ea typeface="맑은 고딕" panose="020B0503020000020004" pitchFamily="50" charset="-127"/>
+                          <a:cs typeface="+mn-cs"/>
+                        </a:rPr>
+                        <a:t>1/3</a:t>
+                      </a:r>
+                      <a:endParaRPr kumimoji="0" lang="ko-KR" altLang="en-US" sz="1400" b="0" i="0" u="none" strike="noStrike" kern="1200" cap="none" spc="0" normalizeH="0" baseline="0" noProof="0" dirty="0">
+                        <a:ln>
+                          <a:noFill/>
+                        </a:ln>
+                        <a:solidFill>
+                          <a:prstClr val="black"/>
+                        </a:solidFill>
+                        <a:effectLst/>
+                        <a:uLnTx/>
+                        <a:uFillTx/>
+                        <a:latin typeface="Calibri" panose="020F0502020204030204"/>
+                        <a:ea typeface="맑은 고딕" panose="020B0503020000020004" pitchFamily="50" charset="-127"/>
+                        <a:cs typeface="+mn-cs"/>
+                      </a:endParaRPr>
+                    </a:p>
+                  </a:txBody>
+                  <a:tcPr marL="0" marR="0" marT="0" marB="0" anchor="ctr">
+                    <a:solidFill>
+                      <a:srgbClr val="4A66AC"/>
+                    </a:solidFill>
+                  </a:tcPr>
+                </a:tc>
+                <a:extLst>
+                  <a:ext uri="{0D108BD9-81ED-4DB2-BD59-A6C34878D82A}">
+                    <a16:rowId xmlns:a16="http://schemas.microsoft.com/office/drawing/2014/main" val="1837347859"/>
+                  </a:ext>
+                </a:extLst>
+              </a:tr>
+              <a:tr h="252000">
+                <a:tc>
+                  <a:txBody>
+                    <a:bodyPr/>
+                    <a:lstStyle/>
+                    <a:p>
+                      <a:pPr algn="ctr" latinLnBrk="1"/>
+                      <a:r>
+                        <a:rPr lang="en-US" altLang="ko-KR" sz="1600"/>
+                        <a:t>9</a:t>
+                      </a:r>
+                      <a:endParaRPr lang="ko-KR" altLang="en-US" sz="1600" dirty="0"/>
+                    </a:p>
+                  </a:txBody>
+                  <a:tcPr marL="0" marR="0" marT="0" marB="0" anchor="ctr">
+                    <a:solidFill>
+                      <a:schemeClr val="bg1">
+                        <a:lumMod val="85000"/>
+                      </a:schemeClr>
+                    </a:solidFill>
+                  </a:tcPr>
+                </a:tc>
+                <a:tc>
+                  <a:txBody>
+                    <a:bodyPr/>
+                    <a:lstStyle/>
+                    <a:p>
+                      <a:pPr algn="ctr" latinLnBrk="1"/>
+                      <a:r>
+                        <a:rPr kumimoji="0" lang="en-US" altLang="ko-KR" sz="1400" b="0" i="0" u="none" strike="noStrike" kern="1200" cap="none" spc="0" normalizeH="0" baseline="0" noProof="0">
+                          <a:ln>
+                            <a:noFill/>
+                          </a:ln>
+                          <a:solidFill>
+                            <a:prstClr val="black"/>
+                          </a:solidFill>
+                          <a:effectLst/>
+                          <a:uLnTx/>
+                          <a:uFillTx/>
+                          <a:latin typeface="Calibri" panose="020F0502020204030204"/>
+                          <a:ea typeface="맑은 고딕" panose="020B0503020000020004" pitchFamily="50" charset="-127"/>
+                          <a:cs typeface="+mn-cs"/>
+                        </a:rPr>
+                        <a:t>1/3</a:t>
+                      </a:r>
+                      <a:endParaRPr lang="ko-KR" altLang="en-US" sz="1400" dirty="0"/>
+                    </a:p>
+                  </a:txBody>
+                  <a:tcPr marL="0" marR="0" marT="0" marB="0" anchor="ctr"/>
+                </a:tc>
+                <a:tc>
+                  <a:txBody>
+                    <a:bodyPr/>
+                    <a:lstStyle/>
+                    <a:p>
+                      <a:pPr marL="0" marR="0" lvl="0" indent="0" algn="ctr" defTabSz="914400" rtl="0" eaLnBrk="1" fontAlgn="auto" latinLnBrk="1" hangingPunct="1">
+                        <a:lnSpc>
+                          <a:spcPct val="100000"/>
+                        </a:lnSpc>
+                        <a:spcBef>
+                          <a:spcPts val="0"/>
+                        </a:spcBef>
+                        <a:spcAft>
+                          <a:spcPts val="0"/>
+                        </a:spcAft>
+                        <a:buClrTx/>
+                        <a:buSzTx/>
+                        <a:buFontTx/>
+                        <a:buNone/>
+                        <a:tabLst/>
+                        <a:defRPr/>
+                      </a:pPr>
+                      <a:r>
+                        <a:rPr kumimoji="0" lang="en-US" altLang="ko-KR" sz="1400" b="0" i="0" u="none" strike="noStrike" kern="1200" cap="none" spc="0" normalizeH="0" baseline="0" noProof="0">
+                          <a:ln>
+                            <a:noFill/>
+                          </a:ln>
+                          <a:solidFill>
+                            <a:prstClr val="black"/>
+                          </a:solidFill>
+                          <a:effectLst/>
+                          <a:uLnTx/>
+                          <a:uFillTx/>
+                          <a:latin typeface="Calibri" panose="020F0502020204030204"/>
+                          <a:ea typeface="맑은 고딕" panose="020B0503020000020004" pitchFamily="50" charset="-127"/>
+                          <a:cs typeface="+mn-cs"/>
+                        </a:rPr>
+                        <a:t>1/3</a:t>
+                      </a:r>
+                      <a:endParaRPr kumimoji="0" lang="ko-KR" altLang="en-US" sz="1400" b="0" i="0" u="none" strike="noStrike" kern="1200" cap="none" spc="0" normalizeH="0" baseline="0" noProof="0" dirty="0">
+                        <a:ln>
+                          <a:noFill/>
+                        </a:ln>
+                        <a:solidFill>
+                          <a:prstClr val="black"/>
+                        </a:solidFill>
+                        <a:effectLst/>
+                        <a:uLnTx/>
+                        <a:uFillTx/>
+                        <a:latin typeface="Calibri" panose="020F0502020204030204"/>
+                        <a:ea typeface="맑은 고딕" panose="020B0503020000020004" pitchFamily="50" charset="-127"/>
+                        <a:cs typeface="+mn-cs"/>
+                      </a:endParaRPr>
+                    </a:p>
+                  </a:txBody>
+                  <a:tcPr marL="0" marR="0" marT="0" marB="0" anchor="ctr"/>
+                </a:tc>
+                <a:tc>
+                  <a:txBody>
+                    <a:bodyPr/>
+                    <a:lstStyle/>
+                    <a:p>
+                      <a:pPr marL="0" marR="0" lvl="0" indent="0" algn="ctr" defTabSz="914400" rtl="0" eaLnBrk="1" fontAlgn="auto" latinLnBrk="1" hangingPunct="1">
+                        <a:lnSpc>
+                          <a:spcPct val="100000"/>
+                        </a:lnSpc>
+                        <a:spcBef>
+                          <a:spcPts val="0"/>
+                        </a:spcBef>
+                        <a:spcAft>
+                          <a:spcPts val="0"/>
+                        </a:spcAft>
+                        <a:buClrTx/>
+                        <a:buSzTx/>
+                        <a:buFontTx/>
+                        <a:buNone/>
+                        <a:tabLst/>
+                        <a:defRPr/>
+                      </a:pPr>
+                      <a:r>
+                        <a:rPr kumimoji="0" lang="en-US" altLang="ko-KR" sz="1400" b="0" i="0" u="none" strike="noStrike" kern="1200" cap="none" spc="0" normalizeH="0" baseline="0" noProof="0" dirty="0">
+                          <a:ln>
+                            <a:noFill/>
+                          </a:ln>
+                          <a:solidFill>
+                            <a:prstClr val="black"/>
+                          </a:solidFill>
+                          <a:effectLst/>
+                          <a:uLnTx/>
+                          <a:uFillTx/>
+                          <a:latin typeface="Calibri" panose="020F0502020204030204"/>
+                          <a:ea typeface="맑은 고딕" panose="020B0503020000020004" pitchFamily="50" charset="-127"/>
+                          <a:cs typeface="+mn-cs"/>
+                        </a:rPr>
+                        <a:t>1/3</a:t>
+                      </a:r>
+                      <a:endParaRPr kumimoji="0" lang="ko-KR" altLang="en-US" sz="1400" b="0" i="0" u="none" strike="noStrike" kern="1200" cap="none" spc="0" normalizeH="0" baseline="0" noProof="0" dirty="0">
+                        <a:ln>
+                          <a:noFill/>
+                        </a:ln>
+                        <a:solidFill>
+                          <a:prstClr val="black"/>
+                        </a:solidFill>
+                        <a:effectLst/>
+                        <a:uLnTx/>
+                        <a:uFillTx/>
+                        <a:latin typeface="Calibri" panose="020F0502020204030204"/>
+                        <a:ea typeface="맑은 고딕" panose="020B0503020000020004" pitchFamily="50" charset="-127"/>
+                        <a:cs typeface="+mn-cs"/>
+                      </a:endParaRPr>
+                    </a:p>
+                  </a:txBody>
+                  <a:tcPr marL="0" marR="0" marT="0" marB="0" anchor="ctr">
+                    <a:solidFill>
+                      <a:srgbClr val="4A66AC"/>
+                    </a:solidFill>
+                  </a:tcPr>
+                </a:tc>
+                <a:extLst>
+                  <a:ext uri="{0D108BD9-81ED-4DB2-BD59-A6C34878D82A}">
+                    <a16:rowId xmlns:a16="http://schemas.microsoft.com/office/drawing/2014/main" val="1877037267"/>
+                  </a:ext>
+                </a:extLst>
+              </a:tr>
+            </a:tbl>
+          </a:graphicData>
+        </a:graphic>
+      </p:graphicFrame>
+      <p:sp>
+        <p:nvSpPr>
+          <p:cNvPr id="5" name="TextBox 4">
+            <a:extLst>
+              <a:ext uri="{FF2B5EF4-FFF2-40B4-BE49-F238E27FC236}">
+                <a16:creationId xmlns:a16="http://schemas.microsoft.com/office/drawing/2014/main" id="{138E01F5-D833-4E0F-A878-2FC68B410AEF}"/>
+              </a:ext>
+            </a:extLst>
+          </p:cNvPr>
+          <p:cNvSpPr txBox="1"/>
+          <p:nvPr/>
+        </p:nvSpPr>
+        <p:spPr>
+          <a:xfrm>
+            <a:off x="2637433" y="3821970"/>
+            <a:ext cx="1882695" cy="369332"/>
+          </a:xfrm>
+          <a:prstGeom prst="rect">
+            <a:avLst/>
+          </a:prstGeom>
+          <a:noFill/>
+        </p:spPr>
+        <p:txBody>
+          <a:bodyPr wrap="none" rtlCol="0">
+            <a:spAutoFit/>
+          </a:bodyPr>
+          <a:lstStyle/>
+          <a:p>
+            <a:pPr algn="ctr"/>
+            <a:r>
+              <a:rPr lang="en-US" altLang="ko-KR" b="1" dirty="0"/>
+              <a:t>Extreme Case 1</a:t>
+            </a:r>
+            <a:endParaRPr lang="ko-KR" altLang="en-US" b="1" dirty="0"/>
+          </a:p>
+        </p:txBody>
+      </p:sp>
+      <p:graphicFrame>
+        <p:nvGraphicFramePr>
+          <p:cNvPr id="6" name="표 5">
+            <a:extLst>
+              <a:ext uri="{FF2B5EF4-FFF2-40B4-BE49-F238E27FC236}">
+                <a16:creationId xmlns:a16="http://schemas.microsoft.com/office/drawing/2014/main" id="{973F0D8F-B4CB-4E14-8D21-2D4E92C71978}"/>
+              </a:ext>
+            </a:extLst>
+          </p:cNvPr>
+          <p:cNvGraphicFramePr>
+            <a:graphicFrameLocks noGrp="1"/>
+          </p:cNvGraphicFramePr>
+          <p:nvPr>
+            <p:extLst>
+              <p:ext uri="{D42A27DB-BD31-4B8C-83A1-F6EECF244321}">
+                <p14:modId xmlns:p14="http://schemas.microsoft.com/office/powerpoint/2010/main" val="2073624594"/>
+              </p:ext>
+            </p:extLst>
+          </p:nvPr>
+        </p:nvGraphicFramePr>
+        <p:xfrm>
+          <a:off x="5591999" y="4191302"/>
+          <a:ext cx="1008000" cy="2520000"/>
+        </p:xfrm>
+        <a:graphic>
+          <a:graphicData uri="http://schemas.openxmlformats.org/drawingml/2006/table">
+            <a:tbl>
+              <a:tblPr firstRow="1" bandRow="1">
+                <a:tableStyleId>{5940675A-B579-460E-94D1-54222C63F5DA}</a:tableStyleId>
+              </a:tblPr>
+              <a:tblGrid>
+                <a:gridCol w="252000">
+                  <a:extLst>
+                    <a:ext uri="{9D8B030D-6E8A-4147-A177-3AD203B41FA5}">
+                      <a16:colId xmlns:a16="http://schemas.microsoft.com/office/drawing/2014/main" val="1378105641"/>
+                    </a:ext>
+                  </a:extLst>
+                </a:gridCol>
+                <a:gridCol w="252000">
+                  <a:extLst>
+                    <a:ext uri="{9D8B030D-6E8A-4147-A177-3AD203B41FA5}">
+                      <a16:colId xmlns:a16="http://schemas.microsoft.com/office/drawing/2014/main" val="3111383925"/>
+                    </a:ext>
+                  </a:extLst>
+                </a:gridCol>
+                <a:gridCol w="252000">
+                  <a:extLst>
+                    <a:ext uri="{9D8B030D-6E8A-4147-A177-3AD203B41FA5}">
+                      <a16:colId xmlns:a16="http://schemas.microsoft.com/office/drawing/2014/main" val="2886097305"/>
+                    </a:ext>
+                  </a:extLst>
+                </a:gridCol>
+                <a:gridCol w="252000">
+                  <a:extLst>
+                    <a:ext uri="{9D8B030D-6E8A-4147-A177-3AD203B41FA5}">
+                      <a16:colId xmlns:a16="http://schemas.microsoft.com/office/drawing/2014/main" val="2848349677"/>
+                    </a:ext>
+                  </a:extLst>
+                </a:gridCol>
+              </a:tblGrid>
+              <a:tr h="252000">
+                <a:tc>
+                  <a:txBody>
+                    <a:bodyPr/>
+                    <a:lstStyle/>
+                    <a:p>
+                      <a:pPr algn="ctr" latinLnBrk="1"/>
+                      <a:endParaRPr lang="ko-KR" altLang="en-US" sz="1600" dirty="0"/>
+                    </a:p>
+                  </a:txBody>
+                  <a:tcPr marL="0" marR="0" marT="0" marB="0" anchor="ctr">
+                    <a:solidFill>
+                      <a:schemeClr val="bg1">
+                        <a:lumMod val="85000"/>
+                      </a:schemeClr>
+                    </a:solidFill>
+                  </a:tcPr>
+                </a:tc>
+                <a:tc>
+                  <a:txBody>
+                    <a:bodyPr/>
+                    <a:lstStyle/>
+                    <a:p>
+                      <a:pPr algn="ctr" latinLnBrk="1"/>
+                      <a:r>
+                        <a:rPr lang="en-US" altLang="ko-KR" sz="1600" dirty="0"/>
+                        <a:t>1</a:t>
+                      </a:r>
+                      <a:endParaRPr lang="ko-KR" altLang="en-US" sz="1600" dirty="0"/>
+                    </a:p>
+                  </a:txBody>
+                  <a:tcPr marL="0" marR="0" marT="0" marB="0" anchor="ctr">
+                    <a:solidFill>
+                      <a:schemeClr val="bg1">
+                        <a:lumMod val="85000"/>
+                      </a:schemeClr>
+                    </a:solidFill>
+                  </a:tcPr>
+                </a:tc>
+                <a:tc>
+                  <a:txBody>
+                    <a:bodyPr/>
+                    <a:lstStyle/>
+                    <a:p>
+                      <a:pPr algn="ctr" latinLnBrk="1"/>
+                      <a:r>
+                        <a:rPr lang="en-US" altLang="ko-KR" sz="1600" dirty="0"/>
+                        <a:t>2</a:t>
+                      </a:r>
+                      <a:endParaRPr lang="ko-KR" altLang="en-US" sz="1600" dirty="0"/>
+                    </a:p>
+                  </a:txBody>
+                  <a:tcPr marL="0" marR="0" marT="0" marB="0" anchor="ctr">
+                    <a:solidFill>
+                      <a:schemeClr val="bg1">
+                        <a:lumMod val="85000"/>
+                      </a:schemeClr>
+                    </a:solidFill>
+                  </a:tcPr>
+                </a:tc>
+                <a:tc>
+                  <a:txBody>
+                    <a:bodyPr/>
+                    <a:lstStyle/>
+                    <a:p>
+                      <a:pPr algn="ctr" latinLnBrk="1"/>
+                      <a:r>
+                        <a:rPr lang="en-US" altLang="ko-KR" sz="1600"/>
+                        <a:t>3</a:t>
+                      </a:r>
+                      <a:endParaRPr lang="ko-KR" altLang="en-US" sz="1600" dirty="0"/>
+                    </a:p>
+                  </a:txBody>
+                  <a:tcPr marL="0" marR="0" marT="0" marB="0" anchor="ctr">
+                    <a:solidFill>
+                      <a:schemeClr val="bg1">
+                        <a:lumMod val="85000"/>
+                      </a:schemeClr>
+                    </a:solidFill>
+                  </a:tcPr>
+                </a:tc>
+                <a:extLst>
+                  <a:ext uri="{0D108BD9-81ED-4DB2-BD59-A6C34878D82A}">
+                    <a16:rowId xmlns:a16="http://schemas.microsoft.com/office/drawing/2014/main" val="1170477919"/>
+                  </a:ext>
+                </a:extLst>
+              </a:tr>
+              <a:tr h="252000">
+                <a:tc>
+                  <a:txBody>
+                    <a:bodyPr/>
+                    <a:lstStyle/>
+                    <a:p>
+                      <a:pPr algn="ctr" latinLnBrk="1"/>
+                      <a:r>
+                        <a:rPr lang="en-US" altLang="ko-KR" sz="1600" dirty="0"/>
+                        <a:t>1</a:t>
+                      </a:r>
+                      <a:endParaRPr lang="ko-KR" altLang="en-US" sz="1600" dirty="0"/>
+                    </a:p>
+                  </a:txBody>
+                  <a:tcPr marL="0" marR="0" marT="0" marB="0" anchor="ctr">
+                    <a:solidFill>
+                      <a:schemeClr val="bg1">
+                        <a:lumMod val="85000"/>
+                      </a:schemeClr>
+                    </a:solidFill>
+                  </a:tcPr>
+                </a:tc>
+                <a:tc>
+                  <a:txBody>
+                    <a:bodyPr/>
+                    <a:lstStyle/>
+                    <a:p>
+                      <a:pPr algn="ctr" latinLnBrk="1"/>
+                      <a:r>
+                        <a:rPr kumimoji="0" lang="en-US" altLang="ko-KR" sz="1400" b="0" i="0" u="none" strike="noStrike" kern="1200" cap="none" spc="0" normalizeH="0" baseline="0" noProof="0">
+                          <a:ln>
+                            <a:noFill/>
+                          </a:ln>
+                          <a:solidFill>
+                            <a:prstClr val="black"/>
+                          </a:solidFill>
+                          <a:effectLst/>
+                          <a:uLnTx/>
+                          <a:uFillTx/>
+                          <a:latin typeface="Calibri" panose="020F0502020204030204"/>
+                          <a:ea typeface="맑은 고딕" panose="020B0503020000020004" pitchFamily="50" charset="-127"/>
+                          <a:cs typeface="+mn-cs"/>
+                        </a:rPr>
+                        <a:t>1</a:t>
+                      </a:r>
+                      <a:endParaRPr lang="ko-KR" altLang="en-US" sz="1400" dirty="0"/>
+                    </a:p>
+                  </a:txBody>
+                  <a:tcPr marL="0" marR="0" marT="0" marB="0" anchor="ctr">
+                    <a:solidFill>
+                      <a:srgbClr val="C00000"/>
+                    </a:solidFill>
+                  </a:tcPr>
+                </a:tc>
+                <a:tc>
+                  <a:txBody>
+                    <a:bodyPr/>
+                    <a:lstStyle/>
+                    <a:p>
+                      <a:pPr algn="ctr" latinLnBrk="1"/>
+                      <a:r>
+                        <a:rPr kumimoji="0" lang="en-US" altLang="ko-KR" sz="1400" b="0" i="0" u="none" strike="noStrike" kern="1200" cap="none" spc="0" normalizeH="0" baseline="0" noProof="0">
+                          <a:ln>
+                            <a:noFill/>
+                          </a:ln>
+                          <a:solidFill>
+                            <a:prstClr val="black"/>
+                          </a:solidFill>
+                          <a:effectLst/>
+                          <a:uLnTx/>
+                          <a:uFillTx/>
+                          <a:latin typeface="Calibri" panose="020F0502020204030204"/>
+                          <a:ea typeface="맑은 고딕" panose="020B0503020000020004" pitchFamily="50" charset="-127"/>
+                          <a:cs typeface="+mn-cs"/>
+                        </a:rPr>
+                        <a:t>0</a:t>
+                      </a:r>
+                      <a:endParaRPr lang="ko-KR" altLang="en-US" sz="1400" dirty="0"/>
+                    </a:p>
+                  </a:txBody>
+                  <a:tcPr marL="0" marR="0" marT="0" marB="0" anchor="ctr">
+                    <a:noFill/>
+                  </a:tcPr>
+                </a:tc>
+                <a:tc>
+                  <a:txBody>
+                    <a:bodyPr/>
+                    <a:lstStyle/>
+                    <a:p>
+                      <a:pPr algn="ctr" latinLnBrk="1"/>
+                      <a:r>
+                        <a:rPr kumimoji="0" lang="en-US" altLang="ko-KR" sz="1400" b="0" i="0" u="none" strike="noStrike" kern="1200" cap="none" spc="0" normalizeH="0" baseline="0" noProof="0">
+                          <a:ln>
+                            <a:noFill/>
+                          </a:ln>
+                          <a:solidFill>
+                            <a:prstClr val="black"/>
+                          </a:solidFill>
+                          <a:effectLst/>
+                          <a:uLnTx/>
+                          <a:uFillTx/>
+                          <a:latin typeface="Calibri" panose="020F0502020204030204"/>
+                          <a:ea typeface="맑은 고딕" panose="020B0503020000020004" pitchFamily="50" charset="-127"/>
+                          <a:cs typeface="+mn-cs"/>
+                        </a:rPr>
+                        <a:t>0</a:t>
+                      </a:r>
+                      <a:endParaRPr lang="ko-KR" altLang="en-US" sz="1400" dirty="0"/>
+                    </a:p>
+                  </a:txBody>
+                  <a:tcPr marL="0" marR="0" marT="0" marB="0" anchor="ctr">
+                    <a:noFill/>
+                  </a:tcPr>
+                </a:tc>
+                <a:extLst>
+                  <a:ext uri="{0D108BD9-81ED-4DB2-BD59-A6C34878D82A}">
+                    <a16:rowId xmlns:a16="http://schemas.microsoft.com/office/drawing/2014/main" val="1641883786"/>
+                  </a:ext>
+                </a:extLst>
+              </a:tr>
+              <a:tr h="252000">
+                <a:tc>
+                  <a:txBody>
+                    <a:bodyPr/>
+                    <a:lstStyle/>
+                    <a:p>
+                      <a:pPr algn="ctr" latinLnBrk="1"/>
+                      <a:r>
+                        <a:rPr lang="en-US" altLang="ko-KR" sz="1600" dirty="0"/>
+                        <a:t>2</a:t>
+                      </a:r>
+                      <a:endParaRPr lang="ko-KR" altLang="en-US" sz="1600" dirty="0"/>
+                    </a:p>
+                  </a:txBody>
+                  <a:tcPr marL="0" marR="0" marT="0" marB="0" anchor="ctr">
+                    <a:solidFill>
+                      <a:schemeClr val="bg1">
+                        <a:lumMod val="85000"/>
+                      </a:schemeClr>
+                    </a:solidFill>
+                  </a:tcPr>
+                </a:tc>
+                <a:tc>
+                  <a:txBody>
+                    <a:bodyPr/>
+                    <a:lstStyle/>
+                    <a:p>
+                      <a:pPr algn="ctr" latinLnBrk="1"/>
+                      <a:r>
+                        <a:rPr kumimoji="0" lang="en-US" altLang="ko-KR" sz="1400" b="0" i="0" u="none" strike="noStrike" kern="1200" cap="none" spc="0" normalizeH="0" baseline="0" noProof="0">
+                          <a:ln>
+                            <a:noFill/>
+                          </a:ln>
+                          <a:solidFill>
+                            <a:prstClr val="black"/>
+                          </a:solidFill>
+                          <a:effectLst/>
+                          <a:uLnTx/>
+                          <a:uFillTx/>
+                          <a:latin typeface="Calibri" panose="020F0502020204030204"/>
+                          <a:ea typeface="맑은 고딕" panose="020B0503020000020004" pitchFamily="50" charset="-127"/>
+                          <a:cs typeface="+mn-cs"/>
+                        </a:rPr>
+                        <a:t>1</a:t>
+                      </a:r>
+                      <a:endParaRPr lang="ko-KR" altLang="en-US" sz="1400" dirty="0"/>
+                    </a:p>
+                  </a:txBody>
+                  <a:tcPr marL="0" marR="0" marT="0" marB="0" anchor="ctr">
+                    <a:solidFill>
+                      <a:srgbClr val="C00000"/>
+                    </a:solidFill>
+                  </a:tcPr>
+                </a:tc>
+                <a:tc>
+                  <a:txBody>
+                    <a:bodyPr/>
+                    <a:lstStyle/>
+                    <a:p>
+                      <a:pPr algn="ctr" latinLnBrk="1"/>
+                      <a:r>
+                        <a:rPr kumimoji="0" lang="en-US" altLang="ko-KR" sz="1400" b="0" i="0" u="none" strike="noStrike" kern="1200" cap="none" spc="0" normalizeH="0" baseline="0" noProof="0">
+                          <a:ln>
+                            <a:noFill/>
+                          </a:ln>
+                          <a:solidFill>
+                            <a:prstClr val="black"/>
+                          </a:solidFill>
+                          <a:effectLst/>
+                          <a:uLnTx/>
+                          <a:uFillTx/>
+                          <a:latin typeface="Calibri" panose="020F0502020204030204"/>
+                          <a:ea typeface="맑은 고딕" panose="020B0503020000020004" pitchFamily="50" charset="-127"/>
+                          <a:cs typeface="+mn-cs"/>
+                        </a:rPr>
+                        <a:t>0</a:t>
+                      </a:r>
+                      <a:endParaRPr lang="ko-KR" altLang="en-US" sz="1400" dirty="0"/>
+                    </a:p>
+                  </a:txBody>
+                  <a:tcPr marL="0" marR="0" marT="0" marB="0" anchor="ctr">
+                    <a:noFill/>
+                  </a:tcPr>
+                </a:tc>
+                <a:tc>
+                  <a:txBody>
+                    <a:bodyPr/>
+                    <a:lstStyle/>
+                    <a:p>
+                      <a:pPr algn="ctr" latinLnBrk="1"/>
+                      <a:r>
+                        <a:rPr kumimoji="0" lang="en-US" altLang="ko-KR" sz="1400" b="0" i="0" u="none" strike="noStrike" kern="1200" cap="none" spc="0" normalizeH="0" baseline="0" noProof="0">
+                          <a:ln>
+                            <a:noFill/>
+                          </a:ln>
+                          <a:solidFill>
+                            <a:prstClr val="black"/>
+                          </a:solidFill>
+                          <a:effectLst/>
+                          <a:uLnTx/>
+                          <a:uFillTx/>
+                          <a:latin typeface="Calibri" panose="020F0502020204030204"/>
+                          <a:ea typeface="맑은 고딕" panose="020B0503020000020004" pitchFamily="50" charset="-127"/>
+                          <a:cs typeface="+mn-cs"/>
+                        </a:rPr>
+                        <a:t>0</a:t>
+                      </a:r>
+                      <a:endParaRPr lang="ko-KR" altLang="en-US" sz="1400" dirty="0"/>
+                    </a:p>
+                  </a:txBody>
+                  <a:tcPr marL="0" marR="0" marT="0" marB="0" anchor="ctr">
+                    <a:noFill/>
+                  </a:tcPr>
+                </a:tc>
+                <a:extLst>
+                  <a:ext uri="{0D108BD9-81ED-4DB2-BD59-A6C34878D82A}">
+                    <a16:rowId xmlns:a16="http://schemas.microsoft.com/office/drawing/2014/main" val="2083158835"/>
+                  </a:ext>
+                </a:extLst>
+              </a:tr>
+              <a:tr h="252000">
+                <a:tc>
+                  <a:txBody>
+                    <a:bodyPr/>
+                    <a:lstStyle/>
+                    <a:p>
+                      <a:pPr algn="ctr" latinLnBrk="1"/>
+                      <a:r>
+                        <a:rPr lang="en-US" altLang="ko-KR" sz="1600"/>
+                        <a:t>3</a:t>
+                      </a:r>
+                      <a:endParaRPr lang="ko-KR" altLang="en-US" sz="1600" dirty="0"/>
+                    </a:p>
+                  </a:txBody>
+                  <a:tcPr marL="0" marR="0" marT="0" marB="0" anchor="ctr">
+                    <a:solidFill>
+                      <a:schemeClr val="bg1">
+                        <a:lumMod val="85000"/>
+                      </a:schemeClr>
+                    </a:solidFill>
+                  </a:tcPr>
+                </a:tc>
+                <a:tc>
+                  <a:txBody>
+                    <a:bodyPr/>
+                    <a:lstStyle/>
+                    <a:p>
+                      <a:pPr algn="ctr" latinLnBrk="1"/>
+                      <a:r>
+                        <a:rPr kumimoji="0" lang="en-US" altLang="ko-KR" sz="1400" b="0" i="0" u="none" strike="noStrike" kern="1200" cap="none" spc="0" normalizeH="0" baseline="0" noProof="0">
+                          <a:ln>
+                            <a:noFill/>
+                          </a:ln>
+                          <a:solidFill>
+                            <a:prstClr val="black"/>
+                          </a:solidFill>
+                          <a:effectLst/>
+                          <a:uLnTx/>
+                          <a:uFillTx/>
+                          <a:latin typeface="Calibri" panose="020F0502020204030204"/>
+                          <a:ea typeface="맑은 고딕" panose="020B0503020000020004" pitchFamily="50" charset="-127"/>
+                          <a:cs typeface="+mn-cs"/>
+                        </a:rPr>
+                        <a:t>1</a:t>
+                      </a:r>
+                      <a:endParaRPr lang="ko-KR" altLang="en-US" sz="1400" dirty="0"/>
+                    </a:p>
+                  </a:txBody>
+                  <a:tcPr marL="0" marR="0" marT="0" marB="0" anchor="ctr">
+                    <a:solidFill>
+                      <a:srgbClr val="C00000"/>
+                    </a:solidFill>
+                  </a:tcPr>
+                </a:tc>
+                <a:tc>
+                  <a:txBody>
+                    <a:bodyPr/>
+                    <a:lstStyle/>
+                    <a:p>
+                      <a:pPr algn="ctr" latinLnBrk="1"/>
+                      <a:r>
+                        <a:rPr kumimoji="0" lang="en-US" altLang="ko-KR" sz="1400" b="0" i="0" u="none" strike="noStrike" kern="1200" cap="none" spc="0" normalizeH="0" baseline="0" noProof="0">
+                          <a:ln>
+                            <a:noFill/>
+                          </a:ln>
+                          <a:solidFill>
+                            <a:prstClr val="black"/>
+                          </a:solidFill>
+                          <a:effectLst/>
+                          <a:uLnTx/>
+                          <a:uFillTx/>
+                          <a:latin typeface="Calibri" panose="020F0502020204030204"/>
+                          <a:ea typeface="맑은 고딕" panose="020B0503020000020004" pitchFamily="50" charset="-127"/>
+                          <a:cs typeface="+mn-cs"/>
+                        </a:rPr>
+                        <a:t>0</a:t>
+                      </a:r>
+                      <a:endParaRPr lang="ko-KR" altLang="en-US" sz="1400" dirty="0"/>
+                    </a:p>
+                  </a:txBody>
+                  <a:tcPr marL="0" marR="0" marT="0" marB="0" anchor="ctr">
+                    <a:noFill/>
+                  </a:tcPr>
+                </a:tc>
+                <a:tc>
+                  <a:txBody>
+                    <a:bodyPr/>
+                    <a:lstStyle/>
+                    <a:p>
+                      <a:pPr algn="ctr" latinLnBrk="1"/>
+                      <a:r>
+                        <a:rPr kumimoji="0" lang="en-US" altLang="ko-KR" sz="1400" b="0" i="0" u="none" strike="noStrike" kern="1200" cap="none" spc="0" normalizeH="0" baseline="0" noProof="0">
+                          <a:ln>
+                            <a:noFill/>
+                          </a:ln>
+                          <a:solidFill>
+                            <a:prstClr val="black"/>
+                          </a:solidFill>
+                          <a:effectLst/>
+                          <a:uLnTx/>
+                          <a:uFillTx/>
+                          <a:latin typeface="Calibri" panose="020F0502020204030204"/>
+                          <a:ea typeface="맑은 고딕" panose="020B0503020000020004" pitchFamily="50" charset="-127"/>
+                          <a:cs typeface="+mn-cs"/>
+                        </a:rPr>
+                        <a:t>0</a:t>
+                      </a:r>
+                      <a:endParaRPr lang="ko-KR" altLang="en-US" sz="1400" dirty="0"/>
+                    </a:p>
+                  </a:txBody>
+                  <a:tcPr marL="0" marR="0" marT="0" marB="0" anchor="ctr">
+                    <a:noFill/>
+                  </a:tcPr>
+                </a:tc>
+                <a:extLst>
+                  <a:ext uri="{0D108BD9-81ED-4DB2-BD59-A6C34878D82A}">
+                    <a16:rowId xmlns:a16="http://schemas.microsoft.com/office/drawing/2014/main" val="1305972134"/>
+                  </a:ext>
+                </a:extLst>
+              </a:tr>
+              <a:tr h="252000">
+                <a:tc>
+                  <a:txBody>
+                    <a:bodyPr/>
+                    <a:lstStyle/>
+                    <a:p>
+                      <a:pPr algn="ctr" latinLnBrk="1"/>
+                      <a:r>
+                        <a:rPr lang="en-US" altLang="ko-KR" sz="1600"/>
+                        <a:t>4</a:t>
+                      </a:r>
+                      <a:endParaRPr lang="ko-KR" altLang="en-US" sz="1600" dirty="0"/>
+                    </a:p>
+                  </a:txBody>
+                  <a:tcPr marL="0" marR="0" marT="0" marB="0" anchor="ctr">
+                    <a:solidFill>
+                      <a:schemeClr val="bg1">
+                        <a:lumMod val="85000"/>
+                      </a:schemeClr>
+                    </a:solidFill>
+                  </a:tcPr>
+                </a:tc>
+                <a:tc>
+                  <a:txBody>
+                    <a:bodyPr/>
+                    <a:lstStyle/>
+                    <a:p>
+                      <a:pPr marL="0" marR="0" lvl="0" indent="0" algn="ctr" defTabSz="914400" rtl="0" eaLnBrk="1" fontAlgn="auto" latinLnBrk="1" hangingPunct="1">
+                        <a:lnSpc>
+                          <a:spcPct val="100000"/>
+                        </a:lnSpc>
+                        <a:spcBef>
+                          <a:spcPts val="0"/>
+                        </a:spcBef>
+                        <a:spcAft>
+                          <a:spcPts val="0"/>
+                        </a:spcAft>
+                        <a:buClrTx/>
+                        <a:buSzTx/>
+                        <a:buFontTx/>
+                        <a:buNone/>
+                        <a:tabLst/>
+                        <a:defRPr/>
+                      </a:pPr>
+                      <a:r>
+                        <a:rPr kumimoji="0" lang="en-US" altLang="ko-KR" sz="1400" b="0" i="0" u="none" strike="noStrike" kern="1200" cap="none" spc="0" normalizeH="0" baseline="0" noProof="0">
+                          <a:ln>
+                            <a:noFill/>
+                          </a:ln>
+                          <a:solidFill>
+                            <a:prstClr val="black"/>
+                          </a:solidFill>
+                          <a:effectLst/>
+                          <a:uLnTx/>
+                          <a:uFillTx/>
+                          <a:latin typeface="Calibri" panose="020F0502020204030204"/>
+                          <a:ea typeface="맑은 고딕" panose="020B0503020000020004" pitchFamily="50" charset="-127"/>
+                          <a:cs typeface="+mn-cs"/>
+                        </a:rPr>
+                        <a:t>1</a:t>
+                      </a:r>
+                      <a:endParaRPr kumimoji="0" lang="ko-KR" altLang="en-US" sz="1400" b="0" i="0" u="none" strike="noStrike" kern="1200" cap="none" spc="0" normalizeH="0" baseline="0" noProof="0" dirty="0">
+                        <a:ln>
+                          <a:noFill/>
+                        </a:ln>
+                        <a:solidFill>
+                          <a:prstClr val="black"/>
+                        </a:solidFill>
+                        <a:effectLst/>
+                        <a:uLnTx/>
+                        <a:uFillTx/>
+                        <a:latin typeface="Calibri" panose="020F0502020204030204"/>
+                        <a:ea typeface="맑은 고딕" panose="020B0503020000020004" pitchFamily="50" charset="-127"/>
+                        <a:cs typeface="+mn-cs"/>
+                      </a:endParaRPr>
+                    </a:p>
+                  </a:txBody>
+                  <a:tcPr marL="0" marR="0" marT="0" marB="0" anchor="ctr"/>
+                </a:tc>
+                <a:tc>
+                  <a:txBody>
+                    <a:bodyPr/>
+                    <a:lstStyle/>
+                    <a:p>
+                      <a:pPr algn="ctr" latinLnBrk="1"/>
+                      <a:r>
+                        <a:rPr kumimoji="0" lang="en-US" altLang="ko-KR" sz="1400" b="0" i="0" u="none" strike="noStrike" kern="1200" cap="none" spc="0" normalizeH="0" baseline="0" noProof="0">
+                          <a:ln>
+                            <a:noFill/>
+                          </a:ln>
+                          <a:solidFill>
+                            <a:prstClr val="black"/>
+                          </a:solidFill>
+                          <a:effectLst/>
+                          <a:uLnTx/>
+                          <a:uFillTx/>
+                          <a:latin typeface="Calibri" panose="020F0502020204030204"/>
+                          <a:ea typeface="맑은 고딕" panose="020B0503020000020004" pitchFamily="50" charset="-127"/>
+                          <a:cs typeface="+mn-cs"/>
+                        </a:rPr>
+                        <a:t>0</a:t>
+                      </a:r>
+                      <a:endParaRPr lang="ko-KR" altLang="en-US" sz="1400" dirty="0"/>
+                    </a:p>
+                  </a:txBody>
+                  <a:tcPr marL="0" marR="0" marT="0" marB="0" anchor="ctr">
+                    <a:solidFill>
+                      <a:srgbClr val="00B050"/>
+                    </a:solidFill>
+                  </a:tcPr>
+                </a:tc>
+                <a:tc>
+                  <a:txBody>
+                    <a:bodyPr/>
+                    <a:lstStyle/>
+                    <a:p>
+                      <a:pPr marL="0" marR="0" lvl="0" indent="0" algn="ctr" defTabSz="914400" rtl="0" eaLnBrk="1" fontAlgn="auto" latinLnBrk="1" hangingPunct="1">
+                        <a:lnSpc>
+                          <a:spcPct val="100000"/>
+                        </a:lnSpc>
+                        <a:spcBef>
+                          <a:spcPts val="0"/>
+                        </a:spcBef>
+                        <a:spcAft>
+                          <a:spcPts val="0"/>
+                        </a:spcAft>
+                        <a:buClrTx/>
+                        <a:buSzTx/>
+                        <a:buFontTx/>
+                        <a:buNone/>
+                        <a:tabLst/>
+                        <a:defRPr/>
+                      </a:pPr>
+                      <a:r>
+                        <a:rPr kumimoji="0" lang="en-US" altLang="ko-KR" sz="1400" b="0" i="0" u="none" strike="noStrike" kern="1200" cap="none" spc="0" normalizeH="0" baseline="0" noProof="0">
+                          <a:ln>
+                            <a:noFill/>
+                          </a:ln>
+                          <a:solidFill>
+                            <a:prstClr val="black"/>
+                          </a:solidFill>
+                          <a:effectLst/>
+                          <a:uLnTx/>
+                          <a:uFillTx/>
+                          <a:latin typeface="Calibri" panose="020F0502020204030204"/>
+                          <a:ea typeface="맑은 고딕" panose="020B0503020000020004" pitchFamily="50" charset="-127"/>
+                          <a:cs typeface="+mn-cs"/>
+                        </a:rPr>
+                        <a:t>0</a:t>
+                      </a:r>
+                      <a:endParaRPr kumimoji="0" lang="ko-KR" altLang="en-US" sz="1400" b="0" i="0" u="none" strike="noStrike" kern="1200" cap="none" spc="0" normalizeH="0" baseline="0" noProof="0" dirty="0">
+                        <a:ln>
+                          <a:noFill/>
+                        </a:ln>
+                        <a:solidFill>
+                          <a:prstClr val="black"/>
+                        </a:solidFill>
+                        <a:effectLst/>
+                        <a:uLnTx/>
+                        <a:uFillTx/>
+                        <a:latin typeface="Calibri" panose="020F0502020204030204"/>
+                        <a:ea typeface="맑은 고딕" panose="020B0503020000020004" pitchFamily="50" charset="-127"/>
+                        <a:cs typeface="+mn-cs"/>
+                      </a:endParaRPr>
+                    </a:p>
+                  </a:txBody>
+                  <a:tcPr marL="0" marR="0" marT="0" marB="0" anchor="ctr"/>
+                </a:tc>
+                <a:extLst>
+                  <a:ext uri="{0D108BD9-81ED-4DB2-BD59-A6C34878D82A}">
+                    <a16:rowId xmlns:a16="http://schemas.microsoft.com/office/drawing/2014/main" val="2637998928"/>
+                  </a:ext>
+                </a:extLst>
+              </a:tr>
+              <a:tr h="252000">
+                <a:tc>
+                  <a:txBody>
+                    <a:bodyPr/>
+                    <a:lstStyle/>
+                    <a:p>
+                      <a:pPr algn="ctr" latinLnBrk="1"/>
+                      <a:r>
+                        <a:rPr lang="en-US" altLang="ko-KR" sz="1600" dirty="0"/>
+                        <a:t>5</a:t>
+                      </a:r>
+                      <a:endParaRPr lang="ko-KR" altLang="en-US" sz="1600" dirty="0"/>
+                    </a:p>
+                  </a:txBody>
+                  <a:tcPr marL="0" marR="0" marT="0" marB="0" anchor="ctr">
+                    <a:solidFill>
+                      <a:schemeClr val="bg1">
+                        <a:lumMod val="85000"/>
+                      </a:schemeClr>
+                    </a:solidFill>
+                  </a:tcPr>
+                </a:tc>
+                <a:tc>
+                  <a:txBody>
+                    <a:bodyPr/>
+                    <a:lstStyle/>
+                    <a:p>
+                      <a:pPr marL="0" marR="0" lvl="0" indent="0" algn="ctr" defTabSz="914400" rtl="0" eaLnBrk="1" fontAlgn="auto" latinLnBrk="1" hangingPunct="1">
+                        <a:lnSpc>
+                          <a:spcPct val="100000"/>
+                        </a:lnSpc>
+                        <a:spcBef>
+                          <a:spcPts val="0"/>
+                        </a:spcBef>
+                        <a:spcAft>
+                          <a:spcPts val="0"/>
+                        </a:spcAft>
+                        <a:buClrTx/>
+                        <a:buSzTx/>
+                        <a:buFontTx/>
+                        <a:buNone/>
+                        <a:tabLst/>
+                        <a:defRPr/>
+                      </a:pPr>
+                      <a:r>
+                        <a:rPr kumimoji="0" lang="en-US" altLang="ko-KR" sz="1400" b="0" i="0" u="none" strike="noStrike" kern="1200" cap="none" spc="0" normalizeH="0" baseline="0" noProof="0">
+                          <a:ln>
+                            <a:noFill/>
+                          </a:ln>
+                          <a:solidFill>
+                            <a:prstClr val="black"/>
+                          </a:solidFill>
+                          <a:effectLst/>
+                          <a:uLnTx/>
+                          <a:uFillTx/>
+                          <a:latin typeface="Calibri" panose="020F0502020204030204"/>
+                          <a:ea typeface="맑은 고딕" panose="020B0503020000020004" pitchFamily="50" charset="-127"/>
+                          <a:cs typeface="+mn-cs"/>
+                        </a:rPr>
+                        <a:t>1</a:t>
+                      </a:r>
+                      <a:endParaRPr kumimoji="0" lang="ko-KR" altLang="en-US" sz="1400" b="0" i="0" u="none" strike="noStrike" kern="1200" cap="none" spc="0" normalizeH="0" baseline="0" noProof="0" dirty="0">
+                        <a:ln>
+                          <a:noFill/>
+                        </a:ln>
+                        <a:solidFill>
+                          <a:prstClr val="black"/>
+                        </a:solidFill>
+                        <a:effectLst/>
+                        <a:uLnTx/>
+                        <a:uFillTx/>
+                        <a:latin typeface="Calibri" panose="020F0502020204030204"/>
+                        <a:ea typeface="맑은 고딕" panose="020B0503020000020004" pitchFamily="50" charset="-127"/>
+                        <a:cs typeface="+mn-cs"/>
+                      </a:endParaRPr>
+                    </a:p>
+                  </a:txBody>
+                  <a:tcPr marL="0" marR="0" marT="0" marB="0" anchor="ctr"/>
+                </a:tc>
+                <a:tc>
+                  <a:txBody>
+                    <a:bodyPr/>
+                    <a:lstStyle/>
+                    <a:p>
+                      <a:pPr algn="ctr" latinLnBrk="1"/>
+                      <a:r>
+                        <a:rPr kumimoji="0" lang="en-US" altLang="ko-KR" sz="1400" b="0" i="0" u="none" strike="noStrike" kern="1200" cap="none" spc="0" normalizeH="0" baseline="0" noProof="0">
+                          <a:ln>
+                            <a:noFill/>
+                          </a:ln>
+                          <a:solidFill>
+                            <a:prstClr val="black"/>
+                          </a:solidFill>
+                          <a:effectLst/>
+                          <a:uLnTx/>
+                          <a:uFillTx/>
+                          <a:latin typeface="Calibri" panose="020F0502020204030204"/>
+                          <a:ea typeface="맑은 고딕" panose="020B0503020000020004" pitchFamily="50" charset="-127"/>
+                          <a:cs typeface="+mn-cs"/>
+                        </a:rPr>
+                        <a:t>0</a:t>
+                      </a:r>
+                      <a:endParaRPr lang="ko-KR" altLang="en-US" sz="1400" dirty="0"/>
+                    </a:p>
+                  </a:txBody>
+                  <a:tcPr marL="0" marR="0" marT="0" marB="0" anchor="ctr">
+                    <a:solidFill>
+                      <a:srgbClr val="00B050"/>
+                    </a:solidFill>
+                  </a:tcPr>
+                </a:tc>
+                <a:tc>
+                  <a:txBody>
+                    <a:bodyPr/>
+                    <a:lstStyle/>
+                    <a:p>
+                      <a:pPr marL="0" marR="0" lvl="0" indent="0" algn="ctr" defTabSz="914400" rtl="0" eaLnBrk="1" fontAlgn="auto" latinLnBrk="1" hangingPunct="1">
+                        <a:lnSpc>
+                          <a:spcPct val="100000"/>
+                        </a:lnSpc>
+                        <a:spcBef>
+                          <a:spcPts val="0"/>
+                        </a:spcBef>
+                        <a:spcAft>
+                          <a:spcPts val="0"/>
+                        </a:spcAft>
+                        <a:buClrTx/>
+                        <a:buSzTx/>
+                        <a:buFontTx/>
+                        <a:buNone/>
+                        <a:tabLst/>
+                        <a:defRPr/>
+                      </a:pPr>
+                      <a:r>
+                        <a:rPr kumimoji="0" lang="en-US" altLang="ko-KR" sz="1400" b="0" i="0" u="none" strike="noStrike" kern="1200" cap="none" spc="0" normalizeH="0" baseline="0" noProof="0">
+                          <a:ln>
+                            <a:noFill/>
+                          </a:ln>
+                          <a:solidFill>
+                            <a:prstClr val="black"/>
+                          </a:solidFill>
+                          <a:effectLst/>
+                          <a:uLnTx/>
+                          <a:uFillTx/>
+                          <a:latin typeface="Calibri" panose="020F0502020204030204"/>
+                          <a:ea typeface="맑은 고딕" panose="020B0503020000020004" pitchFamily="50" charset="-127"/>
+                          <a:cs typeface="+mn-cs"/>
+                        </a:rPr>
+                        <a:t>0</a:t>
+                      </a:r>
+                      <a:endParaRPr kumimoji="0" lang="ko-KR" altLang="en-US" sz="1400" b="0" i="0" u="none" strike="noStrike" kern="1200" cap="none" spc="0" normalizeH="0" baseline="0" noProof="0" dirty="0">
+                        <a:ln>
+                          <a:noFill/>
+                        </a:ln>
+                        <a:solidFill>
+                          <a:prstClr val="black"/>
+                        </a:solidFill>
+                        <a:effectLst/>
+                        <a:uLnTx/>
+                        <a:uFillTx/>
+                        <a:latin typeface="Calibri" panose="020F0502020204030204"/>
+                        <a:ea typeface="맑은 고딕" panose="020B0503020000020004" pitchFamily="50" charset="-127"/>
+                        <a:cs typeface="+mn-cs"/>
+                      </a:endParaRPr>
+                    </a:p>
+                  </a:txBody>
+                  <a:tcPr marL="0" marR="0" marT="0" marB="0" anchor="ctr"/>
+                </a:tc>
+                <a:extLst>
+                  <a:ext uri="{0D108BD9-81ED-4DB2-BD59-A6C34878D82A}">
+                    <a16:rowId xmlns:a16="http://schemas.microsoft.com/office/drawing/2014/main" val="86334426"/>
+                  </a:ext>
+                </a:extLst>
+              </a:tr>
+              <a:tr h="252000">
+                <a:tc>
+                  <a:txBody>
+                    <a:bodyPr/>
+                    <a:lstStyle/>
+                    <a:p>
+                      <a:pPr algn="ctr" latinLnBrk="1"/>
+                      <a:r>
+                        <a:rPr lang="en-US" altLang="ko-KR" sz="1600"/>
+                        <a:t>6</a:t>
+                      </a:r>
+                      <a:endParaRPr lang="ko-KR" altLang="en-US" sz="1600" dirty="0"/>
+                    </a:p>
+                  </a:txBody>
+                  <a:tcPr marL="0" marR="0" marT="0" marB="0" anchor="ctr">
+                    <a:solidFill>
+                      <a:schemeClr val="bg1">
+                        <a:lumMod val="85000"/>
+                      </a:schemeClr>
+                    </a:solidFill>
+                  </a:tcPr>
+                </a:tc>
+                <a:tc>
+                  <a:txBody>
+                    <a:bodyPr/>
+                    <a:lstStyle/>
+                    <a:p>
+                      <a:pPr marL="0" marR="0" lvl="0" indent="0" algn="ctr" defTabSz="914400" rtl="0" eaLnBrk="1" fontAlgn="auto" latinLnBrk="1" hangingPunct="1">
+                        <a:lnSpc>
+                          <a:spcPct val="100000"/>
+                        </a:lnSpc>
+                        <a:spcBef>
+                          <a:spcPts val="0"/>
+                        </a:spcBef>
+                        <a:spcAft>
+                          <a:spcPts val="0"/>
+                        </a:spcAft>
+                        <a:buClrTx/>
+                        <a:buSzTx/>
+                        <a:buFontTx/>
+                        <a:buNone/>
+                        <a:tabLst/>
+                        <a:defRPr/>
+                      </a:pPr>
+                      <a:r>
+                        <a:rPr kumimoji="0" lang="en-US" altLang="ko-KR" sz="1400" b="0" i="0" u="none" strike="noStrike" kern="1200" cap="none" spc="0" normalizeH="0" baseline="0" noProof="0">
+                          <a:ln>
+                            <a:noFill/>
+                          </a:ln>
+                          <a:solidFill>
+                            <a:prstClr val="black"/>
+                          </a:solidFill>
+                          <a:effectLst/>
+                          <a:uLnTx/>
+                          <a:uFillTx/>
+                          <a:latin typeface="Calibri" panose="020F0502020204030204"/>
+                          <a:ea typeface="맑은 고딕" panose="020B0503020000020004" pitchFamily="50" charset="-127"/>
+                          <a:cs typeface="+mn-cs"/>
+                        </a:rPr>
+                        <a:t>1</a:t>
+                      </a:r>
+                      <a:endParaRPr kumimoji="0" lang="ko-KR" altLang="en-US" sz="1400" b="0" i="0" u="none" strike="noStrike" kern="1200" cap="none" spc="0" normalizeH="0" baseline="0" noProof="0" dirty="0">
+                        <a:ln>
+                          <a:noFill/>
+                        </a:ln>
+                        <a:solidFill>
+                          <a:prstClr val="black"/>
+                        </a:solidFill>
+                        <a:effectLst/>
+                        <a:uLnTx/>
+                        <a:uFillTx/>
+                        <a:latin typeface="Calibri" panose="020F0502020204030204"/>
+                        <a:ea typeface="맑은 고딕" panose="020B0503020000020004" pitchFamily="50" charset="-127"/>
+                        <a:cs typeface="+mn-cs"/>
+                      </a:endParaRPr>
+                    </a:p>
+                  </a:txBody>
+                  <a:tcPr marL="0" marR="0" marT="0" marB="0" anchor="ctr"/>
+                </a:tc>
+                <a:tc>
+                  <a:txBody>
+                    <a:bodyPr/>
+                    <a:lstStyle/>
+                    <a:p>
+                      <a:pPr algn="ctr" latinLnBrk="1"/>
+                      <a:r>
+                        <a:rPr kumimoji="0" lang="en-US" altLang="ko-KR" sz="1400" b="0" i="0" u="none" strike="noStrike" kern="1200" cap="none" spc="0" normalizeH="0" baseline="0" noProof="0">
+                          <a:ln>
+                            <a:noFill/>
+                          </a:ln>
+                          <a:solidFill>
+                            <a:prstClr val="black"/>
+                          </a:solidFill>
+                          <a:effectLst/>
+                          <a:uLnTx/>
+                          <a:uFillTx/>
+                          <a:latin typeface="Calibri" panose="020F0502020204030204"/>
+                          <a:ea typeface="맑은 고딕" panose="020B0503020000020004" pitchFamily="50" charset="-127"/>
+                          <a:cs typeface="+mn-cs"/>
+                        </a:rPr>
+                        <a:t>0</a:t>
+                      </a:r>
+                      <a:endParaRPr lang="ko-KR" altLang="en-US" sz="1400" dirty="0"/>
+                    </a:p>
+                  </a:txBody>
+                  <a:tcPr marL="0" marR="0" marT="0" marB="0" anchor="ctr">
+                    <a:solidFill>
+                      <a:srgbClr val="00B050"/>
+                    </a:solidFill>
+                  </a:tcPr>
+                </a:tc>
+                <a:tc>
+                  <a:txBody>
+                    <a:bodyPr/>
+                    <a:lstStyle/>
+                    <a:p>
+                      <a:pPr algn="ctr" latinLnBrk="1"/>
+                      <a:r>
+                        <a:rPr kumimoji="0" lang="en-US" altLang="ko-KR" sz="1400" b="0" i="0" u="none" strike="noStrike" kern="1200" cap="none" spc="0" normalizeH="0" baseline="0" noProof="0">
+                          <a:ln>
+                            <a:noFill/>
+                          </a:ln>
+                          <a:solidFill>
+                            <a:prstClr val="black"/>
+                          </a:solidFill>
+                          <a:effectLst/>
+                          <a:uLnTx/>
+                          <a:uFillTx/>
+                          <a:latin typeface="Calibri" panose="020F0502020204030204"/>
+                          <a:ea typeface="맑은 고딕" panose="020B0503020000020004" pitchFamily="50" charset="-127"/>
+                          <a:cs typeface="+mn-cs"/>
+                        </a:rPr>
+                        <a:t>0</a:t>
+                      </a:r>
+                      <a:endParaRPr lang="ko-KR" altLang="en-US" sz="1400" dirty="0"/>
+                    </a:p>
+                  </a:txBody>
+                  <a:tcPr marL="0" marR="0" marT="0" marB="0" anchor="ctr"/>
+                </a:tc>
+                <a:extLst>
+                  <a:ext uri="{0D108BD9-81ED-4DB2-BD59-A6C34878D82A}">
+                    <a16:rowId xmlns:a16="http://schemas.microsoft.com/office/drawing/2014/main" val="3733004441"/>
+                  </a:ext>
+                </a:extLst>
+              </a:tr>
+              <a:tr h="252000">
+                <a:tc>
+                  <a:txBody>
+                    <a:bodyPr/>
+                    <a:lstStyle/>
+                    <a:p>
+                      <a:pPr algn="ctr" latinLnBrk="1"/>
+                      <a:r>
+                        <a:rPr lang="en-US" altLang="ko-KR" sz="1600"/>
+                        <a:t>7</a:t>
+                      </a:r>
+                      <a:endParaRPr lang="ko-KR" altLang="en-US" sz="1600" dirty="0"/>
+                    </a:p>
+                  </a:txBody>
+                  <a:tcPr marL="0" marR="0" marT="0" marB="0" anchor="ctr">
+                    <a:solidFill>
+                      <a:schemeClr val="bg1">
+                        <a:lumMod val="85000"/>
+                      </a:schemeClr>
+                    </a:solidFill>
+                  </a:tcPr>
+                </a:tc>
+                <a:tc>
+                  <a:txBody>
+                    <a:bodyPr/>
+                    <a:lstStyle/>
+                    <a:p>
+                      <a:pPr algn="ctr" latinLnBrk="1"/>
+                      <a:r>
+                        <a:rPr kumimoji="0" lang="en-US" altLang="ko-KR" sz="1400" b="0" i="0" u="none" strike="noStrike" kern="1200" cap="none" spc="0" normalizeH="0" baseline="0" noProof="0">
+                          <a:ln>
+                            <a:noFill/>
+                          </a:ln>
+                          <a:solidFill>
+                            <a:prstClr val="black"/>
+                          </a:solidFill>
+                          <a:effectLst/>
+                          <a:uLnTx/>
+                          <a:uFillTx/>
+                          <a:latin typeface="Calibri" panose="020F0502020204030204"/>
+                          <a:ea typeface="맑은 고딕" panose="020B0503020000020004" pitchFamily="50" charset="-127"/>
+                          <a:cs typeface="+mn-cs"/>
+                        </a:rPr>
+                        <a:t>1</a:t>
+                      </a:r>
+                      <a:endParaRPr lang="ko-KR" altLang="en-US" sz="1400" dirty="0"/>
+                    </a:p>
+                  </a:txBody>
+                  <a:tcPr marL="0" marR="0" marT="0" marB="0" anchor="ctr"/>
+                </a:tc>
+                <a:tc>
+                  <a:txBody>
+                    <a:bodyPr/>
+                    <a:lstStyle/>
+                    <a:p>
+                      <a:pPr algn="ctr" latinLnBrk="1"/>
+                      <a:r>
+                        <a:rPr kumimoji="0" lang="en-US" altLang="ko-KR" sz="1400" b="0" i="0" u="none" strike="noStrike" kern="1200" cap="none" spc="0" normalizeH="0" baseline="0" noProof="0">
+                          <a:ln>
+                            <a:noFill/>
+                          </a:ln>
+                          <a:solidFill>
+                            <a:prstClr val="black"/>
+                          </a:solidFill>
+                          <a:effectLst/>
+                          <a:uLnTx/>
+                          <a:uFillTx/>
+                          <a:latin typeface="Calibri" panose="020F0502020204030204"/>
+                          <a:ea typeface="맑은 고딕" panose="020B0503020000020004" pitchFamily="50" charset="-127"/>
+                          <a:cs typeface="+mn-cs"/>
+                        </a:rPr>
+                        <a:t>0</a:t>
+                      </a:r>
+                      <a:endParaRPr lang="ko-KR" altLang="en-US" sz="1400" dirty="0"/>
+                    </a:p>
+                  </a:txBody>
+                  <a:tcPr marL="0" marR="0" marT="0" marB="0" anchor="ctr"/>
+                </a:tc>
+                <a:tc>
+                  <a:txBody>
+                    <a:bodyPr/>
+                    <a:lstStyle/>
+                    <a:p>
+                      <a:pPr marL="0" marR="0" lvl="0" indent="0" algn="ctr" defTabSz="914400" rtl="0" eaLnBrk="1" fontAlgn="auto" latinLnBrk="1" hangingPunct="1">
+                        <a:lnSpc>
+                          <a:spcPct val="100000"/>
+                        </a:lnSpc>
+                        <a:spcBef>
+                          <a:spcPts val="0"/>
+                        </a:spcBef>
+                        <a:spcAft>
+                          <a:spcPts val="0"/>
+                        </a:spcAft>
+                        <a:buClrTx/>
+                        <a:buSzTx/>
+                        <a:buFontTx/>
+                        <a:buNone/>
+                        <a:tabLst/>
+                        <a:defRPr/>
+                      </a:pPr>
+                      <a:r>
+                        <a:rPr kumimoji="0" lang="en-US" altLang="ko-KR" sz="1400" b="0" i="0" u="none" strike="noStrike" kern="1200" cap="none" spc="0" normalizeH="0" baseline="0" noProof="0">
+                          <a:ln>
+                            <a:noFill/>
+                          </a:ln>
+                          <a:solidFill>
+                            <a:prstClr val="black"/>
+                          </a:solidFill>
+                          <a:effectLst/>
+                          <a:uLnTx/>
+                          <a:uFillTx/>
+                          <a:latin typeface="Calibri" panose="020F0502020204030204"/>
+                          <a:ea typeface="맑은 고딕" panose="020B0503020000020004" pitchFamily="50" charset="-127"/>
+                          <a:cs typeface="+mn-cs"/>
+                        </a:rPr>
+                        <a:t>0</a:t>
+                      </a:r>
+                      <a:endParaRPr kumimoji="0" lang="ko-KR" altLang="en-US" sz="1400" b="0" i="0" u="none" strike="noStrike" kern="1200" cap="none" spc="0" normalizeH="0" baseline="0" noProof="0" dirty="0">
+                        <a:ln>
+                          <a:noFill/>
+                        </a:ln>
+                        <a:solidFill>
+                          <a:prstClr val="black"/>
+                        </a:solidFill>
+                        <a:effectLst/>
+                        <a:uLnTx/>
+                        <a:uFillTx/>
+                        <a:latin typeface="Calibri" panose="020F0502020204030204"/>
+                        <a:ea typeface="맑은 고딕" panose="020B0503020000020004" pitchFamily="50" charset="-127"/>
+                        <a:cs typeface="+mn-cs"/>
+                      </a:endParaRPr>
+                    </a:p>
+                  </a:txBody>
+                  <a:tcPr marL="0" marR="0" marT="0" marB="0" anchor="ctr">
+                    <a:solidFill>
+                      <a:srgbClr val="4A66AC"/>
+                    </a:solidFill>
+                  </a:tcPr>
+                </a:tc>
+                <a:extLst>
+                  <a:ext uri="{0D108BD9-81ED-4DB2-BD59-A6C34878D82A}">
+                    <a16:rowId xmlns:a16="http://schemas.microsoft.com/office/drawing/2014/main" val="3849493607"/>
+                  </a:ext>
+                </a:extLst>
+              </a:tr>
+              <a:tr h="252000">
+                <a:tc>
+                  <a:txBody>
+                    <a:bodyPr/>
+                    <a:lstStyle/>
+                    <a:p>
+                      <a:pPr algn="ctr" latinLnBrk="1"/>
+                      <a:r>
+                        <a:rPr lang="en-US" altLang="ko-KR" sz="1600"/>
+                        <a:t>8</a:t>
+                      </a:r>
+                      <a:endParaRPr lang="ko-KR" altLang="en-US" sz="1600" dirty="0"/>
+                    </a:p>
+                  </a:txBody>
+                  <a:tcPr marL="0" marR="0" marT="0" marB="0" anchor="ctr">
+                    <a:solidFill>
+                      <a:schemeClr val="bg1">
+                        <a:lumMod val="85000"/>
+                      </a:schemeClr>
+                    </a:solidFill>
+                  </a:tcPr>
+                </a:tc>
+                <a:tc>
+                  <a:txBody>
+                    <a:bodyPr/>
+                    <a:lstStyle/>
+                    <a:p>
+                      <a:pPr algn="ctr" latinLnBrk="1"/>
+                      <a:r>
+                        <a:rPr kumimoji="0" lang="en-US" altLang="ko-KR" sz="1400" b="0" i="0" u="none" strike="noStrike" kern="1200" cap="none" spc="0" normalizeH="0" baseline="0" noProof="0">
+                          <a:ln>
+                            <a:noFill/>
+                          </a:ln>
+                          <a:solidFill>
+                            <a:prstClr val="black"/>
+                          </a:solidFill>
+                          <a:effectLst/>
+                          <a:uLnTx/>
+                          <a:uFillTx/>
+                          <a:latin typeface="Calibri" panose="020F0502020204030204"/>
+                          <a:ea typeface="맑은 고딕" panose="020B0503020000020004" pitchFamily="50" charset="-127"/>
+                          <a:cs typeface="+mn-cs"/>
+                        </a:rPr>
+                        <a:t>1</a:t>
+                      </a:r>
+                      <a:endParaRPr lang="ko-KR" altLang="en-US" sz="1400" dirty="0"/>
+                    </a:p>
+                  </a:txBody>
+                  <a:tcPr marL="0" marR="0" marT="0" marB="0" anchor="ctr"/>
+                </a:tc>
+                <a:tc>
+                  <a:txBody>
+                    <a:bodyPr/>
+                    <a:lstStyle/>
+                    <a:p>
+                      <a:pPr marL="0" marR="0" lvl="0" indent="0" algn="ctr" defTabSz="914400" rtl="0" eaLnBrk="1" fontAlgn="auto" latinLnBrk="1" hangingPunct="1">
+                        <a:lnSpc>
+                          <a:spcPct val="100000"/>
+                        </a:lnSpc>
+                        <a:spcBef>
+                          <a:spcPts val="0"/>
+                        </a:spcBef>
+                        <a:spcAft>
+                          <a:spcPts val="0"/>
+                        </a:spcAft>
+                        <a:buClrTx/>
+                        <a:buSzTx/>
+                        <a:buFontTx/>
+                        <a:buNone/>
+                        <a:tabLst/>
+                        <a:defRPr/>
+                      </a:pPr>
+                      <a:r>
+                        <a:rPr kumimoji="0" lang="en-US" altLang="ko-KR" sz="1400" b="0" i="0" u="none" strike="noStrike" kern="1200" cap="none" spc="0" normalizeH="0" baseline="0" noProof="0">
+                          <a:ln>
+                            <a:noFill/>
+                          </a:ln>
+                          <a:solidFill>
+                            <a:prstClr val="black"/>
+                          </a:solidFill>
+                          <a:effectLst/>
+                          <a:uLnTx/>
+                          <a:uFillTx/>
+                          <a:latin typeface="Calibri" panose="020F0502020204030204"/>
+                          <a:ea typeface="맑은 고딕" panose="020B0503020000020004" pitchFamily="50" charset="-127"/>
+                          <a:cs typeface="+mn-cs"/>
+                        </a:rPr>
+                        <a:t>0</a:t>
+                      </a:r>
+                      <a:endParaRPr kumimoji="0" lang="ko-KR" altLang="en-US" sz="1400" b="0" i="0" u="none" strike="noStrike" kern="1200" cap="none" spc="0" normalizeH="0" baseline="0" noProof="0" dirty="0">
+                        <a:ln>
+                          <a:noFill/>
+                        </a:ln>
+                        <a:solidFill>
+                          <a:prstClr val="black"/>
+                        </a:solidFill>
+                        <a:effectLst/>
+                        <a:uLnTx/>
+                        <a:uFillTx/>
+                        <a:latin typeface="Calibri" panose="020F0502020204030204"/>
+                        <a:ea typeface="맑은 고딕" panose="020B0503020000020004" pitchFamily="50" charset="-127"/>
+                        <a:cs typeface="+mn-cs"/>
+                      </a:endParaRPr>
+                    </a:p>
+                  </a:txBody>
+                  <a:tcPr marL="0" marR="0" marT="0" marB="0" anchor="ctr"/>
+                </a:tc>
+                <a:tc>
+                  <a:txBody>
+                    <a:bodyPr/>
+                    <a:lstStyle/>
+                    <a:p>
+                      <a:pPr marL="0" marR="0" lvl="0" indent="0" algn="ctr" defTabSz="914400" rtl="0" eaLnBrk="1" fontAlgn="auto" latinLnBrk="1" hangingPunct="1">
+                        <a:lnSpc>
+                          <a:spcPct val="100000"/>
+                        </a:lnSpc>
+                        <a:spcBef>
+                          <a:spcPts val="0"/>
+                        </a:spcBef>
+                        <a:spcAft>
+                          <a:spcPts val="0"/>
+                        </a:spcAft>
+                        <a:buClrTx/>
+                        <a:buSzTx/>
+                        <a:buFontTx/>
+                        <a:buNone/>
+                        <a:tabLst/>
+                        <a:defRPr/>
+                      </a:pPr>
+                      <a:r>
+                        <a:rPr kumimoji="0" lang="en-US" altLang="ko-KR" sz="1400" b="0" i="0" u="none" strike="noStrike" kern="1200" cap="none" spc="0" normalizeH="0" baseline="0" noProof="0">
+                          <a:ln>
+                            <a:noFill/>
+                          </a:ln>
+                          <a:solidFill>
+                            <a:prstClr val="black"/>
+                          </a:solidFill>
+                          <a:effectLst/>
+                          <a:uLnTx/>
+                          <a:uFillTx/>
+                          <a:latin typeface="Calibri" panose="020F0502020204030204"/>
+                          <a:ea typeface="맑은 고딕" panose="020B0503020000020004" pitchFamily="50" charset="-127"/>
+                          <a:cs typeface="+mn-cs"/>
+                        </a:rPr>
+                        <a:t>0</a:t>
+                      </a:r>
+                      <a:endParaRPr kumimoji="0" lang="ko-KR" altLang="en-US" sz="1400" b="0" i="0" u="none" strike="noStrike" kern="1200" cap="none" spc="0" normalizeH="0" baseline="0" noProof="0" dirty="0">
+                        <a:ln>
+                          <a:noFill/>
+                        </a:ln>
+                        <a:solidFill>
+                          <a:prstClr val="black"/>
+                        </a:solidFill>
+                        <a:effectLst/>
+                        <a:uLnTx/>
+                        <a:uFillTx/>
+                        <a:latin typeface="Calibri" panose="020F0502020204030204"/>
+                        <a:ea typeface="맑은 고딕" panose="020B0503020000020004" pitchFamily="50" charset="-127"/>
+                        <a:cs typeface="+mn-cs"/>
+                      </a:endParaRPr>
+                    </a:p>
+                  </a:txBody>
+                  <a:tcPr marL="0" marR="0" marT="0" marB="0" anchor="ctr">
+                    <a:solidFill>
+                      <a:srgbClr val="4A66AC"/>
+                    </a:solidFill>
+                  </a:tcPr>
+                </a:tc>
+                <a:extLst>
+                  <a:ext uri="{0D108BD9-81ED-4DB2-BD59-A6C34878D82A}">
+                    <a16:rowId xmlns:a16="http://schemas.microsoft.com/office/drawing/2014/main" val="1837347859"/>
+                  </a:ext>
+                </a:extLst>
+              </a:tr>
+              <a:tr h="252000">
+                <a:tc>
+                  <a:txBody>
+                    <a:bodyPr/>
+                    <a:lstStyle/>
+                    <a:p>
+                      <a:pPr algn="ctr" latinLnBrk="1"/>
+                      <a:r>
+                        <a:rPr lang="en-US" altLang="ko-KR" sz="1600"/>
+                        <a:t>9</a:t>
+                      </a:r>
+                      <a:endParaRPr lang="ko-KR" altLang="en-US" sz="1600" dirty="0"/>
+                    </a:p>
+                  </a:txBody>
+                  <a:tcPr marL="0" marR="0" marT="0" marB="0" anchor="ctr">
+                    <a:solidFill>
+                      <a:schemeClr val="bg1">
+                        <a:lumMod val="85000"/>
+                      </a:schemeClr>
+                    </a:solidFill>
+                  </a:tcPr>
+                </a:tc>
+                <a:tc>
+                  <a:txBody>
+                    <a:bodyPr/>
+                    <a:lstStyle/>
+                    <a:p>
+                      <a:pPr algn="ctr" latinLnBrk="1"/>
+                      <a:r>
+                        <a:rPr kumimoji="0" lang="en-US" altLang="ko-KR" sz="1400" b="0" i="0" u="none" strike="noStrike" kern="1200" cap="none" spc="0" normalizeH="0" baseline="0" noProof="0" dirty="0">
+                          <a:ln>
+                            <a:noFill/>
+                          </a:ln>
+                          <a:solidFill>
+                            <a:prstClr val="black"/>
+                          </a:solidFill>
+                          <a:effectLst/>
+                          <a:uLnTx/>
+                          <a:uFillTx/>
+                          <a:latin typeface="Calibri" panose="020F0502020204030204"/>
+                          <a:ea typeface="맑은 고딕" panose="020B0503020000020004" pitchFamily="50" charset="-127"/>
+                          <a:cs typeface="+mn-cs"/>
+                        </a:rPr>
+                        <a:t>1</a:t>
+                      </a:r>
+                      <a:endParaRPr lang="ko-KR" altLang="en-US" sz="1400" dirty="0"/>
+                    </a:p>
+                  </a:txBody>
+                  <a:tcPr marL="0" marR="0" marT="0" marB="0" anchor="ctr"/>
+                </a:tc>
+                <a:tc>
+                  <a:txBody>
+                    <a:bodyPr/>
+                    <a:lstStyle/>
+                    <a:p>
+                      <a:pPr marL="0" marR="0" lvl="0" indent="0" algn="ctr" defTabSz="914400" rtl="0" eaLnBrk="1" fontAlgn="auto" latinLnBrk="1" hangingPunct="1">
+                        <a:lnSpc>
+                          <a:spcPct val="100000"/>
+                        </a:lnSpc>
+                        <a:spcBef>
+                          <a:spcPts val="0"/>
+                        </a:spcBef>
+                        <a:spcAft>
+                          <a:spcPts val="0"/>
+                        </a:spcAft>
+                        <a:buClrTx/>
+                        <a:buSzTx/>
+                        <a:buFontTx/>
+                        <a:buNone/>
+                        <a:tabLst/>
+                        <a:defRPr/>
+                      </a:pPr>
+                      <a:r>
+                        <a:rPr kumimoji="0" lang="en-US" altLang="ko-KR" sz="1400" b="0" i="0" u="none" strike="noStrike" kern="1200" cap="none" spc="0" normalizeH="0" baseline="0" noProof="0">
+                          <a:ln>
+                            <a:noFill/>
+                          </a:ln>
+                          <a:solidFill>
+                            <a:prstClr val="black"/>
+                          </a:solidFill>
+                          <a:effectLst/>
+                          <a:uLnTx/>
+                          <a:uFillTx/>
+                          <a:latin typeface="Calibri" panose="020F0502020204030204"/>
+                          <a:ea typeface="맑은 고딕" panose="020B0503020000020004" pitchFamily="50" charset="-127"/>
+                          <a:cs typeface="+mn-cs"/>
+                        </a:rPr>
+                        <a:t>0</a:t>
+                      </a:r>
+                      <a:endParaRPr kumimoji="0" lang="ko-KR" altLang="en-US" sz="1400" b="0" i="0" u="none" strike="noStrike" kern="1200" cap="none" spc="0" normalizeH="0" baseline="0" noProof="0" dirty="0">
+                        <a:ln>
+                          <a:noFill/>
+                        </a:ln>
+                        <a:solidFill>
+                          <a:prstClr val="black"/>
+                        </a:solidFill>
+                        <a:effectLst/>
+                        <a:uLnTx/>
+                        <a:uFillTx/>
+                        <a:latin typeface="Calibri" panose="020F0502020204030204"/>
+                        <a:ea typeface="맑은 고딕" panose="020B0503020000020004" pitchFamily="50" charset="-127"/>
+                        <a:cs typeface="+mn-cs"/>
+                      </a:endParaRPr>
+                    </a:p>
+                  </a:txBody>
+                  <a:tcPr marL="0" marR="0" marT="0" marB="0" anchor="ctr"/>
+                </a:tc>
+                <a:tc>
+                  <a:txBody>
+                    <a:bodyPr/>
+                    <a:lstStyle/>
+                    <a:p>
+                      <a:pPr marL="0" marR="0" lvl="0" indent="0" algn="ctr" defTabSz="914400" rtl="0" eaLnBrk="1" fontAlgn="auto" latinLnBrk="1" hangingPunct="1">
+                        <a:lnSpc>
+                          <a:spcPct val="100000"/>
+                        </a:lnSpc>
+                        <a:spcBef>
+                          <a:spcPts val="0"/>
+                        </a:spcBef>
+                        <a:spcAft>
+                          <a:spcPts val="0"/>
+                        </a:spcAft>
+                        <a:buClrTx/>
+                        <a:buSzTx/>
+                        <a:buFontTx/>
+                        <a:buNone/>
+                        <a:tabLst/>
+                        <a:defRPr/>
+                      </a:pPr>
+                      <a:r>
+                        <a:rPr kumimoji="0" lang="en-US" altLang="ko-KR" sz="1400" b="0" i="0" u="none" strike="noStrike" kern="1200" cap="none" spc="0" normalizeH="0" baseline="0" noProof="0" dirty="0">
+                          <a:ln>
+                            <a:noFill/>
+                          </a:ln>
+                          <a:solidFill>
+                            <a:prstClr val="black"/>
+                          </a:solidFill>
+                          <a:effectLst/>
+                          <a:uLnTx/>
+                          <a:uFillTx/>
+                          <a:latin typeface="Calibri" panose="020F0502020204030204"/>
+                          <a:ea typeface="맑은 고딕" panose="020B0503020000020004" pitchFamily="50" charset="-127"/>
+                          <a:cs typeface="+mn-cs"/>
+                        </a:rPr>
+                        <a:t>0</a:t>
+                      </a:r>
+                      <a:endParaRPr kumimoji="0" lang="ko-KR" altLang="en-US" sz="1400" b="0" i="0" u="none" strike="noStrike" kern="1200" cap="none" spc="0" normalizeH="0" baseline="0" noProof="0" dirty="0">
+                        <a:ln>
+                          <a:noFill/>
+                        </a:ln>
+                        <a:solidFill>
+                          <a:prstClr val="black"/>
+                        </a:solidFill>
+                        <a:effectLst/>
+                        <a:uLnTx/>
+                        <a:uFillTx/>
+                        <a:latin typeface="Calibri" panose="020F0502020204030204"/>
+                        <a:ea typeface="맑은 고딕" panose="020B0503020000020004" pitchFamily="50" charset="-127"/>
+                        <a:cs typeface="+mn-cs"/>
+                      </a:endParaRPr>
+                    </a:p>
+                  </a:txBody>
+                  <a:tcPr marL="0" marR="0" marT="0" marB="0" anchor="ctr">
+                    <a:solidFill>
+                      <a:srgbClr val="4A66AC"/>
+                    </a:solidFill>
+                  </a:tcPr>
+                </a:tc>
+                <a:extLst>
+                  <a:ext uri="{0D108BD9-81ED-4DB2-BD59-A6C34878D82A}">
+                    <a16:rowId xmlns:a16="http://schemas.microsoft.com/office/drawing/2014/main" val="1877037267"/>
+                  </a:ext>
+                </a:extLst>
+              </a:tr>
+            </a:tbl>
+          </a:graphicData>
+        </a:graphic>
+      </p:graphicFrame>
+      <p:sp>
+        <p:nvSpPr>
+          <p:cNvPr id="7" name="TextBox 6">
+            <a:extLst>
+              <a:ext uri="{FF2B5EF4-FFF2-40B4-BE49-F238E27FC236}">
+                <a16:creationId xmlns:a16="http://schemas.microsoft.com/office/drawing/2014/main" id="{ED3564CA-30DF-4D40-861C-B943975E7923}"/>
+              </a:ext>
+            </a:extLst>
+          </p:cNvPr>
+          <p:cNvSpPr txBox="1"/>
+          <p:nvPr/>
+        </p:nvSpPr>
+        <p:spPr>
+          <a:xfrm>
+            <a:off x="5154652" y="3821970"/>
+            <a:ext cx="1882695" cy="369332"/>
+          </a:xfrm>
+          <a:prstGeom prst="rect">
+            <a:avLst/>
+          </a:prstGeom>
+          <a:noFill/>
+        </p:spPr>
+        <p:txBody>
+          <a:bodyPr wrap="none" rtlCol="0">
+            <a:spAutoFit/>
+          </a:bodyPr>
+          <a:lstStyle/>
+          <a:p>
+            <a:pPr algn="ctr"/>
+            <a:r>
+              <a:rPr lang="en-US" altLang="ko-KR" b="1" dirty="0"/>
+              <a:t>Extreme Case 2</a:t>
+            </a:r>
+            <a:endParaRPr lang="ko-KR" altLang="en-US" b="1" dirty="0"/>
+          </a:p>
+        </p:txBody>
+      </p:sp>
+      <p:sp>
+        <p:nvSpPr>
+          <p:cNvPr id="8" name="타원 7">
+            <a:extLst>
+              <a:ext uri="{FF2B5EF4-FFF2-40B4-BE49-F238E27FC236}">
+                <a16:creationId xmlns:a16="http://schemas.microsoft.com/office/drawing/2014/main" id="{EE1053DF-3F87-4CB0-99FE-B7D1A6520DAE}"/>
+              </a:ext>
+            </a:extLst>
+          </p:cNvPr>
+          <p:cNvSpPr/>
+          <p:nvPr/>
+        </p:nvSpPr>
+        <p:spPr>
+          <a:xfrm>
+            <a:off x="1884348" y="1718904"/>
+            <a:ext cx="288000" cy="288000"/>
+          </a:xfrm>
+          <a:prstGeom prst="ellipse">
+            <a:avLst/>
+          </a:prstGeom>
+          <a:solidFill>
+            <a:srgbClr val="C00000"/>
+          </a:solidFill>
+        </p:spPr>
+        <p:style>
+          <a:lnRef idx="2">
+            <a:schemeClr val="accent1">
+              <a:shade val="50000"/>
+            </a:schemeClr>
+          </a:lnRef>
+          <a:fillRef idx="1">
+            <a:schemeClr val="accent1"/>
+          </a:fillRef>
+          <a:effectRef idx="0">
+            <a:schemeClr val="accent1"/>
+          </a:effectRef>
+          <a:fontRef idx="minor">
+            <a:schemeClr val="lt1"/>
+          </a:fontRef>
+        </p:style>
+        <p:txBody>
+          <a:bodyPr rtlCol="0" anchor="ctr"/>
+          <a:lstStyle/>
+          <a:p>
+            <a:pPr algn="ctr"/>
+            <a:r>
+              <a:rPr lang="en-US" altLang="ko-KR" dirty="0"/>
+              <a:t>3</a:t>
+            </a:r>
+            <a:endParaRPr lang="ko-KR" altLang="en-US" dirty="0"/>
+          </a:p>
+        </p:txBody>
+      </p:sp>
+      <p:sp>
+        <p:nvSpPr>
+          <p:cNvPr id="9" name="타원 8">
+            <a:extLst>
+              <a:ext uri="{FF2B5EF4-FFF2-40B4-BE49-F238E27FC236}">
+                <a16:creationId xmlns:a16="http://schemas.microsoft.com/office/drawing/2014/main" id="{0B99D85A-6C83-4655-8F02-CC96865A5D47}"/>
+              </a:ext>
+            </a:extLst>
+          </p:cNvPr>
+          <p:cNvSpPr/>
+          <p:nvPr/>
+        </p:nvSpPr>
+        <p:spPr>
+          <a:xfrm>
+            <a:off x="1346837" y="1444123"/>
+            <a:ext cx="288000" cy="288000"/>
+          </a:xfrm>
+          <a:prstGeom prst="ellipse">
+            <a:avLst/>
+          </a:prstGeom>
+          <a:solidFill>
+            <a:srgbClr val="C00000"/>
+          </a:solidFill>
+        </p:spPr>
+        <p:style>
+          <a:lnRef idx="2">
+            <a:schemeClr val="accent1">
+              <a:shade val="50000"/>
+            </a:schemeClr>
+          </a:lnRef>
+          <a:fillRef idx="1">
+            <a:schemeClr val="accent1"/>
+          </a:fillRef>
+          <a:effectRef idx="0">
+            <a:schemeClr val="accent1"/>
+          </a:effectRef>
+          <a:fontRef idx="minor">
+            <a:schemeClr val="lt1"/>
+          </a:fontRef>
+        </p:style>
+        <p:txBody>
+          <a:bodyPr rtlCol="0" anchor="ctr"/>
+          <a:lstStyle/>
+          <a:p>
+            <a:pPr algn="ctr"/>
+            <a:r>
+              <a:rPr lang="en-US" altLang="ko-KR" dirty="0"/>
+              <a:t>2</a:t>
+            </a:r>
+            <a:endParaRPr lang="ko-KR" altLang="en-US" dirty="0"/>
+          </a:p>
+        </p:txBody>
+      </p:sp>
+      <p:sp>
+        <p:nvSpPr>
+          <p:cNvPr id="10" name="타원 9">
+            <a:extLst>
+              <a:ext uri="{FF2B5EF4-FFF2-40B4-BE49-F238E27FC236}">
+                <a16:creationId xmlns:a16="http://schemas.microsoft.com/office/drawing/2014/main" id="{5D1C748B-9CB2-4659-B2F6-0CE8F06D71A7}"/>
+              </a:ext>
+            </a:extLst>
+          </p:cNvPr>
+          <p:cNvSpPr/>
+          <p:nvPr/>
+        </p:nvSpPr>
+        <p:spPr>
+          <a:xfrm>
+            <a:off x="1884348" y="1169026"/>
+            <a:ext cx="288000" cy="288000"/>
+          </a:xfrm>
+          <a:prstGeom prst="ellipse">
+            <a:avLst/>
+          </a:prstGeom>
+          <a:solidFill>
+            <a:srgbClr val="C00000"/>
+          </a:solidFill>
+        </p:spPr>
+        <p:style>
+          <a:lnRef idx="2">
+            <a:schemeClr val="accent1">
+              <a:shade val="50000"/>
+            </a:schemeClr>
+          </a:lnRef>
+          <a:fillRef idx="1">
+            <a:schemeClr val="accent1"/>
+          </a:fillRef>
+          <a:effectRef idx="0">
+            <a:schemeClr val="accent1"/>
+          </a:effectRef>
+          <a:fontRef idx="minor">
+            <a:schemeClr val="lt1"/>
+          </a:fontRef>
+        </p:style>
+        <p:txBody>
+          <a:bodyPr rtlCol="0" anchor="ctr"/>
+          <a:lstStyle/>
+          <a:p>
+            <a:pPr algn="ctr"/>
+            <a:r>
+              <a:rPr lang="en-US" altLang="ko-KR" dirty="0"/>
+              <a:t>1</a:t>
+            </a:r>
+            <a:endParaRPr lang="ko-KR" altLang="en-US" dirty="0"/>
+          </a:p>
+        </p:txBody>
+      </p:sp>
+      <p:sp>
+        <p:nvSpPr>
+          <p:cNvPr id="11" name="타원 10">
+            <a:extLst>
+              <a:ext uri="{FF2B5EF4-FFF2-40B4-BE49-F238E27FC236}">
+                <a16:creationId xmlns:a16="http://schemas.microsoft.com/office/drawing/2014/main" id="{2A7EAB29-4173-4E00-8510-93DF0EE4562C}"/>
+              </a:ext>
+            </a:extLst>
+          </p:cNvPr>
+          <p:cNvSpPr/>
+          <p:nvPr/>
+        </p:nvSpPr>
+        <p:spPr>
+          <a:xfrm>
+            <a:off x="2927880" y="2739215"/>
+            <a:ext cx="288000" cy="288000"/>
+          </a:xfrm>
+          <a:prstGeom prst="ellipse">
+            <a:avLst/>
+          </a:prstGeom>
+          <a:solidFill>
+            <a:srgbClr val="00B050"/>
+          </a:solidFill>
+        </p:spPr>
+        <p:style>
+          <a:lnRef idx="2">
+            <a:schemeClr val="accent1">
+              <a:shade val="50000"/>
+            </a:schemeClr>
+          </a:lnRef>
+          <a:fillRef idx="1">
+            <a:schemeClr val="accent1"/>
+          </a:fillRef>
+          <a:effectRef idx="0">
+            <a:schemeClr val="accent1"/>
+          </a:effectRef>
+          <a:fontRef idx="minor">
+            <a:schemeClr val="lt1"/>
+          </a:fontRef>
+        </p:style>
+        <p:txBody>
+          <a:bodyPr rtlCol="0" anchor="ctr"/>
+          <a:lstStyle/>
+          <a:p>
+            <a:pPr algn="ctr"/>
+            <a:r>
+              <a:rPr lang="en-US" altLang="ko-KR" dirty="0"/>
+              <a:t>5</a:t>
+            </a:r>
+            <a:endParaRPr lang="ko-KR" altLang="en-US" dirty="0"/>
+          </a:p>
+        </p:txBody>
+      </p:sp>
+      <p:sp>
+        <p:nvSpPr>
+          <p:cNvPr id="12" name="타원 11">
+            <a:extLst>
+              <a:ext uri="{FF2B5EF4-FFF2-40B4-BE49-F238E27FC236}">
+                <a16:creationId xmlns:a16="http://schemas.microsoft.com/office/drawing/2014/main" id="{952355D8-0BE9-4EB1-ABD1-1559E992C489}"/>
+              </a:ext>
+            </a:extLst>
+          </p:cNvPr>
+          <p:cNvSpPr/>
+          <p:nvPr/>
+        </p:nvSpPr>
+        <p:spPr>
+          <a:xfrm>
+            <a:off x="2351880" y="2748030"/>
+            <a:ext cx="288000" cy="288000"/>
+          </a:xfrm>
+          <a:prstGeom prst="ellipse">
+            <a:avLst/>
+          </a:prstGeom>
+          <a:solidFill>
+            <a:srgbClr val="00B050"/>
+          </a:solidFill>
+        </p:spPr>
+        <p:style>
+          <a:lnRef idx="2">
+            <a:schemeClr val="accent1">
+              <a:shade val="50000"/>
+            </a:schemeClr>
+          </a:lnRef>
+          <a:fillRef idx="1">
+            <a:schemeClr val="accent1"/>
+          </a:fillRef>
+          <a:effectRef idx="0">
+            <a:schemeClr val="accent1"/>
+          </a:effectRef>
+          <a:fontRef idx="minor">
+            <a:schemeClr val="lt1"/>
+          </a:fontRef>
+        </p:style>
+        <p:txBody>
+          <a:bodyPr rtlCol="0" anchor="ctr"/>
+          <a:lstStyle/>
+          <a:p>
+            <a:pPr algn="ctr"/>
+            <a:r>
+              <a:rPr lang="en-US" altLang="ko-KR" dirty="0"/>
+              <a:t>4</a:t>
+            </a:r>
+            <a:endParaRPr lang="ko-KR" altLang="en-US" dirty="0"/>
+          </a:p>
+        </p:txBody>
+      </p:sp>
+      <p:sp>
+        <p:nvSpPr>
+          <p:cNvPr id="13" name="타원 12">
+            <a:extLst>
+              <a:ext uri="{FF2B5EF4-FFF2-40B4-BE49-F238E27FC236}">
+                <a16:creationId xmlns:a16="http://schemas.microsoft.com/office/drawing/2014/main" id="{99BF535F-445C-4821-B769-F52CB58F4003}"/>
+              </a:ext>
+            </a:extLst>
+          </p:cNvPr>
+          <p:cNvSpPr/>
+          <p:nvPr/>
+        </p:nvSpPr>
+        <p:spPr>
+          <a:xfrm>
+            <a:off x="2639880" y="2244533"/>
+            <a:ext cx="288000" cy="288000"/>
+          </a:xfrm>
+          <a:prstGeom prst="ellipse">
+            <a:avLst/>
+          </a:prstGeom>
+          <a:solidFill>
+            <a:srgbClr val="00B050"/>
+          </a:solidFill>
+        </p:spPr>
+        <p:style>
+          <a:lnRef idx="2">
+            <a:schemeClr val="accent1">
+              <a:shade val="50000"/>
+            </a:schemeClr>
+          </a:lnRef>
+          <a:fillRef idx="1">
+            <a:schemeClr val="accent1"/>
+          </a:fillRef>
+          <a:effectRef idx="0">
+            <a:schemeClr val="accent1"/>
+          </a:effectRef>
+          <a:fontRef idx="minor">
+            <a:schemeClr val="lt1"/>
+          </a:fontRef>
+        </p:style>
+        <p:txBody>
+          <a:bodyPr rtlCol="0" anchor="ctr"/>
+          <a:lstStyle/>
+          <a:p>
+            <a:pPr algn="ctr"/>
+            <a:r>
+              <a:rPr lang="en-US" altLang="ko-KR" dirty="0"/>
+              <a:t>6</a:t>
+            </a:r>
+            <a:endParaRPr lang="ko-KR" altLang="en-US" dirty="0"/>
+          </a:p>
+        </p:txBody>
+      </p:sp>
+      <p:sp>
+        <p:nvSpPr>
+          <p:cNvPr id="14" name="타원 13">
+            <a:extLst>
+              <a:ext uri="{FF2B5EF4-FFF2-40B4-BE49-F238E27FC236}">
+                <a16:creationId xmlns:a16="http://schemas.microsoft.com/office/drawing/2014/main" id="{1FA41976-8922-43A1-8C37-3F43BA02B65F}"/>
+              </a:ext>
+            </a:extLst>
+          </p:cNvPr>
+          <p:cNvSpPr/>
+          <p:nvPr/>
+        </p:nvSpPr>
+        <p:spPr>
+          <a:xfrm>
+            <a:off x="3318009" y="1680739"/>
+            <a:ext cx="288000" cy="288000"/>
+          </a:xfrm>
+          <a:prstGeom prst="ellipse">
+            <a:avLst/>
+          </a:prstGeom>
+        </p:spPr>
+        <p:style>
+          <a:lnRef idx="2">
+            <a:schemeClr val="accent1">
+              <a:shade val="50000"/>
+            </a:schemeClr>
+          </a:lnRef>
+          <a:fillRef idx="1">
+            <a:schemeClr val="accent1"/>
+          </a:fillRef>
+          <a:effectRef idx="0">
+            <a:schemeClr val="accent1"/>
+          </a:effectRef>
+          <a:fontRef idx="minor">
+            <a:schemeClr val="lt1"/>
+          </a:fontRef>
+        </p:style>
+        <p:txBody>
+          <a:bodyPr rtlCol="0" anchor="ctr"/>
+          <a:lstStyle/>
+          <a:p>
+            <a:pPr algn="ctr"/>
+            <a:r>
+              <a:rPr lang="en-US" altLang="ko-KR" dirty="0"/>
+              <a:t>9</a:t>
+            </a:r>
+            <a:endParaRPr lang="ko-KR" altLang="en-US" dirty="0"/>
+          </a:p>
+        </p:txBody>
+      </p:sp>
+      <p:sp>
+        <p:nvSpPr>
+          <p:cNvPr id="15" name="타원 14">
+            <a:extLst>
+              <a:ext uri="{FF2B5EF4-FFF2-40B4-BE49-F238E27FC236}">
+                <a16:creationId xmlns:a16="http://schemas.microsoft.com/office/drawing/2014/main" id="{EF785321-4E15-42FD-8331-A00FF594B173}"/>
+              </a:ext>
+            </a:extLst>
+          </p:cNvPr>
+          <p:cNvSpPr/>
+          <p:nvPr/>
+        </p:nvSpPr>
+        <p:spPr>
+          <a:xfrm>
+            <a:off x="3969105" y="1392739"/>
+            <a:ext cx="288000" cy="288000"/>
+          </a:xfrm>
+          <a:prstGeom prst="ellipse">
+            <a:avLst/>
+          </a:prstGeom>
+        </p:spPr>
+        <p:style>
+          <a:lnRef idx="2">
+            <a:schemeClr val="accent1">
+              <a:shade val="50000"/>
+            </a:schemeClr>
+          </a:lnRef>
+          <a:fillRef idx="1">
+            <a:schemeClr val="accent1"/>
+          </a:fillRef>
+          <a:effectRef idx="0">
+            <a:schemeClr val="accent1"/>
+          </a:effectRef>
+          <a:fontRef idx="minor">
+            <a:schemeClr val="lt1"/>
+          </a:fontRef>
+        </p:style>
+        <p:txBody>
+          <a:bodyPr rtlCol="0" anchor="ctr"/>
+          <a:lstStyle/>
+          <a:p>
+            <a:pPr algn="ctr"/>
+            <a:r>
+              <a:rPr lang="en-US" altLang="ko-KR" dirty="0"/>
+              <a:t>8</a:t>
+            </a:r>
+            <a:endParaRPr lang="ko-KR" altLang="en-US" dirty="0"/>
+          </a:p>
+        </p:txBody>
+      </p:sp>
+      <p:sp>
+        <p:nvSpPr>
+          <p:cNvPr id="16" name="타원 15">
+            <a:extLst>
+              <a:ext uri="{FF2B5EF4-FFF2-40B4-BE49-F238E27FC236}">
+                <a16:creationId xmlns:a16="http://schemas.microsoft.com/office/drawing/2014/main" id="{0AF20099-E51A-40A8-A836-A68D381A60D4}"/>
+              </a:ext>
+            </a:extLst>
+          </p:cNvPr>
+          <p:cNvSpPr/>
+          <p:nvPr/>
+        </p:nvSpPr>
+        <p:spPr>
+          <a:xfrm>
+            <a:off x="3318009" y="1130861"/>
+            <a:ext cx="288000" cy="288000"/>
+          </a:xfrm>
+          <a:prstGeom prst="ellipse">
+            <a:avLst/>
+          </a:prstGeom>
+        </p:spPr>
+        <p:style>
+          <a:lnRef idx="2">
+            <a:schemeClr val="accent1">
+              <a:shade val="50000"/>
+            </a:schemeClr>
+          </a:lnRef>
+          <a:fillRef idx="1">
+            <a:schemeClr val="accent1"/>
+          </a:fillRef>
+          <a:effectRef idx="0">
+            <a:schemeClr val="accent1"/>
+          </a:effectRef>
+          <a:fontRef idx="minor">
+            <a:schemeClr val="lt1"/>
+          </a:fontRef>
+        </p:style>
+        <p:txBody>
+          <a:bodyPr rtlCol="0" anchor="ctr"/>
+          <a:lstStyle/>
+          <a:p>
+            <a:pPr algn="ctr"/>
+            <a:r>
+              <a:rPr lang="en-US" altLang="ko-KR" dirty="0"/>
+              <a:t>7</a:t>
+            </a:r>
+            <a:endParaRPr lang="ko-KR" altLang="en-US" dirty="0"/>
+          </a:p>
+        </p:txBody>
+      </p:sp>
+      <p:cxnSp>
+        <p:nvCxnSpPr>
+          <p:cNvPr id="17" name="직선 연결선 16">
+            <a:extLst>
+              <a:ext uri="{FF2B5EF4-FFF2-40B4-BE49-F238E27FC236}">
+                <a16:creationId xmlns:a16="http://schemas.microsoft.com/office/drawing/2014/main" id="{0D411EF6-A51F-401D-B76A-D4F1318DC8BC}"/>
+              </a:ext>
+            </a:extLst>
+          </p:cNvPr>
+          <p:cNvCxnSpPr>
+            <a:stCxn id="9" idx="7"/>
+            <a:endCxn id="10" idx="2"/>
+          </p:cNvCxnSpPr>
+          <p:nvPr/>
+        </p:nvCxnSpPr>
+        <p:spPr>
+          <a:xfrm flipV="1">
+            <a:off x="1592660" y="1313026"/>
+            <a:ext cx="291688" cy="173274"/>
+          </a:xfrm>
+          <a:prstGeom prst="line">
+            <a:avLst/>
+          </a:prstGeom>
+        </p:spPr>
+        <p:style>
+          <a:lnRef idx="1">
+            <a:schemeClr val="dk1"/>
+          </a:lnRef>
+          <a:fillRef idx="0">
+            <a:schemeClr val="dk1"/>
+          </a:fillRef>
+          <a:effectRef idx="0">
+            <a:schemeClr val="dk1"/>
+          </a:effectRef>
+          <a:fontRef idx="minor">
+            <a:schemeClr val="tx1"/>
+          </a:fontRef>
+        </p:style>
+      </p:cxnSp>
+      <p:cxnSp>
+        <p:nvCxnSpPr>
+          <p:cNvPr id="18" name="직선 연결선 17">
+            <a:extLst>
+              <a:ext uri="{FF2B5EF4-FFF2-40B4-BE49-F238E27FC236}">
+                <a16:creationId xmlns:a16="http://schemas.microsoft.com/office/drawing/2014/main" id="{7ABD8EDC-2DBD-4B89-91C0-3B021A72CEB0}"/>
+              </a:ext>
+            </a:extLst>
+          </p:cNvPr>
+          <p:cNvCxnSpPr>
+            <a:cxnSpLocks/>
+            <a:stCxn id="9" idx="5"/>
+            <a:endCxn id="8" idx="2"/>
+          </p:cNvCxnSpPr>
+          <p:nvPr/>
+        </p:nvCxnSpPr>
+        <p:spPr>
+          <a:xfrm>
+            <a:off x="1592660" y="1689946"/>
+            <a:ext cx="291688" cy="172958"/>
+          </a:xfrm>
+          <a:prstGeom prst="line">
+            <a:avLst/>
+          </a:prstGeom>
+        </p:spPr>
+        <p:style>
+          <a:lnRef idx="1">
+            <a:schemeClr val="dk1"/>
+          </a:lnRef>
+          <a:fillRef idx="0">
+            <a:schemeClr val="dk1"/>
+          </a:fillRef>
+          <a:effectRef idx="0">
+            <a:schemeClr val="dk1"/>
+          </a:effectRef>
+          <a:fontRef idx="minor">
+            <a:schemeClr val="tx1"/>
+          </a:fontRef>
+        </p:style>
+      </p:cxnSp>
+      <p:cxnSp>
+        <p:nvCxnSpPr>
+          <p:cNvPr id="19" name="직선 연결선 18">
+            <a:extLst>
+              <a:ext uri="{FF2B5EF4-FFF2-40B4-BE49-F238E27FC236}">
+                <a16:creationId xmlns:a16="http://schemas.microsoft.com/office/drawing/2014/main" id="{1F310DA4-B774-45BF-BBDB-F6B5C2AC871F}"/>
+              </a:ext>
+            </a:extLst>
+          </p:cNvPr>
+          <p:cNvCxnSpPr>
+            <a:cxnSpLocks/>
+            <a:stCxn id="10" idx="4"/>
+            <a:endCxn id="8" idx="0"/>
+          </p:cNvCxnSpPr>
+          <p:nvPr/>
+        </p:nvCxnSpPr>
+        <p:spPr>
+          <a:xfrm>
+            <a:off x="2028348" y="1457026"/>
+            <a:ext cx="0" cy="261878"/>
+          </a:xfrm>
+          <a:prstGeom prst="line">
+            <a:avLst/>
+          </a:prstGeom>
+        </p:spPr>
+        <p:style>
+          <a:lnRef idx="1">
+            <a:schemeClr val="dk1"/>
+          </a:lnRef>
+          <a:fillRef idx="0">
+            <a:schemeClr val="dk1"/>
+          </a:fillRef>
+          <a:effectRef idx="0">
+            <a:schemeClr val="dk1"/>
+          </a:effectRef>
+          <a:fontRef idx="minor">
+            <a:schemeClr val="tx1"/>
+          </a:fontRef>
+        </p:style>
+      </p:cxnSp>
+      <p:cxnSp>
+        <p:nvCxnSpPr>
+          <p:cNvPr id="20" name="직선 연결선 19">
+            <a:extLst>
+              <a:ext uri="{FF2B5EF4-FFF2-40B4-BE49-F238E27FC236}">
+                <a16:creationId xmlns:a16="http://schemas.microsoft.com/office/drawing/2014/main" id="{1F187691-62E6-439A-B8C2-39E283E1DF06}"/>
+              </a:ext>
+            </a:extLst>
+          </p:cNvPr>
+          <p:cNvCxnSpPr>
+            <a:cxnSpLocks/>
+            <a:stCxn id="8" idx="5"/>
+            <a:endCxn id="13" idx="2"/>
+          </p:cNvCxnSpPr>
+          <p:nvPr/>
+        </p:nvCxnSpPr>
+        <p:spPr>
+          <a:xfrm>
+            <a:off x="2130171" y="1964727"/>
+            <a:ext cx="509709" cy="423806"/>
+          </a:xfrm>
+          <a:prstGeom prst="line">
+            <a:avLst/>
+          </a:prstGeom>
+        </p:spPr>
+        <p:style>
+          <a:lnRef idx="1">
+            <a:schemeClr val="dk1"/>
+          </a:lnRef>
+          <a:fillRef idx="0">
+            <a:schemeClr val="dk1"/>
+          </a:fillRef>
+          <a:effectRef idx="0">
+            <a:schemeClr val="dk1"/>
+          </a:effectRef>
+          <a:fontRef idx="minor">
+            <a:schemeClr val="tx1"/>
+          </a:fontRef>
+        </p:style>
+      </p:cxnSp>
+      <p:cxnSp>
+        <p:nvCxnSpPr>
+          <p:cNvPr id="21" name="직선 연결선 20">
+            <a:extLst>
+              <a:ext uri="{FF2B5EF4-FFF2-40B4-BE49-F238E27FC236}">
+                <a16:creationId xmlns:a16="http://schemas.microsoft.com/office/drawing/2014/main" id="{D170164A-271F-4BA1-866C-0390FDB95272}"/>
+              </a:ext>
+            </a:extLst>
+          </p:cNvPr>
+          <p:cNvCxnSpPr>
+            <a:cxnSpLocks/>
+            <a:stCxn id="13" idx="3"/>
+            <a:endCxn id="12" idx="7"/>
+          </p:cNvCxnSpPr>
+          <p:nvPr/>
+        </p:nvCxnSpPr>
+        <p:spPr>
+          <a:xfrm flipH="1">
+            <a:off x="2597703" y="2490356"/>
+            <a:ext cx="84354" cy="299851"/>
+          </a:xfrm>
+          <a:prstGeom prst="line">
+            <a:avLst/>
+          </a:prstGeom>
+        </p:spPr>
+        <p:style>
+          <a:lnRef idx="1">
+            <a:schemeClr val="dk1"/>
+          </a:lnRef>
+          <a:fillRef idx="0">
+            <a:schemeClr val="dk1"/>
+          </a:fillRef>
+          <a:effectRef idx="0">
+            <a:schemeClr val="dk1"/>
+          </a:effectRef>
+          <a:fontRef idx="minor">
+            <a:schemeClr val="tx1"/>
+          </a:fontRef>
+        </p:style>
+      </p:cxnSp>
+      <p:cxnSp>
+        <p:nvCxnSpPr>
+          <p:cNvPr id="22" name="직선 연결선 21">
+            <a:extLst>
+              <a:ext uri="{FF2B5EF4-FFF2-40B4-BE49-F238E27FC236}">
+                <a16:creationId xmlns:a16="http://schemas.microsoft.com/office/drawing/2014/main" id="{1D7688FC-D799-498E-83AF-A714DBB07729}"/>
+              </a:ext>
+            </a:extLst>
+          </p:cNvPr>
+          <p:cNvCxnSpPr>
+            <a:cxnSpLocks/>
+            <a:stCxn id="13" idx="5"/>
+            <a:endCxn id="11" idx="1"/>
+          </p:cNvCxnSpPr>
+          <p:nvPr/>
+        </p:nvCxnSpPr>
+        <p:spPr>
+          <a:xfrm>
+            <a:off x="2885703" y="2490356"/>
+            <a:ext cx="84354" cy="291036"/>
+          </a:xfrm>
+          <a:prstGeom prst="line">
+            <a:avLst/>
+          </a:prstGeom>
+        </p:spPr>
+        <p:style>
+          <a:lnRef idx="1">
+            <a:schemeClr val="dk1"/>
+          </a:lnRef>
+          <a:fillRef idx="0">
+            <a:schemeClr val="dk1"/>
+          </a:fillRef>
+          <a:effectRef idx="0">
+            <a:schemeClr val="dk1"/>
+          </a:effectRef>
+          <a:fontRef idx="minor">
+            <a:schemeClr val="tx1"/>
+          </a:fontRef>
+        </p:style>
+      </p:cxnSp>
+      <p:cxnSp>
+        <p:nvCxnSpPr>
+          <p:cNvPr id="23" name="직선 연결선 22">
+            <a:extLst>
+              <a:ext uri="{FF2B5EF4-FFF2-40B4-BE49-F238E27FC236}">
+                <a16:creationId xmlns:a16="http://schemas.microsoft.com/office/drawing/2014/main" id="{525A4FE7-80ED-4E17-9E65-2B956111C986}"/>
+              </a:ext>
+            </a:extLst>
+          </p:cNvPr>
+          <p:cNvCxnSpPr>
+            <a:cxnSpLocks/>
+            <a:stCxn id="11" idx="2"/>
+            <a:endCxn id="12" idx="6"/>
+          </p:cNvCxnSpPr>
+          <p:nvPr/>
+        </p:nvCxnSpPr>
+        <p:spPr>
+          <a:xfrm flipH="1">
+            <a:off x="2639880" y="2883215"/>
+            <a:ext cx="288000" cy="8815"/>
+          </a:xfrm>
+          <a:prstGeom prst="line">
+            <a:avLst/>
+          </a:prstGeom>
+        </p:spPr>
+        <p:style>
+          <a:lnRef idx="1">
+            <a:schemeClr val="dk1"/>
+          </a:lnRef>
+          <a:fillRef idx="0">
+            <a:schemeClr val="dk1"/>
+          </a:fillRef>
+          <a:effectRef idx="0">
+            <a:schemeClr val="dk1"/>
+          </a:effectRef>
+          <a:fontRef idx="minor">
+            <a:schemeClr val="tx1"/>
+          </a:fontRef>
+        </p:style>
+      </p:cxnSp>
+      <p:cxnSp>
+        <p:nvCxnSpPr>
+          <p:cNvPr id="24" name="직선 연결선 23">
+            <a:extLst>
+              <a:ext uri="{FF2B5EF4-FFF2-40B4-BE49-F238E27FC236}">
+                <a16:creationId xmlns:a16="http://schemas.microsoft.com/office/drawing/2014/main" id="{46BF5901-C427-4747-830C-3B4F51D5B5C8}"/>
+              </a:ext>
+            </a:extLst>
+          </p:cNvPr>
+          <p:cNvCxnSpPr>
+            <a:cxnSpLocks/>
+            <a:stCxn id="14" idx="3"/>
+            <a:endCxn id="13" idx="6"/>
+          </p:cNvCxnSpPr>
+          <p:nvPr/>
+        </p:nvCxnSpPr>
+        <p:spPr>
+          <a:xfrm flipH="1">
+            <a:off x="2927880" y="1926562"/>
+            <a:ext cx="432306" cy="461971"/>
+          </a:xfrm>
+          <a:prstGeom prst="line">
+            <a:avLst/>
+          </a:prstGeom>
+        </p:spPr>
+        <p:style>
+          <a:lnRef idx="1">
+            <a:schemeClr val="dk1"/>
+          </a:lnRef>
+          <a:fillRef idx="0">
+            <a:schemeClr val="dk1"/>
+          </a:fillRef>
+          <a:effectRef idx="0">
+            <a:schemeClr val="dk1"/>
+          </a:effectRef>
+          <a:fontRef idx="minor">
+            <a:schemeClr val="tx1"/>
+          </a:fontRef>
+        </p:style>
+      </p:cxnSp>
+      <p:cxnSp>
+        <p:nvCxnSpPr>
+          <p:cNvPr id="25" name="직선 연결선 24">
+            <a:extLst>
+              <a:ext uri="{FF2B5EF4-FFF2-40B4-BE49-F238E27FC236}">
+                <a16:creationId xmlns:a16="http://schemas.microsoft.com/office/drawing/2014/main" id="{BBB7560A-BC07-469D-BFDC-7B59E36F8662}"/>
+              </a:ext>
+            </a:extLst>
+          </p:cNvPr>
+          <p:cNvCxnSpPr>
+            <a:cxnSpLocks/>
+            <a:stCxn id="15" idx="3"/>
+            <a:endCxn id="14" idx="6"/>
+          </p:cNvCxnSpPr>
+          <p:nvPr/>
+        </p:nvCxnSpPr>
+        <p:spPr>
+          <a:xfrm flipH="1">
+            <a:off x="3606009" y="1638562"/>
+            <a:ext cx="405273" cy="186177"/>
+          </a:xfrm>
+          <a:prstGeom prst="line">
+            <a:avLst/>
+          </a:prstGeom>
+        </p:spPr>
+        <p:style>
+          <a:lnRef idx="1">
+            <a:schemeClr val="dk1"/>
+          </a:lnRef>
+          <a:fillRef idx="0">
+            <a:schemeClr val="dk1"/>
+          </a:fillRef>
+          <a:effectRef idx="0">
+            <a:schemeClr val="dk1"/>
+          </a:effectRef>
+          <a:fontRef idx="minor">
+            <a:schemeClr val="tx1"/>
+          </a:fontRef>
+        </p:style>
+      </p:cxnSp>
+      <p:cxnSp>
+        <p:nvCxnSpPr>
+          <p:cNvPr id="26" name="직선 연결선 25">
+            <a:extLst>
+              <a:ext uri="{FF2B5EF4-FFF2-40B4-BE49-F238E27FC236}">
+                <a16:creationId xmlns:a16="http://schemas.microsoft.com/office/drawing/2014/main" id="{2AD1E103-3B84-4467-B6CD-5C40438C08B8}"/>
+              </a:ext>
+            </a:extLst>
+          </p:cNvPr>
+          <p:cNvCxnSpPr>
+            <a:cxnSpLocks/>
+            <a:stCxn id="15" idx="1"/>
+            <a:endCxn id="16" idx="6"/>
+          </p:cNvCxnSpPr>
+          <p:nvPr/>
+        </p:nvCxnSpPr>
+        <p:spPr>
+          <a:xfrm flipH="1" flipV="1">
+            <a:off x="3606009" y="1274861"/>
+            <a:ext cx="405273" cy="160055"/>
+          </a:xfrm>
+          <a:prstGeom prst="line">
+            <a:avLst/>
+          </a:prstGeom>
+        </p:spPr>
+        <p:style>
+          <a:lnRef idx="1">
+            <a:schemeClr val="dk1"/>
+          </a:lnRef>
+          <a:fillRef idx="0">
+            <a:schemeClr val="dk1"/>
+          </a:fillRef>
+          <a:effectRef idx="0">
+            <a:schemeClr val="dk1"/>
+          </a:effectRef>
+          <a:fontRef idx="minor">
+            <a:schemeClr val="tx1"/>
+          </a:fontRef>
+        </p:style>
+      </p:cxnSp>
+      <p:cxnSp>
+        <p:nvCxnSpPr>
+          <p:cNvPr id="27" name="직선 연결선 26">
+            <a:extLst>
+              <a:ext uri="{FF2B5EF4-FFF2-40B4-BE49-F238E27FC236}">
+                <a16:creationId xmlns:a16="http://schemas.microsoft.com/office/drawing/2014/main" id="{7BD1779B-816D-4016-80C8-E384F70D3AF3}"/>
+              </a:ext>
+            </a:extLst>
+          </p:cNvPr>
+          <p:cNvCxnSpPr>
+            <a:cxnSpLocks/>
+            <a:stCxn id="14" idx="0"/>
+            <a:endCxn id="16" idx="4"/>
+          </p:cNvCxnSpPr>
+          <p:nvPr/>
+        </p:nvCxnSpPr>
+        <p:spPr>
+          <a:xfrm flipV="1">
+            <a:off x="3462009" y="1418861"/>
+            <a:ext cx="0" cy="261878"/>
+          </a:xfrm>
+          <a:prstGeom prst="line">
+            <a:avLst/>
+          </a:prstGeom>
+        </p:spPr>
+        <p:style>
+          <a:lnRef idx="1">
+            <a:schemeClr val="dk1"/>
+          </a:lnRef>
+          <a:fillRef idx="0">
+            <a:schemeClr val="dk1"/>
+          </a:fillRef>
+          <a:effectRef idx="0">
+            <a:schemeClr val="dk1"/>
+          </a:effectRef>
+          <a:fontRef idx="minor">
+            <a:schemeClr val="tx1"/>
+          </a:fontRef>
+        </p:style>
+      </p:cxnSp>
+      <p:cxnSp>
+        <p:nvCxnSpPr>
+          <p:cNvPr id="28" name="직선 연결선 27">
+            <a:extLst>
+              <a:ext uri="{FF2B5EF4-FFF2-40B4-BE49-F238E27FC236}">
+                <a16:creationId xmlns:a16="http://schemas.microsoft.com/office/drawing/2014/main" id="{EFA39121-EE25-4DD1-BCC2-AC5C414A42BC}"/>
+              </a:ext>
+            </a:extLst>
+          </p:cNvPr>
+          <p:cNvCxnSpPr>
+            <a:cxnSpLocks/>
+            <a:stCxn id="8" idx="6"/>
+            <a:endCxn id="14" idx="2"/>
+          </p:cNvCxnSpPr>
+          <p:nvPr/>
+        </p:nvCxnSpPr>
+        <p:spPr>
+          <a:xfrm flipV="1">
+            <a:off x="2172348" y="1824739"/>
+            <a:ext cx="1145661" cy="38165"/>
+          </a:xfrm>
+          <a:prstGeom prst="line">
+            <a:avLst/>
+          </a:prstGeom>
+        </p:spPr>
+        <p:style>
+          <a:lnRef idx="1">
+            <a:schemeClr val="dk1"/>
+          </a:lnRef>
+          <a:fillRef idx="0">
+            <a:schemeClr val="dk1"/>
+          </a:fillRef>
+          <a:effectRef idx="0">
+            <a:schemeClr val="dk1"/>
+          </a:effectRef>
+          <a:fontRef idx="minor">
+            <a:schemeClr val="tx1"/>
+          </a:fontRef>
+        </p:style>
+      </p:cxnSp>
+      <p:sp>
+        <p:nvSpPr>
+          <p:cNvPr id="29" name="TextBox 28">
+            <a:extLst>
+              <a:ext uri="{FF2B5EF4-FFF2-40B4-BE49-F238E27FC236}">
+                <a16:creationId xmlns:a16="http://schemas.microsoft.com/office/drawing/2014/main" id="{F401E1E9-3033-447D-99B4-CE1DE1F62C8D}"/>
+              </a:ext>
+            </a:extLst>
+          </p:cNvPr>
+          <p:cNvSpPr txBox="1"/>
+          <p:nvPr/>
+        </p:nvSpPr>
+        <p:spPr>
+          <a:xfrm>
+            <a:off x="2057995" y="504731"/>
+            <a:ext cx="1401346" cy="461665"/>
+          </a:xfrm>
+          <a:prstGeom prst="rect">
+            <a:avLst/>
+          </a:prstGeom>
+          <a:noFill/>
+        </p:spPr>
+        <p:txBody>
+          <a:bodyPr wrap="none" rtlCol="0">
+            <a:spAutoFit/>
+          </a:bodyPr>
+          <a:lstStyle/>
+          <a:p>
+            <a:r>
+              <a:rPr lang="en-US" altLang="ko-KR" sz="2400" b="1" dirty="0"/>
+              <a:t>Graph</a:t>
+            </a:r>
+            <a:r>
+              <a:rPr lang="ko-KR" altLang="en-US" sz="2400" b="1" dirty="0"/>
+              <a:t> </a:t>
+            </a:r>
+            <a:r>
+              <a:rPr lang="en-US" altLang="ko-KR" sz="2400" b="1" dirty="0"/>
+              <a:t>A</a:t>
+            </a:r>
+            <a:endParaRPr lang="ko-KR" altLang="en-US" sz="2400" b="1" dirty="0"/>
+          </a:p>
+        </p:txBody>
+      </p:sp>
+      <p:sp>
+        <p:nvSpPr>
+          <p:cNvPr id="30" name="타원 29">
+            <a:extLst>
+              <a:ext uri="{FF2B5EF4-FFF2-40B4-BE49-F238E27FC236}">
+                <a16:creationId xmlns:a16="http://schemas.microsoft.com/office/drawing/2014/main" id="{816C2B0F-B6E7-4793-AFDF-A138712CFD30}"/>
+              </a:ext>
+            </a:extLst>
+          </p:cNvPr>
+          <p:cNvSpPr/>
+          <p:nvPr/>
+        </p:nvSpPr>
+        <p:spPr>
+          <a:xfrm>
+            <a:off x="5275227" y="1718904"/>
+            <a:ext cx="288000" cy="288000"/>
+          </a:xfrm>
+          <a:prstGeom prst="ellipse">
+            <a:avLst/>
+          </a:prstGeom>
+          <a:solidFill>
+            <a:srgbClr val="00B050"/>
+          </a:solidFill>
+        </p:spPr>
+        <p:style>
+          <a:lnRef idx="2">
+            <a:schemeClr val="accent1">
+              <a:shade val="50000"/>
+            </a:schemeClr>
+          </a:lnRef>
+          <a:fillRef idx="1">
+            <a:schemeClr val="accent1"/>
+          </a:fillRef>
+          <a:effectRef idx="0">
+            <a:schemeClr val="accent1"/>
+          </a:effectRef>
+          <a:fontRef idx="minor">
+            <a:schemeClr val="lt1"/>
+          </a:fontRef>
+        </p:style>
+        <p:txBody>
+          <a:bodyPr rtlCol="0" anchor="ctr"/>
+          <a:lstStyle/>
+          <a:p>
+            <a:pPr algn="ctr"/>
+            <a:r>
+              <a:rPr lang="en-US" altLang="ko-KR" dirty="0"/>
+              <a:t>3</a:t>
+            </a:r>
+            <a:endParaRPr lang="ko-KR" altLang="en-US" dirty="0"/>
+          </a:p>
+        </p:txBody>
+      </p:sp>
+      <p:sp>
+        <p:nvSpPr>
+          <p:cNvPr id="31" name="타원 30">
+            <a:extLst>
+              <a:ext uri="{FF2B5EF4-FFF2-40B4-BE49-F238E27FC236}">
+                <a16:creationId xmlns:a16="http://schemas.microsoft.com/office/drawing/2014/main" id="{E5BC157A-C1E9-4438-9EA4-9BDBD49B55FD}"/>
+              </a:ext>
+            </a:extLst>
+          </p:cNvPr>
+          <p:cNvSpPr/>
+          <p:nvPr/>
+        </p:nvSpPr>
+        <p:spPr>
+          <a:xfrm>
+            <a:off x="4737716" y="1444123"/>
+            <a:ext cx="288000" cy="288000"/>
+          </a:xfrm>
+          <a:prstGeom prst="ellipse">
+            <a:avLst/>
+          </a:prstGeom>
+          <a:solidFill>
+            <a:srgbClr val="C00000"/>
+          </a:solidFill>
+        </p:spPr>
+        <p:style>
+          <a:lnRef idx="2">
+            <a:schemeClr val="accent1">
+              <a:shade val="50000"/>
+            </a:schemeClr>
+          </a:lnRef>
+          <a:fillRef idx="1">
+            <a:schemeClr val="accent1"/>
+          </a:fillRef>
+          <a:effectRef idx="0">
+            <a:schemeClr val="accent1"/>
+          </a:effectRef>
+          <a:fontRef idx="minor">
+            <a:schemeClr val="lt1"/>
+          </a:fontRef>
+        </p:style>
+        <p:txBody>
+          <a:bodyPr rtlCol="0" anchor="ctr"/>
+          <a:lstStyle/>
+          <a:p>
+            <a:pPr algn="ctr"/>
+            <a:r>
+              <a:rPr lang="en-US" altLang="ko-KR" dirty="0"/>
+              <a:t>2</a:t>
+            </a:r>
+            <a:endParaRPr lang="ko-KR" altLang="en-US" dirty="0"/>
+          </a:p>
+        </p:txBody>
+      </p:sp>
+      <p:sp>
+        <p:nvSpPr>
+          <p:cNvPr id="32" name="타원 31">
+            <a:extLst>
+              <a:ext uri="{FF2B5EF4-FFF2-40B4-BE49-F238E27FC236}">
+                <a16:creationId xmlns:a16="http://schemas.microsoft.com/office/drawing/2014/main" id="{07E612B5-D17D-459C-BAFE-E75B0495ECC3}"/>
+              </a:ext>
+            </a:extLst>
+          </p:cNvPr>
+          <p:cNvSpPr/>
+          <p:nvPr/>
+        </p:nvSpPr>
+        <p:spPr>
+          <a:xfrm>
+            <a:off x="5275227" y="1169026"/>
+            <a:ext cx="288000" cy="288000"/>
+          </a:xfrm>
+          <a:prstGeom prst="ellipse">
+            <a:avLst/>
+          </a:prstGeom>
+          <a:solidFill>
+            <a:srgbClr val="C00000"/>
+          </a:solidFill>
+        </p:spPr>
+        <p:style>
+          <a:lnRef idx="2">
+            <a:schemeClr val="accent1">
+              <a:shade val="50000"/>
+            </a:schemeClr>
+          </a:lnRef>
+          <a:fillRef idx="1">
+            <a:schemeClr val="accent1"/>
+          </a:fillRef>
+          <a:effectRef idx="0">
+            <a:schemeClr val="accent1"/>
+          </a:effectRef>
+          <a:fontRef idx="minor">
+            <a:schemeClr val="lt1"/>
+          </a:fontRef>
+        </p:style>
+        <p:txBody>
+          <a:bodyPr rtlCol="0" anchor="ctr"/>
+          <a:lstStyle/>
+          <a:p>
+            <a:pPr algn="ctr"/>
+            <a:r>
+              <a:rPr lang="en-US" altLang="ko-KR" dirty="0"/>
+              <a:t>1</a:t>
+            </a:r>
+            <a:endParaRPr lang="ko-KR" altLang="en-US" dirty="0"/>
+          </a:p>
+        </p:txBody>
+      </p:sp>
+      <p:sp>
+        <p:nvSpPr>
+          <p:cNvPr id="33" name="타원 32">
+            <a:extLst>
+              <a:ext uri="{FF2B5EF4-FFF2-40B4-BE49-F238E27FC236}">
+                <a16:creationId xmlns:a16="http://schemas.microsoft.com/office/drawing/2014/main" id="{0A73413A-E11C-4E8C-94B6-CB3F42F0026D}"/>
+              </a:ext>
+            </a:extLst>
+          </p:cNvPr>
+          <p:cNvSpPr/>
+          <p:nvPr/>
+        </p:nvSpPr>
+        <p:spPr>
+          <a:xfrm>
+            <a:off x="6318759" y="2739215"/>
+            <a:ext cx="288000" cy="288000"/>
+          </a:xfrm>
+          <a:prstGeom prst="ellipse">
+            <a:avLst/>
+          </a:prstGeom>
+          <a:solidFill>
+            <a:srgbClr val="00B050"/>
+          </a:solidFill>
+        </p:spPr>
+        <p:style>
+          <a:lnRef idx="2">
+            <a:schemeClr val="accent1">
+              <a:shade val="50000"/>
+            </a:schemeClr>
+          </a:lnRef>
+          <a:fillRef idx="1">
+            <a:schemeClr val="accent1"/>
+          </a:fillRef>
+          <a:effectRef idx="0">
+            <a:schemeClr val="accent1"/>
+          </a:effectRef>
+          <a:fontRef idx="minor">
+            <a:schemeClr val="lt1"/>
+          </a:fontRef>
+        </p:style>
+        <p:txBody>
+          <a:bodyPr rtlCol="0" anchor="ctr"/>
+          <a:lstStyle/>
+          <a:p>
+            <a:pPr algn="ctr"/>
+            <a:r>
+              <a:rPr lang="en-US" altLang="ko-KR" dirty="0"/>
+              <a:t>5</a:t>
+            </a:r>
+            <a:endParaRPr lang="ko-KR" altLang="en-US" dirty="0"/>
+          </a:p>
+        </p:txBody>
+      </p:sp>
+      <p:sp>
+        <p:nvSpPr>
+          <p:cNvPr id="34" name="타원 33">
+            <a:extLst>
+              <a:ext uri="{FF2B5EF4-FFF2-40B4-BE49-F238E27FC236}">
+                <a16:creationId xmlns:a16="http://schemas.microsoft.com/office/drawing/2014/main" id="{56029593-272C-4617-A7D1-7E786A7D3E4F}"/>
+              </a:ext>
+            </a:extLst>
+          </p:cNvPr>
+          <p:cNvSpPr/>
+          <p:nvPr/>
+        </p:nvSpPr>
+        <p:spPr>
+          <a:xfrm>
+            <a:off x="5742759" y="2748030"/>
+            <a:ext cx="288000" cy="288000"/>
+          </a:xfrm>
+          <a:prstGeom prst="ellipse">
+            <a:avLst/>
+          </a:prstGeom>
+          <a:solidFill>
+            <a:srgbClr val="00B050"/>
+          </a:solidFill>
+        </p:spPr>
+        <p:style>
+          <a:lnRef idx="2">
+            <a:schemeClr val="accent1">
+              <a:shade val="50000"/>
+            </a:schemeClr>
+          </a:lnRef>
+          <a:fillRef idx="1">
+            <a:schemeClr val="accent1"/>
+          </a:fillRef>
+          <a:effectRef idx="0">
+            <a:schemeClr val="accent1"/>
+          </a:effectRef>
+          <a:fontRef idx="minor">
+            <a:schemeClr val="lt1"/>
+          </a:fontRef>
+        </p:style>
+        <p:txBody>
+          <a:bodyPr rtlCol="0" anchor="ctr"/>
+          <a:lstStyle/>
+          <a:p>
+            <a:pPr algn="ctr"/>
+            <a:r>
+              <a:rPr lang="en-US" altLang="ko-KR" dirty="0"/>
+              <a:t>4</a:t>
+            </a:r>
+            <a:endParaRPr lang="ko-KR" altLang="en-US" dirty="0"/>
+          </a:p>
+        </p:txBody>
+      </p:sp>
+      <p:sp>
+        <p:nvSpPr>
+          <p:cNvPr id="35" name="타원 34">
+            <a:extLst>
+              <a:ext uri="{FF2B5EF4-FFF2-40B4-BE49-F238E27FC236}">
+                <a16:creationId xmlns:a16="http://schemas.microsoft.com/office/drawing/2014/main" id="{FB23CD40-8236-4822-86B4-F823C26391BF}"/>
+              </a:ext>
+            </a:extLst>
+          </p:cNvPr>
+          <p:cNvSpPr/>
+          <p:nvPr/>
+        </p:nvSpPr>
+        <p:spPr>
+          <a:xfrm>
+            <a:off x="6030759" y="2244533"/>
+            <a:ext cx="288000" cy="288000"/>
+          </a:xfrm>
+          <a:prstGeom prst="ellipse">
+            <a:avLst/>
+          </a:prstGeom>
+          <a:solidFill>
+            <a:srgbClr val="C00000"/>
+          </a:solidFill>
+        </p:spPr>
+        <p:style>
+          <a:lnRef idx="2">
+            <a:schemeClr val="accent1">
+              <a:shade val="50000"/>
+            </a:schemeClr>
+          </a:lnRef>
+          <a:fillRef idx="1">
+            <a:schemeClr val="accent1"/>
+          </a:fillRef>
+          <a:effectRef idx="0">
+            <a:schemeClr val="accent1"/>
+          </a:effectRef>
+          <a:fontRef idx="minor">
+            <a:schemeClr val="lt1"/>
+          </a:fontRef>
+        </p:style>
+        <p:txBody>
+          <a:bodyPr rtlCol="0" anchor="ctr"/>
+          <a:lstStyle/>
+          <a:p>
+            <a:pPr algn="ctr"/>
+            <a:r>
+              <a:rPr lang="en-US" altLang="ko-KR" dirty="0"/>
+              <a:t>6</a:t>
+            </a:r>
+            <a:endParaRPr lang="ko-KR" altLang="en-US" dirty="0"/>
+          </a:p>
+        </p:txBody>
+      </p:sp>
+      <p:sp>
+        <p:nvSpPr>
+          <p:cNvPr id="36" name="타원 35">
+            <a:extLst>
+              <a:ext uri="{FF2B5EF4-FFF2-40B4-BE49-F238E27FC236}">
+                <a16:creationId xmlns:a16="http://schemas.microsoft.com/office/drawing/2014/main" id="{B2894846-76C1-4CE8-8171-41E145171086}"/>
+              </a:ext>
+            </a:extLst>
+          </p:cNvPr>
+          <p:cNvSpPr/>
+          <p:nvPr/>
+        </p:nvSpPr>
+        <p:spPr>
+          <a:xfrm>
+            <a:off x="6708888" y="1680739"/>
+            <a:ext cx="288000" cy="288000"/>
+          </a:xfrm>
+          <a:prstGeom prst="ellipse">
+            <a:avLst/>
+          </a:prstGeom>
+        </p:spPr>
+        <p:style>
+          <a:lnRef idx="2">
+            <a:schemeClr val="accent1">
+              <a:shade val="50000"/>
+            </a:schemeClr>
+          </a:lnRef>
+          <a:fillRef idx="1">
+            <a:schemeClr val="accent1"/>
+          </a:fillRef>
+          <a:effectRef idx="0">
+            <a:schemeClr val="accent1"/>
+          </a:effectRef>
+          <a:fontRef idx="minor">
+            <a:schemeClr val="lt1"/>
+          </a:fontRef>
+        </p:style>
+        <p:txBody>
+          <a:bodyPr rtlCol="0" anchor="ctr"/>
+          <a:lstStyle/>
+          <a:p>
+            <a:pPr algn="ctr"/>
+            <a:r>
+              <a:rPr lang="en-US" altLang="ko-KR" dirty="0"/>
+              <a:t>9</a:t>
+            </a:r>
+            <a:endParaRPr lang="ko-KR" altLang="en-US" dirty="0"/>
+          </a:p>
+        </p:txBody>
+      </p:sp>
+      <p:sp>
+        <p:nvSpPr>
+          <p:cNvPr id="37" name="타원 36">
+            <a:extLst>
+              <a:ext uri="{FF2B5EF4-FFF2-40B4-BE49-F238E27FC236}">
+                <a16:creationId xmlns:a16="http://schemas.microsoft.com/office/drawing/2014/main" id="{3F96F12A-08D9-4167-B20C-0F7CE57A5E5B}"/>
+              </a:ext>
+            </a:extLst>
+          </p:cNvPr>
+          <p:cNvSpPr/>
+          <p:nvPr/>
+        </p:nvSpPr>
+        <p:spPr>
+          <a:xfrm>
+            <a:off x="7359984" y="1392739"/>
+            <a:ext cx="288000" cy="288000"/>
+          </a:xfrm>
+          <a:prstGeom prst="ellipse">
+            <a:avLst/>
+          </a:prstGeom>
+        </p:spPr>
+        <p:style>
+          <a:lnRef idx="2">
+            <a:schemeClr val="accent1">
+              <a:shade val="50000"/>
+            </a:schemeClr>
+          </a:lnRef>
+          <a:fillRef idx="1">
+            <a:schemeClr val="accent1"/>
+          </a:fillRef>
+          <a:effectRef idx="0">
+            <a:schemeClr val="accent1"/>
+          </a:effectRef>
+          <a:fontRef idx="minor">
+            <a:schemeClr val="lt1"/>
+          </a:fontRef>
+        </p:style>
+        <p:txBody>
+          <a:bodyPr rtlCol="0" anchor="ctr"/>
+          <a:lstStyle/>
+          <a:p>
+            <a:pPr algn="ctr"/>
+            <a:r>
+              <a:rPr lang="en-US" altLang="ko-KR" dirty="0"/>
+              <a:t>8</a:t>
+            </a:r>
+            <a:endParaRPr lang="ko-KR" altLang="en-US" dirty="0"/>
+          </a:p>
+        </p:txBody>
+      </p:sp>
+      <p:sp>
+        <p:nvSpPr>
+          <p:cNvPr id="38" name="타원 37">
+            <a:extLst>
+              <a:ext uri="{FF2B5EF4-FFF2-40B4-BE49-F238E27FC236}">
+                <a16:creationId xmlns:a16="http://schemas.microsoft.com/office/drawing/2014/main" id="{40ADBFA5-9146-4A10-8385-165832621E5C}"/>
+              </a:ext>
+            </a:extLst>
+          </p:cNvPr>
+          <p:cNvSpPr/>
+          <p:nvPr/>
+        </p:nvSpPr>
+        <p:spPr>
+          <a:xfrm>
+            <a:off x="6708888" y="1130861"/>
+            <a:ext cx="288000" cy="288000"/>
+          </a:xfrm>
+          <a:prstGeom prst="ellipse">
+            <a:avLst/>
+          </a:prstGeom>
+        </p:spPr>
+        <p:style>
+          <a:lnRef idx="2">
+            <a:schemeClr val="accent1">
+              <a:shade val="50000"/>
+            </a:schemeClr>
+          </a:lnRef>
+          <a:fillRef idx="1">
+            <a:schemeClr val="accent1"/>
+          </a:fillRef>
+          <a:effectRef idx="0">
+            <a:schemeClr val="accent1"/>
+          </a:effectRef>
+          <a:fontRef idx="minor">
+            <a:schemeClr val="lt1"/>
+          </a:fontRef>
+        </p:style>
+        <p:txBody>
+          <a:bodyPr rtlCol="0" anchor="ctr"/>
+          <a:lstStyle/>
+          <a:p>
+            <a:pPr algn="ctr"/>
+            <a:r>
+              <a:rPr lang="en-US" altLang="ko-KR" dirty="0"/>
+              <a:t>7</a:t>
+            </a:r>
+            <a:endParaRPr lang="ko-KR" altLang="en-US" dirty="0"/>
+          </a:p>
+        </p:txBody>
+      </p:sp>
+      <p:cxnSp>
+        <p:nvCxnSpPr>
+          <p:cNvPr id="39" name="직선 연결선 38">
+            <a:extLst>
+              <a:ext uri="{FF2B5EF4-FFF2-40B4-BE49-F238E27FC236}">
+                <a16:creationId xmlns:a16="http://schemas.microsoft.com/office/drawing/2014/main" id="{3BCC98E3-256C-4938-91F3-7BCA6868514B}"/>
+              </a:ext>
+            </a:extLst>
+          </p:cNvPr>
+          <p:cNvCxnSpPr>
+            <a:stCxn id="31" idx="7"/>
+            <a:endCxn id="32" idx="2"/>
+          </p:cNvCxnSpPr>
+          <p:nvPr/>
+        </p:nvCxnSpPr>
+        <p:spPr>
+          <a:xfrm flipV="1">
+            <a:off x="4983539" y="1313026"/>
+            <a:ext cx="291688" cy="173274"/>
+          </a:xfrm>
+          <a:prstGeom prst="line">
+            <a:avLst/>
+          </a:prstGeom>
+        </p:spPr>
+        <p:style>
+          <a:lnRef idx="1">
+            <a:schemeClr val="dk1"/>
+          </a:lnRef>
+          <a:fillRef idx="0">
+            <a:schemeClr val="dk1"/>
+          </a:fillRef>
+          <a:effectRef idx="0">
+            <a:schemeClr val="dk1"/>
+          </a:effectRef>
+          <a:fontRef idx="minor">
+            <a:schemeClr val="tx1"/>
+          </a:fontRef>
+        </p:style>
+      </p:cxnSp>
+      <p:cxnSp>
+        <p:nvCxnSpPr>
+          <p:cNvPr id="40" name="직선 연결선 39">
+            <a:extLst>
+              <a:ext uri="{FF2B5EF4-FFF2-40B4-BE49-F238E27FC236}">
+                <a16:creationId xmlns:a16="http://schemas.microsoft.com/office/drawing/2014/main" id="{2F31EFAD-FE95-415E-97A3-C7425DA1B46A}"/>
+              </a:ext>
+            </a:extLst>
+          </p:cNvPr>
+          <p:cNvCxnSpPr>
+            <a:cxnSpLocks/>
+            <a:stCxn id="31" idx="5"/>
+            <a:endCxn id="30" idx="2"/>
+          </p:cNvCxnSpPr>
+          <p:nvPr/>
+        </p:nvCxnSpPr>
+        <p:spPr>
+          <a:xfrm>
+            <a:off x="4983539" y="1689946"/>
+            <a:ext cx="291688" cy="172958"/>
+          </a:xfrm>
+          <a:prstGeom prst="line">
+            <a:avLst/>
+          </a:prstGeom>
+        </p:spPr>
+        <p:style>
+          <a:lnRef idx="1">
+            <a:schemeClr val="dk1"/>
+          </a:lnRef>
+          <a:fillRef idx="0">
+            <a:schemeClr val="dk1"/>
+          </a:fillRef>
+          <a:effectRef idx="0">
+            <a:schemeClr val="dk1"/>
+          </a:effectRef>
+          <a:fontRef idx="minor">
+            <a:schemeClr val="tx1"/>
+          </a:fontRef>
+        </p:style>
+      </p:cxnSp>
+      <p:cxnSp>
+        <p:nvCxnSpPr>
+          <p:cNvPr id="41" name="직선 연결선 40">
+            <a:extLst>
+              <a:ext uri="{FF2B5EF4-FFF2-40B4-BE49-F238E27FC236}">
+                <a16:creationId xmlns:a16="http://schemas.microsoft.com/office/drawing/2014/main" id="{3C6AB114-3D19-44FF-B544-20C1EED35960}"/>
+              </a:ext>
+            </a:extLst>
+          </p:cNvPr>
+          <p:cNvCxnSpPr>
+            <a:cxnSpLocks/>
+            <a:stCxn id="32" idx="4"/>
+            <a:endCxn id="30" idx="0"/>
+          </p:cNvCxnSpPr>
+          <p:nvPr/>
+        </p:nvCxnSpPr>
+        <p:spPr>
+          <a:xfrm>
+            <a:off x="5419227" y="1457026"/>
+            <a:ext cx="0" cy="261878"/>
+          </a:xfrm>
+          <a:prstGeom prst="line">
+            <a:avLst/>
+          </a:prstGeom>
+        </p:spPr>
+        <p:style>
+          <a:lnRef idx="1">
+            <a:schemeClr val="dk1"/>
+          </a:lnRef>
+          <a:fillRef idx="0">
+            <a:schemeClr val="dk1"/>
+          </a:fillRef>
+          <a:effectRef idx="0">
+            <a:schemeClr val="dk1"/>
+          </a:effectRef>
+          <a:fontRef idx="minor">
+            <a:schemeClr val="tx1"/>
+          </a:fontRef>
+        </p:style>
+      </p:cxnSp>
+      <p:cxnSp>
+        <p:nvCxnSpPr>
+          <p:cNvPr id="42" name="직선 연결선 41">
+            <a:extLst>
+              <a:ext uri="{FF2B5EF4-FFF2-40B4-BE49-F238E27FC236}">
+                <a16:creationId xmlns:a16="http://schemas.microsoft.com/office/drawing/2014/main" id="{40DE7841-F664-4C87-A015-19BDBE2A4A62}"/>
+              </a:ext>
+            </a:extLst>
+          </p:cNvPr>
+          <p:cNvCxnSpPr>
+            <a:cxnSpLocks/>
+            <a:stCxn id="30" idx="5"/>
+            <a:endCxn id="35" idx="2"/>
+          </p:cNvCxnSpPr>
+          <p:nvPr/>
+        </p:nvCxnSpPr>
+        <p:spPr>
+          <a:xfrm>
+            <a:off x="5521050" y="1964727"/>
+            <a:ext cx="509709" cy="423806"/>
+          </a:xfrm>
+          <a:prstGeom prst="line">
+            <a:avLst/>
+          </a:prstGeom>
+        </p:spPr>
+        <p:style>
+          <a:lnRef idx="1">
+            <a:schemeClr val="dk1"/>
+          </a:lnRef>
+          <a:fillRef idx="0">
+            <a:schemeClr val="dk1"/>
+          </a:fillRef>
+          <a:effectRef idx="0">
+            <a:schemeClr val="dk1"/>
+          </a:effectRef>
+          <a:fontRef idx="minor">
+            <a:schemeClr val="tx1"/>
+          </a:fontRef>
+        </p:style>
+      </p:cxnSp>
+      <p:cxnSp>
+        <p:nvCxnSpPr>
+          <p:cNvPr id="43" name="직선 연결선 42">
+            <a:extLst>
+              <a:ext uri="{FF2B5EF4-FFF2-40B4-BE49-F238E27FC236}">
+                <a16:creationId xmlns:a16="http://schemas.microsoft.com/office/drawing/2014/main" id="{D7935B21-830C-463E-A623-96A3AA8750B7}"/>
+              </a:ext>
+            </a:extLst>
+          </p:cNvPr>
+          <p:cNvCxnSpPr>
+            <a:cxnSpLocks/>
+            <a:stCxn id="35" idx="3"/>
+            <a:endCxn id="34" idx="7"/>
+          </p:cNvCxnSpPr>
+          <p:nvPr/>
+        </p:nvCxnSpPr>
+        <p:spPr>
+          <a:xfrm flipH="1">
+            <a:off x="5988582" y="2490356"/>
+            <a:ext cx="84354" cy="299851"/>
+          </a:xfrm>
+          <a:prstGeom prst="line">
+            <a:avLst/>
+          </a:prstGeom>
+        </p:spPr>
+        <p:style>
+          <a:lnRef idx="1">
+            <a:schemeClr val="dk1"/>
+          </a:lnRef>
+          <a:fillRef idx="0">
+            <a:schemeClr val="dk1"/>
+          </a:fillRef>
+          <a:effectRef idx="0">
+            <a:schemeClr val="dk1"/>
+          </a:effectRef>
+          <a:fontRef idx="minor">
+            <a:schemeClr val="tx1"/>
+          </a:fontRef>
+        </p:style>
+      </p:cxnSp>
+      <p:cxnSp>
+        <p:nvCxnSpPr>
+          <p:cNvPr id="44" name="직선 연결선 43">
+            <a:extLst>
+              <a:ext uri="{FF2B5EF4-FFF2-40B4-BE49-F238E27FC236}">
+                <a16:creationId xmlns:a16="http://schemas.microsoft.com/office/drawing/2014/main" id="{900B653F-0B34-44D7-ACCC-7C4425B29F8C}"/>
+              </a:ext>
+            </a:extLst>
+          </p:cNvPr>
+          <p:cNvCxnSpPr>
+            <a:cxnSpLocks/>
+            <a:stCxn id="35" idx="5"/>
+            <a:endCxn id="33" idx="1"/>
+          </p:cNvCxnSpPr>
+          <p:nvPr/>
+        </p:nvCxnSpPr>
+        <p:spPr>
+          <a:xfrm>
+            <a:off x="6276582" y="2490356"/>
+            <a:ext cx="84354" cy="291036"/>
+          </a:xfrm>
+          <a:prstGeom prst="line">
+            <a:avLst/>
+          </a:prstGeom>
+        </p:spPr>
+        <p:style>
+          <a:lnRef idx="1">
+            <a:schemeClr val="dk1"/>
+          </a:lnRef>
+          <a:fillRef idx="0">
+            <a:schemeClr val="dk1"/>
+          </a:fillRef>
+          <a:effectRef idx="0">
+            <a:schemeClr val="dk1"/>
+          </a:effectRef>
+          <a:fontRef idx="minor">
+            <a:schemeClr val="tx1"/>
+          </a:fontRef>
+        </p:style>
+      </p:cxnSp>
+      <p:cxnSp>
+        <p:nvCxnSpPr>
+          <p:cNvPr id="45" name="직선 연결선 44">
+            <a:extLst>
+              <a:ext uri="{FF2B5EF4-FFF2-40B4-BE49-F238E27FC236}">
+                <a16:creationId xmlns:a16="http://schemas.microsoft.com/office/drawing/2014/main" id="{253DE92B-088B-4CA4-9FA0-EBD0BC0AA7F9}"/>
+              </a:ext>
+            </a:extLst>
+          </p:cNvPr>
+          <p:cNvCxnSpPr>
+            <a:cxnSpLocks/>
+            <a:stCxn id="33" idx="2"/>
+            <a:endCxn id="34" idx="6"/>
+          </p:cNvCxnSpPr>
+          <p:nvPr/>
+        </p:nvCxnSpPr>
+        <p:spPr>
+          <a:xfrm flipH="1">
+            <a:off x="6030759" y="2883215"/>
+            <a:ext cx="288000" cy="8815"/>
+          </a:xfrm>
+          <a:prstGeom prst="line">
+            <a:avLst/>
+          </a:prstGeom>
+        </p:spPr>
+        <p:style>
+          <a:lnRef idx="1">
+            <a:schemeClr val="dk1"/>
+          </a:lnRef>
+          <a:fillRef idx="0">
+            <a:schemeClr val="dk1"/>
+          </a:fillRef>
+          <a:effectRef idx="0">
+            <a:schemeClr val="dk1"/>
+          </a:effectRef>
+          <a:fontRef idx="minor">
+            <a:schemeClr val="tx1"/>
+          </a:fontRef>
+        </p:style>
+      </p:cxnSp>
+      <p:cxnSp>
+        <p:nvCxnSpPr>
+          <p:cNvPr id="46" name="직선 연결선 45">
+            <a:extLst>
+              <a:ext uri="{FF2B5EF4-FFF2-40B4-BE49-F238E27FC236}">
+                <a16:creationId xmlns:a16="http://schemas.microsoft.com/office/drawing/2014/main" id="{6D8FF8CE-263A-4183-83F0-DDD3AB15C4D8}"/>
+              </a:ext>
+            </a:extLst>
+          </p:cNvPr>
+          <p:cNvCxnSpPr>
+            <a:cxnSpLocks/>
+            <a:stCxn id="36" idx="3"/>
+            <a:endCxn id="35" idx="6"/>
+          </p:cNvCxnSpPr>
+          <p:nvPr/>
+        </p:nvCxnSpPr>
+        <p:spPr>
+          <a:xfrm flipH="1">
+            <a:off x="6318759" y="1926562"/>
+            <a:ext cx="432306" cy="461971"/>
+          </a:xfrm>
+          <a:prstGeom prst="line">
+            <a:avLst/>
+          </a:prstGeom>
+        </p:spPr>
+        <p:style>
+          <a:lnRef idx="1">
+            <a:schemeClr val="dk1"/>
+          </a:lnRef>
+          <a:fillRef idx="0">
+            <a:schemeClr val="dk1"/>
+          </a:fillRef>
+          <a:effectRef idx="0">
+            <a:schemeClr val="dk1"/>
+          </a:effectRef>
+          <a:fontRef idx="minor">
+            <a:schemeClr val="tx1"/>
+          </a:fontRef>
+        </p:style>
+      </p:cxnSp>
+      <p:cxnSp>
+        <p:nvCxnSpPr>
+          <p:cNvPr id="47" name="직선 연결선 46">
+            <a:extLst>
+              <a:ext uri="{FF2B5EF4-FFF2-40B4-BE49-F238E27FC236}">
+                <a16:creationId xmlns:a16="http://schemas.microsoft.com/office/drawing/2014/main" id="{72457A1F-6D59-4CA7-A8BF-C481E564E9BA}"/>
+              </a:ext>
+            </a:extLst>
+          </p:cNvPr>
+          <p:cNvCxnSpPr>
+            <a:cxnSpLocks/>
+            <a:stCxn id="37" idx="3"/>
+            <a:endCxn id="36" idx="6"/>
+          </p:cNvCxnSpPr>
+          <p:nvPr/>
+        </p:nvCxnSpPr>
+        <p:spPr>
+          <a:xfrm flipH="1">
+            <a:off x="6996888" y="1638562"/>
+            <a:ext cx="405273" cy="186177"/>
+          </a:xfrm>
+          <a:prstGeom prst="line">
+            <a:avLst/>
+          </a:prstGeom>
+        </p:spPr>
+        <p:style>
+          <a:lnRef idx="1">
+            <a:schemeClr val="dk1"/>
+          </a:lnRef>
+          <a:fillRef idx="0">
+            <a:schemeClr val="dk1"/>
+          </a:fillRef>
+          <a:effectRef idx="0">
+            <a:schemeClr val="dk1"/>
+          </a:effectRef>
+          <a:fontRef idx="minor">
+            <a:schemeClr val="tx1"/>
+          </a:fontRef>
+        </p:style>
+      </p:cxnSp>
+      <p:cxnSp>
+        <p:nvCxnSpPr>
+          <p:cNvPr id="48" name="직선 연결선 47">
+            <a:extLst>
+              <a:ext uri="{FF2B5EF4-FFF2-40B4-BE49-F238E27FC236}">
+                <a16:creationId xmlns:a16="http://schemas.microsoft.com/office/drawing/2014/main" id="{B3EB2B20-A7CB-4955-BA9D-037F8D3B05A4}"/>
+              </a:ext>
+            </a:extLst>
+          </p:cNvPr>
+          <p:cNvCxnSpPr>
+            <a:cxnSpLocks/>
+            <a:stCxn id="37" idx="1"/>
+            <a:endCxn id="38" idx="6"/>
+          </p:cNvCxnSpPr>
+          <p:nvPr/>
+        </p:nvCxnSpPr>
+        <p:spPr>
+          <a:xfrm flipH="1" flipV="1">
+            <a:off x="6996888" y="1274861"/>
+            <a:ext cx="405273" cy="160055"/>
+          </a:xfrm>
+          <a:prstGeom prst="line">
+            <a:avLst/>
+          </a:prstGeom>
+        </p:spPr>
+        <p:style>
+          <a:lnRef idx="1">
+            <a:schemeClr val="dk1"/>
+          </a:lnRef>
+          <a:fillRef idx="0">
+            <a:schemeClr val="dk1"/>
+          </a:fillRef>
+          <a:effectRef idx="0">
+            <a:schemeClr val="dk1"/>
+          </a:effectRef>
+          <a:fontRef idx="minor">
+            <a:schemeClr val="tx1"/>
+          </a:fontRef>
+        </p:style>
+      </p:cxnSp>
+      <p:cxnSp>
+        <p:nvCxnSpPr>
+          <p:cNvPr id="49" name="직선 연결선 48">
+            <a:extLst>
+              <a:ext uri="{FF2B5EF4-FFF2-40B4-BE49-F238E27FC236}">
+                <a16:creationId xmlns:a16="http://schemas.microsoft.com/office/drawing/2014/main" id="{21A85EDB-A684-4D57-BB6D-E1D0A01B01C4}"/>
+              </a:ext>
+            </a:extLst>
+          </p:cNvPr>
+          <p:cNvCxnSpPr>
+            <a:cxnSpLocks/>
+            <a:stCxn id="36" idx="0"/>
+            <a:endCxn id="38" idx="4"/>
+          </p:cNvCxnSpPr>
+          <p:nvPr/>
+        </p:nvCxnSpPr>
+        <p:spPr>
+          <a:xfrm flipV="1">
+            <a:off x="6852888" y="1418861"/>
+            <a:ext cx="0" cy="261878"/>
+          </a:xfrm>
+          <a:prstGeom prst="line">
+            <a:avLst/>
+          </a:prstGeom>
+        </p:spPr>
+        <p:style>
+          <a:lnRef idx="1">
+            <a:schemeClr val="dk1"/>
+          </a:lnRef>
+          <a:fillRef idx="0">
+            <a:schemeClr val="dk1"/>
+          </a:fillRef>
+          <a:effectRef idx="0">
+            <a:schemeClr val="dk1"/>
+          </a:effectRef>
+          <a:fontRef idx="minor">
+            <a:schemeClr val="tx1"/>
+          </a:fontRef>
+        </p:style>
+      </p:cxnSp>
+      <p:cxnSp>
+        <p:nvCxnSpPr>
+          <p:cNvPr id="50" name="직선 연결선 49">
+            <a:extLst>
+              <a:ext uri="{FF2B5EF4-FFF2-40B4-BE49-F238E27FC236}">
+                <a16:creationId xmlns:a16="http://schemas.microsoft.com/office/drawing/2014/main" id="{C10680E7-1738-4E96-838D-09D27AB67A03}"/>
+              </a:ext>
+            </a:extLst>
+          </p:cNvPr>
+          <p:cNvCxnSpPr>
+            <a:cxnSpLocks/>
+            <a:stCxn id="30" idx="6"/>
+            <a:endCxn id="36" idx="2"/>
+          </p:cNvCxnSpPr>
+          <p:nvPr/>
+        </p:nvCxnSpPr>
+        <p:spPr>
+          <a:xfrm flipV="1">
+            <a:off x="5563227" y="1824739"/>
+            <a:ext cx="1145661" cy="38165"/>
+          </a:xfrm>
+          <a:prstGeom prst="line">
+            <a:avLst/>
+          </a:prstGeom>
+        </p:spPr>
+        <p:style>
+          <a:lnRef idx="1">
+            <a:schemeClr val="dk1"/>
+          </a:lnRef>
+          <a:fillRef idx="0">
+            <a:schemeClr val="dk1"/>
+          </a:fillRef>
+          <a:effectRef idx="0">
+            <a:schemeClr val="dk1"/>
+          </a:effectRef>
+          <a:fontRef idx="minor">
+            <a:schemeClr val="tx1"/>
+          </a:fontRef>
+        </p:style>
+      </p:cxnSp>
+      <p:sp>
+        <p:nvSpPr>
+          <p:cNvPr id="51" name="TextBox 50">
+            <a:extLst>
+              <a:ext uri="{FF2B5EF4-FFF2-40B4-BE49-F238E27FC236}">
+                <a16:creationId xmlns:a16="http://schemas.microsoft.com/office/drawing/2014/main" id="{5604947B-7846-4850-80B7-A54CC7111821}"/>
+              </a:ext>
+            </a:extLst>
+          </p:cNvPr>
+          <p:cNvSpPr txBox="1"/>
+          <p:nvPr/>
+        </p:nvSpPr>
+        <p:spPr>
+          <a:xfrm>
+            <a:off x="5448874" y="504731"/>
+            <a:ext cx="1380506" cy="461665"/>
+          </a:xfrm>
+          <a:prstGeom prst="rect">
+            <a:avLst/>
+          </a:prstGeom>
+          <a:noFill/>
+        </p:spPr>
+        <p:txBody>
+          <a:bodyPr wrap="none" rtlCol="0">
+            <a:spAutoFit/>
+          </a:bodyPr>
+          <a:lstStyle/>
+          <a:p>
+            <a:r>
+              <a:rPr lang="en-US" altLang="ko-KR" sz="2400" b="1" dirty="0"/>
+              <a:t>Graph</a:t>
+            </a:r>
+            <a:r>
+              <a:rPr lang="ko-KR" altLang="en-US" sz="2400" b="1" dirty="0"/>
+              <a:t> </a:t>
+            </a:r>
+            <a:r>
+              <a:rPr lang="en-US" altLang="ko-KR" sz="2400" b="1" dirty="0"/>
+              <a:t>B</a:t>
+            </a:r>
+            <a:endParaRPr lang="ko-KR" altLang="en-US" sz="2400" b="1" dirty="0"/>
+          </a:p>
+        </p:txBody>
+      </p:sp>
+    </p:spTree>
+    <p:extLst>
+      <p:ext uri="{BB962C8B-B14F-4D97-AF65-F5344CB8AC3E}">
+        <p14:creationId xmlns:p14="http://schemas.microsoft.com/office/powerpoint/2010/main" val="1462405158"/>
+      </p:ext>
+    </p:extLst>
+  </p:cSld>
+  <p:clrMapOvr>
+    <a:masterClrMapping/>
+  </p:clrMapOvr>
+</p:sld>
+</file>
+
 <file path=ppt/theme/theme1.xml><?xml version="1.0" encoding="utf-8"?>
 <a:theme xmlns:a="http://schemas.openxmlformats.org/drawingml/2006/main" name="Office 테마">
   <a:themeElements>
